--- a/Cloud Computing Presentation.pptx
+++ b/Cloud Computing Presentation.pptx
@@ -1,27 +1,25 @@
 
 <file path=ppt/presentation.xml><?xml version="1.0" encoding="utf-8"?>
-<p:presentation xmlns:a="http://schemas.openxmlformats.org/drawingml/2006/main" xmlns:r="http://schemas.openxmlformats.org/officeDocument/2006/relationships" xmlns:mc="http://schemas.openxmlformats.org/markup-compatibility/2006" xmlns:mv="urn:schemas-microsoft-com:mac:vml" xmlns:p="http://schemas.openxmlformats.org/presentationml/2006/main" xmlns:c="http://schemas.openxmlformats.org/drawingml/2006/chart" xmlns:dgm="http://schemas.openxmlformats.org/drawingml/2006/diagram" xmlns:o="urn:schemas-microsoft-com:office:office" xmlns:v="urn:schemas-microsoft-com:vml" xmlns:pvml="urn:schemas-microsoft-com:office:powerpoint" xmlns:com="http://schemas.openxmlformats.org/drawingml/2006/compatibility" xmlns:p14="http://schemas.microsoft.com/office/powerpoint/2010/main" xmlns:p15="http://schemas.microsoft.com/office/powerpoint/2012/main" xmlns:ahyp="http://schemas.microsoft.com/office/drawing/2018/hyperlinkcolor" autoCompressPictures="0" strictFirstAndLastChars="0" saveSubsetFonts="1">
+<p:presentation xmlns:a="http://schemas.openxmlformats.org/drawingml/2006/main" xmlns:r="http://schemas.openxmlformats.org/officeDocument/2006/relationships" xmlns:p="http://schemas.openxmlformats.org/presentationml/2006/main" strictFirstAndLastChars="0" saveSubsetFonts="1" autoCompressPictures="0">
   <p:sldMasterIdLst>
-    <p:sldMasterId id="2147483659" r:id="rId4"/>
+    <p:sldMasterId id="2147483659" r:id="rId1"/>
   </p:sldMasterIdLst>
   <p:notesMasterIdLst>
-    <p:notesMasterId r:id="rId5"/>
+    <p:notesMasterId r:id="rId9"/>
   </p:notesMasterIdLst>
   <p:sldIdLst>
-    <p:sldId id="256" r:id="rId6"/>
-    <p:sldId id="257" r:id="rId7"/>
-    <p:sldId id="258" r:id="rId8"/>
-    <p:sldId id="259" r:id="rId9"/>
-    <p:sldId id="260" r:id="rId10"/>
-    <p:sldId id="261" r:id="rId11"/>
-    <p:sldId id="262" r:id="rId12"/>
-    <p:sldId id="263" r:id="rId13"/>
-    <p:sldId id="264" r:id="rId14"/>
+    <p:sldId id="256" r:id="rId2"/>
+    <p:sldId id="257" r:id="rId3"/>
+    <p:sldId id="258" r:id="rId4"/>
+    <p:sldId id="259" r:id="rId5"/>
+    <p:sldId id="260" r:id="rId6"/>
+    <p:sldId id="262" r:id="rId7"/>
+    <p:sldId id="261" r:id="rId8"/>
   </p:sldIdLst>
-  <p:sldSz cy="5143500" cx="9144000"/>
+  <p:sldSz cx="9144000" cy="5143500" type="screen16x9"/>
   <p:notesSz cx="6858000" cy="9144000"/>
   <p:defaultTextStyle>
-    <a:defPPr lvl="0" marR="0" rtl="0" algn="l">
+    <a:defPPr marR="0" lvl="0" algn="l" rtl="0">
       <a:lnSpc>
         <a:spcPct val="100000"/>
       </a:lnSpc>
@@ -32,7 +30,7 @@
         <a:spcPts val="0"/>
       </a:spcAft>
     </a:defPPr>
-    <a:lvl1pPr lvl="0" marR="0" rtl="0" algn="l">
+    <a:lvl1pPr marR="0" lvl="0" algn="l" rtl="0">
       <a:lnSpc>
         <a:spcPct val="100000"/>
       </a:lnSpc>
@@ -46,7 +44,7 @@
         <a:srgbClr val="000000"/>
       </a:buClr>
       <a:buFont typeface="Arial"/>
-      <a:defRPr b="0" i="0" sz="1400" u="none" cap="none" strike="noStrike">
+      <a:defRPr sz="1400" b="0" i="0" u="none" strike="noStrike" cap="none">
         <a:solidFill>
           <a:srgbClr val="000000"/>
         </a:solidFill>
@@ -56,7 +54,7 @@
         <a:sym typeface="Arial"/>
       </a:defRPr>
     </a:lvl1pPr>
-    <a:lvl2pPr lvl="1" marR="0" rtl="0" algn="l">
+    <a:lvl2pPr marR="0" lvl="1" algn="l" rtl="0">
       <a:lnSpc>
         <a:spcPct val="100000"/>
       </a:lnSpc>
@@ -70,7 +68,7 @@
         <a:srgbClr val="000000"/>
       </a:buClr>
       <a:buFont typeface="Arial"/>
-      <a:defRPr b="0" i="0" sz="1400" u="none" cap="none" strike="noStrike">
+      <a:defRPr sz="1400" b="0" i="0" u="none" strike="noStrike" cap="none">
         <a:solidFill>
           <a:srgbClr val="000000"/>
         </a:solidFill>
@@ -80,7 +78,7 @@
         <a:sym typeface="Arial"/>
       </a:defRPr>
     </a:lvl2pPr>
-    <a:lvl3pPr lvl="2" marR="0" rtl="0" algn="l">
+    <a:lvl3pPr marR="0" lvl="2" algn="l" rtl="0">
       <a:lnSpc>
         <a:spcPct val="100000"/>
       </a:lnSpc>
@@ -94,7 +92,7 @@
         <a:srgbClr val="000000"/>
       </a:buClr>
       <a:buFont typeface="Arial"/>
-      <a:defRPr b="0" i="0" sz="1400" u="none" cap="none" strike="noStrike">
+      <a:defRPr sz="1400" b="0" i="0" u="none" strike="noStrike" cap="none">
         <a:solidFill>
           <a:srgbClr val="000000"/>
         </a:solidFill>
@@ -104,7 +102,7 @@
         <a:sym typeface="Arial"/>
       </a:defRPr>
     </a:lvl3pPr>
-    <a:lvl4pPr lvl="3" marR="0" rtl="0" algn="l">
+    <a:lvl4pPr marR="0" lvl="3" algn="l" rtl="0">
       <a:lnSpc>
         <a:spcPct val="100000"/>
       </a:lnSpc>
@@ -118,7 +116,7 @@
         <a:srgbClr val="000000"/>
       </a:buClr>
       <a:buFont typeface="Arial"/>
-      <a:defRPr b="0" i="0" sz="1400" u="none" cap="none" strike="noStrike">
+      <a:defRPr sz="1400" b="0" i="0" u="none" strike="noStrike" cap="none">
         <a:solidFill>
           <a:srgbClr val="000000"/>
         </a:solidFill>
@@ -128,7 +126,7 @@
         <a:sym typeface="Arial"/>
       </a:defRPr>
     </a:lvl4pPr>
-    <a:lvl5pPr lvl="4" marR="0" rtl="0" algn="l">
+    <a:lvl5pPr marR="0" lvl="4" algn="l" rtl="0">
       <a:lnSpc>
         <a:spcPct val="100000"/>
       </a:lnSpc>
@@ -142,7 +140,7 @@
         <a:srgbClr val="000000"/>
       </a:buClr>
       <a:buFont typeface="Arial"/>
-      <a:defRPr b="0" i="0" sz="1400" u="none" cap="none" strike="noStrike">
+      <a:defRPr sz="1400" b="0" i="0" u="none" strike="noStrike" cap="none">
         <a:solidFill>
           <a:srgbClr val="000000"/>
         </a:solidFill>
@@ -152,7 +150,7 @@
         <a:sym typeface="Arial"/>
       </a:defRPr>
     </a:lvl5pPr>
-    <a:lvl6pPr lvl="5" marR="0" rtl="0" algn="l">
+    <a:lvl6pPr marR="0" lvl="5" algn="l" rtl="0">
       <a:lnSpc>
         <a:spcPct val="100000"/>
       </a:lnSpc>
@@ -166,7 +164,7 @@
         <a:srgbClr val="000000"/>
       </a:buClr>
       <a:buFont typeface="Arial"/>
-      <a:defRPr b="0" i="0" sz="1400" u="none" cap="none" strike="noStrike">
+      <a:defRPr sz="1400" b="0" i="0" u="none" strike="noStrike" cap="none">
         <a:solidFill>
           <a:srgbClr val="000000"/>
         </a:solidFill>
@@ -176,7 +174,7 @@
         <a:sym typeface="Arial"/>
       </a:defRPr>
     </a:lvl6pPr>
-    <a:lvl7pPr lvl="6" marR="0" rtl="0" algn="l">
+    <a:lvl7pPr marR="0" lvl="6" algn="l" rtl="0">
       <a:lnSpc>
         <a:spcPct val="100000"/>
       </a:lnSpc>
@@ -190,7 +188,7 @@
         <a:srgbClr val="000000"/>
       </a:buClr>
       <a:buFont typeface="Arial"/>
-      <a:defRPr b="0" i="0" sz="1400" u="none" cap="none" strike="noStrike">
+      <a:defRPr sz="1400" b="0" i="0" u="none" strike="noStrike" cap="none">
         <a:solidFill>
           <a:srgbClr val="000000"/>
         </a:solidFill>
@@ -200,7 +198,7 @@
         <a:sym typeface="Arial"/>
       </a:defRPr>
     </a:lvl7pPr>
-    <a:lvl8pPr lvl="7" marR="0" rtl="0" algn="l">
+    <a:lvl8pPr marR="0" lvl="7" algn="l" rtl="0">
       <a:lnSpc>
         <a:spcPct val="100000"/>
       </a:lnSpc>
@@ -214,7 +212,7 @@
         <a:srgbClr val="000000"/>
       </a:buClr>
       <a:buFont typeface="Arial"/>
-      <a:defRPr b="0" i="0" sz="1400" u="none" cap="none" strike="noStrike">
+      <a:defRPr sz="1400" b="0" i="0" u="none" strike="noStrike" cap="none">
         <a:solidFill>
           <a:srgbClr val="000000"/>
         </a:solidFill>
@@ -224,7 +222,7 @@
         <a:sym typeface="Arial"/>
       </a:defRPr>
     </a:lvl8pPr>
-    <a:lvl9pPr lvl="8" marR="0" rtl="0" algn="l">
+    <a:lvl9pPr marR="0" lvl="8" algn="l" rtl="0">
       <a:lnSpc>
         <a:spcPct val="100000"/>
       </a:lnSpc>
@@ -238,7 +236,7 @@
         <a:srgbClr val="000000"/>
       </a:buClr>
       <a:buFont typeface="Arial"/>
-      <a:defRPr b="0" i="0" sz="1400" u="none" cap="none" strike="noStrike">
+      <a:defRPr sz="1400" b="0" i="0" u="none" strike="noStrike" cap="none">
         <a:solidFill>
           <a:srgbClr val="000000"/>
         </a:solidFill>
@@ -251,7 +249,7 @@
   </p:defaultTextStyle>
   <p:extLst>
     <p:ext uri="{EFAFB233-063F-42B5-8137-9DF3F51BA10A}">
-      <p15:sldGuideLst>
+      <p15:sldGuideLst xmlns:p15="http://schemas.microsoft.com/office/powerpoint/2012/main">
         <p15:guide id="1" orient="horz" pos="1620">
           <p15:clr>
             <a:srgbClr val="747775"/>
@@ -268,12 +266,25 @@
 </p:presentation>
 </file>
 
+<file path=ppt/revisionInfo.xml><?xml version="1.0" encoding="utf-8"?>
+<p1510:revInfo xmlns:a="http://schemas.openxmlformats.org/drawingml/2006/main" xmlns:r="http://schemas.openxmlformats.org/officeDocument/2006/relationships" xmlns:p1510="http://schemas.microsoft.com/office/powerpoint/2015/10/main">
+  <p1510:revLst>
+    <p1510:client id="{AA245384-212A-4D10-8D64-0402729215DD}" v="4" dt="2025-04-09T20:33:55.426"/>
+  </p1510:revLst>
+</p1510:revInfo>
+</file>
+
 <file path=ppt/notesMasters/notesMaster1.xml><?xml version="1.0" encoding="utf-8"?>
-<p:notesMaster xmlns:a="http://schemas.openxmlformats.org/drawingml/2006/main" xmlns:r="http://schemas.openxmlformats.org/officeDocument/2006/relationships" xmlns:mc="http://schemas.openxmlformats.org/markup-compatibility/2006" xmlns:mv="urn:schemas-microsoft-com:mac:vml" xmlns:p="http://schemas.openxmlformats.org/presentationml/2006/main" xmlns:c="http://schemas.openxmlformats.org/drawingml/2006/chart" xmlns:dgm="http://schemas.openxmlformats.org/drawingml/2006/diagram" xmlns:o="urn:schemas-microsoft-com:office:office" xmlns:v="urn:schemas-microsoft-com:vml" xmlns:pvml="urn:schemas-microsoft-com:office:powerpoint" xmlns:com="http://schemas.openxmlformats.org/drawingml/2006/compatibility" xmlns:p14="http://schemas.microsoft.com/office/powerpoint/2010/main" xmlns:p15="http://schemas.microsoft.com/office/powerpoint/2012/main" xmlns:ahyp="http://schemas.microsoft.com/office/drawing/2018/hyperlinkcolor">
+<p:notesMaster xmlns:a="http://schemas.openxmlformats.org/drawingml/2006/main" xmlns:r="http://schemas.openxmlformats.org/officeDocument/2006/relationships" xmlns:p="http://schemas.openxmlformats.org/presentationml/2006/main">
   <p:cSld>
+    <p:bg>
+      <p:bgRef idx="1001">
+        <a:schemeClr val="bg1"/>
+      </p:bgRef>
+    </p:bg>
     <p:spTree>
       <p:nvGrpSpPr>
-        <p:cNvPr id="2" name="Shape 2"/>
+        <p:cNvPr id="1" name="Shape 2"/>
         <p:cNvGrpSpPr/>
         <p:nvPr/>
       </p:nvGrpSpPr>
@@ -288,9 +299,11 @@
       <p:sp>
         <p:nvSpPr>
           <p:cNvPr id="3" name="Google Shape;3;n"/>
-          <p:cNvSpPr/>
+          <p:cNvSpPr>
+            <a:spLocks noGrp="1" noRot="1" noChangeAspect="1"/>
+          </p:cNvSpPr>
           <p:nvPr>
-            <p:ph idx="2" type="sldImg"/>
+            <p:ph type="sldImg" idx="2"/>
           </p:nvPr>
         </p:nvSpPr>
         <p:spPr>
@@ -299,9 +312,13 @@
             <a:ext cx="6096075" cy="3429000"/>
           </a:xfrm>
           <a:custGeom>
-            <a:rect b="b" l="l" r="r" t="t"/>
+            <a:avLst/>
+            <a:gdLst/>
+            <a:ahLst/>
+            <a:cxnLst/>
+            <a:rect l="l" t="t" r="r" b="b"/>
             <a:pathLst>
-              <a:path extrusionOk="0" h="120000" w="120000">
+              <a:path w="120000" h="120000" extrusionOk="0">
                 <a:moveTo>
                   <a:pt x="0" y="0"/>
                 </a:moveTo>
@@ -319,23 +336,25 @@
             </a:pathLst>
           </a:custGeom>
           <a:noFill/>
-          <a:ln cap="flat" cmpd="sng" w="9525">
+          <a:ln w="9525" cap="flat" cmpd="sng">
             <a:solidFill>
               <a:srgbClr val="000000"/>
             </a:solidFill>
             <a:prstDash val="solid"/>
             <a:round/>
-            <a:headEnd len="sm" w="sm" type="none"/>
-            <a:tailEnd len="sm" w="sm" type="none"/>
+            <a:headEnd type="none" w="sm" len="sm"/>
+            <a:tailEnd type="none" w="sm" len="sm"/>
           </a:ln>
         </p:spPr>
       </p:sp>
       <p:sp>
         <p:nvSpPr>
           <p:cNvPr id="4" name="Google Shape;4;n"/>
-          <p:cNvSpPr txBox="1"/>
+          <p:cNvSpPr txBox="1">
+            <a:spLocks noGrp="1"/>
+          </p:cNvSpPr>
           <p:nvPr>
-            <p:ph idx="1" type="body"/>
+            <p:ph type="body" idx="1"/>
           </p:nvPr>
         </p:nvSpPr>
         <p:spPr>
@@ -352,11 +371,11 @@
           </a:ln>
         </p:spPr>
         <p:txBody>
-          <a:bodyPr anchorCtr="0" anchor="t" bIns="91425" lIns="91425" spcFirstLastPara="1" rIns="91425" wrap="square" tIns="91425">
+          <a:bodyPr spcFirstLastPara="1" wrap="square" lIns="91425" tIns="91425" rIns="91425" bIns="91425" anchor="t" anchorCtr="0">
             <a:noAutofit/>
           </a:bodyPr>
           <a:lstStyle>
-            <a:lvl1pPr indent="-298450" lvl="0" marL="457200">
+            <a:lvl1pPr marL="457200" lvl="0" indent="-298450">
               <a:spcBef>
                 <a:spcPts val="0"/>
               </a:spcBef>
@@ -367,7 +386,7 @@
               <a:buChar char="●"/>
               <a:defRPr sz="1100"/>
             </a:lvl1pPr>
-            <a:lvl2pPr indent="-298450" lvl="1" marL="914400">
+            <a:lvl2pPr marL="914400" lvl="1" indent="-298450">
               <a:spcBef>
                 <a:spcPts val="0"/>
               </a:spcBef>
@@ -378,7 +397,7 @@
               <a:buChar char="○"/>
               <a:defRPr sz="1100"/>
             </a:lvl2pPr>
-            <a:lvl3pPr indent="-298450" lvl="2" marL="1371600">
+            <a:lvl3pPr marL="1371600" lvl="2" indent="-298450">
               <a:spcBef>
                 <a:spcPts val="0"/>
               </a:spcBef>
@@ -389,7 +408,7 @@
               <a:buChar char="■"/>
               <a:defRPr sz="1100"/>
             </a:lvl3pPr>
-            <a:lvl4pPr indent="-298450" lvl="3" marL="1828800">
+            <a:lvl4pPr marL="1828800" lvl="3" indent="-298450">
               <a:spcBef>
                 <a:spcPts val="0"/>
               </a:spcBef>
@@ -400,7 +419,7 @@
               <a:buChar char="●"/>
               <a:defRPr sz="1100"/>
             </a:lvl4pPr>
-            <a:lvl5pPr indent="-298450" lvl="4" marL="2286000">
+            <a:lvl5pPr marL="2286000" lvl="4" indent="-298450">
               <a:spcBef>
                 <a:spcPts val="0"/>
               </a:spcBef>
@@ -411,7 +430,7 @@
               <a:buChar char="○"/>
               <a:defRPr sz="1100"/>
             </a:lvl5pPr>
-            <a:lvl6pPr indent="-298450" lvl="5" marL="2743200">
+            <a:lvl6pPr marL="2743200" lvl="5" indent="-298450">
               <a:spcBef>
                 <a:spcPts val="0"/>
               </a:spcBef>
@@ -422,7 +441,7 @@
               <a:buChar char="■"/>
               <a:defRPr sz="1100"/>
             </a:lvl6pPr>
-            <a:lvl7pPr indent="-298450" lvl="6" marL="3200400">
+            <a:lvl7pPr marL="3200400" lvl="6" indent="-298450">
               <a:spcBef>
                 <a:spcPts val="0"/>
               </a:spcBef>
@@ -433,7 +452,7 @@
               <a:buChar char="●"/>
               <a:defRPr sz="1100"/>
             </a:lvl7pPr>
-            <a:lvl8pPr indent="-298450" lvl="7" marL="3657600">
+            <a:lvl8pPr marL="3657600" lvl="7" indent="-298450">
               <a:spcBef>
                 <a:spcPts val="0"/>
               </a:spcBef>
@@ -444,7 +463,7 @@
               <a:buChar char="○"/>
               <a:defRPr sz="1100"/>
             </a:lvl8pPr>
-            <a:lvl9pPr indent="-298450" lvl="8" marL="4114800">
+            <a:lvl9pPr marL="4114800" lvl="8" indent="-298450">
               <a:spcBef>
                 <a:spcPts val="0"/>
               </a:spcBef>
@@ -456,14 +475,16 @@
               <a:defRPr sz="1100"/>
             </a:lvl9pPr>
           </a:lstStyle>
-          <a:p/>
+          <a:p>
+            <a:endParaRPr/>
+          </a:p>
         </p:txBody>
       </p:sp>
     </p:spTree>
   </p:cSld>
-  <p:clrMap accent1="accent1" accent2="accent2" accent3="accent3" accent4="accent4" accent5="accent5" accent6="accent6" bg1="lt1" bg2="dk2" tx1="dk1" tx2="lt2" folHlink="folHlink" hlink="hlink"/>
+  <p:clrMap bg1="lt1" tx1="dk1" bg2="dk2" tx2="lt2" accent1="accent1" accent2="accent2" accent3="accent3" accent4="accent4" accent5="accent5" accent6="accent6" hlink="hlink" folHlink="folHlink"/>
   <p:notesStyle>
-    <a:defPPr lvl="0" marR="0" rtl="0" algn="l">
+    <a:defPPr marR="0" lvl="0" algn="l" rtl="0">
       <a:lnSpc>
         <a:spcPct val="100000"/>
       </a:lnSpc>
@@ -474,7 +495,7 @@
         <a:spcPts val="0"/>
       </a:spcAft>
     </a:defPPr>
-    <a:lvl1pPr lvl="0" marR="0" rtl="0" algn="l">
+    <a:lvl1pPr marR="0" lvl="0" algn="l" rtl="0">
       <a:lnSpc>
         <a:spcPct val="100000"/>
       </a:lnSpc>
@@ -488,7 +509,7 @@
         <a:srgbClr val="000000"/>
       </a:buClr>
       <a:buFont typeface="Arial"/>
-      <a:defRPr b="0" i="0" sz="1400" u="none" cap="none" strike="noStrike">
+      <a:defRPr sz="1400" b="0" i="0" u="none" strike="noStrike" cap="none">
         <a:solidFill>
           <a:srgbClr val="000000"/>
         </a:solidFill>
@@ -498,7 +519,7 @@
         <a:sym typeface="Arial"/>
       </a:defRPr>
     </a:lvl1pPr>
-    <a:lvl2pPr lvl="1" marR="0" rtl="0" algn="l">
+    <a:lvl2pPr marR="0" lvl="1" algn="l" rtl="0">
       <a:lnSpc>
         <a:spcPct val="100000"/>
       </a:lnSpc>
@@ -512,7 +533,7 @@
         <a:srgbClr val="000000"/>
       </a:buClr>
       <a:buFont typeface="Arial"/>
-      <a:defRPr b="0" i="0" sz="1400" u="none" cap="none" strike="noStrike">
+      <a:defRPr sz="1400" b="0" i="0" u="none" strike="noStrike" cap="none">
         <a:solidFill>
           <a:srgbClr val="000000"/>
         </a:solidFill>
@@ -522,7 +543,7 @@
         <a:sym typeface="Arial"/>
       </a:defRPr>
     </a:lvl2pPr>
-    <a:lvl3pPr lvl="2" marR="0" rtl="0" algn="l">
+    <a:lvl3pPr marR="0" lvl="2" algn="l" rtl="0">
       <a:lnSpc>
         <a:spcPct val="100000"/>
       </a:lnSpc>
@@ -536,7 +557,7 @@
         <a:srgbClr val="000000"/>
       </a:buClr>
       <a:buFont typeface="Arial"/>
-      <a:defRPr b="0" i="0" sz="1400" u="none" cap="none" strike="noStrike">
+      <a:defRPr sz="1400" b="0" i="0" u="none" strike="noStrike" cap="none">
         <a:solidFill>
           <a:srgbClr val="000000"/>
         </a:solidFill>
@@ -546,7 +567,7 @@
         <a:sym typeface="Arial"/>
       </a:defRPr>
     </a:lvl3pPr>
-    <a:lvl4pPr lvl="3" marR="0" rtl="0" algn="l">
+    <a:lvl4pPr marR="0" lvl="3" algn="l" rtl="0">
       <a:lnSpc>
         <a:spcPct val="100000"/>
       </a:lnSpc>
@@ -560,7 +581,7 @@
         <a:srgbClr val="000000"/>
       </a:buClr>
       <a:buFont typeface="Arial"/>
-      <a:defRPr b="0" i="0" sz="1400" u="none" cap="none" strike="noStrike">
+      <a:defRPr sz="1400" b="0" i="0" u="none" strike="noStrike" cap="none">
         <a:solidFill>
           <a:srgbClr val="000000"/>
         </a:solidFill>
@@ -570,7 +591,7 @@
         <a:sym typeface="Arial"/>
       </a:defRPr>
     </a:lvl4pPr>
-    <a:lvl5pPr lvl="4" marR="0" rtl="0" algn="l">
+    <a:lvl5pPr marR="0" lvl="4" algn="l" rtl="0">
       <a:lnSpc>
         <a:spcPct val="100000"/>
       </a:lnSpc>
@@ -584,7 +605,7 @@
         <a:srgbClr val="000000"/>
       </a:buClr>
       <a:buFont typeface="Arial"/>
-      <a:defRPr b="0" i="0" sz="1400" u="none" cap="none" strike="noStrike">
+      <a:defRPr sz="1400" b="0" i="0" u="none" strike="noStrike" cap="none">
         <a:solidFill>
           <a:srgbClr val="000000"/>
         </a:solidFill>
@@ -594,7 +615,7 @@
         <a:sym typeface="Arial"/>
       </a:defRPr>
     </a:lvl5pPr>
-    <a:lvl6pPr lvl="5" marR="0" rtl="0" algn="l">
+    <a:lvl6pPr marR="0" lvl="5" algn="l" rtl="0">
       <a:lnSpc>
         <a:spcPct val="100000"/>
       </a:lnSpc>
@@ -608,7 +629,7 @@
         <a:srgbClr val="000000"/>
       </a:buClr>
       <a:buFont typeface="Arial"/>
-      <a:defRPr b="0" i="0" sz="1400" u="none" cap="none" strike="noStrike">
+      <a:defRPr sz="1400" b="0" i="0" u="none" strike="noStrike" cap="none">
         <a:solidFill>
           <a:srgbClr val="000000"/>
         </a:solidFill>
@@ -618,7 +639,7 @@
         <a:sym typeface="Arial"/>
       </a:defRPr>
     </a:lvl6pPr>
-    <a:lvl7pPr lvl="6" marR="0" rtl="0" algn="l">
+    <a:lvl7pPr marR="0" lvl="6" algn="l" rtl="0">
       <a:lnSpc>
         <a:spcPct val="100000"/>
       </a:lnSpc>
@@ -632,7 +653,7 @@
         <a:srgbClr val="000000"/>
       </a:buClr>
       <a:buFont typeface="Arial"/>
-      <a:defRPr b="0" i="0" sz="1400" u="none" cap="none" strike="noStrike">
+      <a:defRPr sz="1400" b="0" i="0" u="none" strike="noStrike" cap="none">
         <a:solidFill>
           <a:srgbClr val="000000"/>
         </a:solidFill>
@@ -642,7 +663,7 @@
         <a:sym typeface="Arial"/>
       </a:defRPr>
     </a:lvl7pPr>
-    <a:lvl8pPr lvl="7" marR="0" rtl="0" algn="l">
+    <a:lvl8pPr marR="0" lvl="7" algn="l" rtl="0">
       <a:lnSpc>
         <a:spcPct val="100000"/>
       </a:lnSpc>
@@ -656,7 +677,7 @@
         <a:srgbClr val="000000"/>
       </a:buClr>
       <a:buFont typeface="Arial"/>
-      <a:defRPr b="0" i="0" sz="1400" u="none" cap="none" strike="noStrike">
+      <a:defRPr sz="1400" b="0" i="0" u="none" strike="noStrike" cap="none">
         <a:solidFill>
           <a:srgbClr val="000000"/>
         </a:solidFill>
@@ -666,7 +687,7 @@
         <a:sym typeface="Arial"/>
       </a:defRPr>
     </a:lvl8pPr>
-    <a:lvl9pPr lvl="8" marR="0" rtl="0" algn="l">
+    <a:lvl9pPr marR="0" lvl="8" algn="l" rtl="0">
       <a:lnSpc>
         <a:spcPct val="100000"/>
       </a:lnSpc>
@@ -680,7 +701,7 @@
         <a:srgbClr val="000000"/>
       </a:buClr>
       <a:buFont typeface="Arial"/>
-      <a:defRPr b="0" i="0" sz="1400" u="none" cap="none" strike="noStrike">
+      <a:defRPr sz="1400" b="0" i="0" u="none" strike="noStrike" cap="none">
         <a:solidFill>
           <a:srgbClr val="000000"/>
         </a:solidFill>
@@ -695,11 +716,11 @@
 </file>
 
 <file path=ppt/notesSlides/notesSlide1.xml><?xml version="1.0" encoding="utf-8"?>
-<p:notes xmlns:a="http://schemas.openxmlformats.org/drawingml/2006/main" xmlns:r="http://schemas.openxmlformats.org/officeDocument/2006/relationships" xmlns:mc="http://schemas.openxmlformats.org/markup-compatibility/2006" xmlns:mv="urn:schemas-microsoft-com:mac:vml" xmlns:p="http://schemas.openxmlformats.org/presentationml/2006/main" xmlns:c="http://schemas.openxmlformats.org/drawingml/2006/chart" xmlns:dgm="http://schemas.openxmlformats.org/drawingml/2006/diagram" xmlns:o="urn:schemas-microsoft-com:office:office" xmlns:v="urn:schemas-microsoft-com:vml" xmlns:pvml="urn:schemas-microsoft-com:office:powerpoint" xmlns:com="http://schemas.openxmlformats.org/drawingml/2006/compatibility" xmlns:p14="http://schemas.microsoft.com/office/powerpoint/2010/main" xmlns:p15="http://schemas.microsoft.com/office/powerpoint/2012/main" xmlns:ahyp="http://schemas.microsoft.com/office/drawing/2018/hyperlinkcolor" showMasterPhAnim="0" showMasterSp="0">
+<p:notes xmlns:a="http://schemas.openxmlformats.org/drawingml/2006/main" xmlns:r="http://schemas.openxmlformats.org/officeDocument/2006/relationships" xmlns:p="http://schemas.openxmlformats.org/presentationml/2006/main" showMasterSp="0" showMasterPhAnim="0">
   <p:cSld>
     <p:spTree>
       <p:nvGrpSpPr>
-        <p:cNvPr id="50" name="Shape 50"/>
+        <p:cNvPr id="1" name="Shape 50"/>
         <p:cNvGrpSpPr/>
         <p:nvPr/>
       </p:nvGrpSpPr>
@@ -714,9 +735,11 @@
       <p:sp>
         <p:nvSpPr>
           <p:cNvPr id="51" name="Google Shape;51;p:notes"/>
-          <p:cNvSpPr/>
+          <p:cNvSpPr>
+            <a:spLocks noGrp="1" noRot="1" noChangeAspect="1"/>
+          </p:cNvSpPr>
           <p:nvPr>
-            <p:ph idx="2" type="sldImg"/>
+            <p:ph type="sldImg" idx="2"/>
           </p:nvPr>
         </p:nvSpPr>
         <p:spPr>
@@ -725,9 +748,13 @@
             <a:ext cx="6096075" cy="3429000"/>
           </a:xfrm>
           <a:custGeom>
-            <a:rect b="b" l="l" r="r" t="t"/>
+            <a:avLst/>
+            <a:gdLst/>
+            <a:ahLst/>
+            <a:cxnLst/>
+            <a:rect l="l" t="t" r="r" b="b"/>
             <a:pathLst>
-              <a:path extrusionOk="0" h="120000" w="120000">
+              <a:path w="120000" h="120000" extrusionOk="0">
                 <a:moveTo>
                   <a:pt x="0" y="0"/>
                 </a:moveTo>
@@ -749,9 +776,11 @@
       <p:sp>
         <p:nvSpPr>
           <p:cNvPr id="52" name="Google Shape;52;p:notes"/>
-          <p:cNvSpPr txBox="1"/>
+          <p:cNvSpPr txBox="1">
+            <a:spLocks noGrp="1"/>
+          </p:cNvSpPr>
           <p:nvPr>
-            <p:ph idx="1" type="body"/>
+            <p:ph type="body" idx="1"/>
           </p:nvPr>
         </p:nvSpPr>
         <p:spPr>
@@ -764,12 +793,12 @@
           </a:prstGeom>
         </p:spPr>
         <p:txBody>
-          <a:bodyPr anchorCtr="0" anchor="t" bIns="91425" lIns="91425" spcFirstLastPara="1" rIns="91425" wrap="square" tIns="91425">
+          <a:bodyPr spcFirstLastPara="1" wrap="square" lIns="91425" tIns="91425" rIns="91425" bIns="91425" anchor="t" anchorCtr="0">
             <a:noAutofit/>
           </a:bodyPr>
           <a:lstStyle/>
           <a:p>
-            <a:pPr indent="0" lvl="0" marL="0" rtl="0" algn="l">
+            <a:pPr marL="0" lvl="0" indent="0" algn="l" rtl="0">
               <a:spcBef>
                 <a:spcPts val="0"/>
               </a:spcBef>
@@ -778,9 +807,6 @@
               </a:spcAft>
               <a:buNone/>
             </a:pPr>
-            <a:r>
-              <a:t/>
-            </a:r>
             <a:endParaRPr/>
           </a:p>
         </p:txBody>
@@ -794,11 +820,11 @@
 </file>
 
 <file path=ppt/notesSlides/notesSlide2.xml><?xml version="1.0" encoding="utf-8"?>
-<p:notes xmlns:a="http://schemas.openxmlformats.org/drawingml/2006/main" xmlns:r="http://schemas.openxmlformats.org/officeDocument/2006/relationships" xmlns:mc="http://schemas.openxmlformats.org/markup-compatibility/2006" xmlns:mv="urn:schemas-microsoft-com:mac:vml" xmlns:p="http://schemas.openxmlformats.org/presentationml/2006/main" xmlns:c="http://schemas.openxmlformats.org/drawingml/2006/chart" xmlns:dgm="http://schemas.openxmlformats.org/drawingml/2006/diagram" xmlns:o="urn:schemas-microsoft-com:office:office" xmlns:v="urn:schemas-microsoft-com:vml" xmlns:pvml="urn:schemas-microsoft-com:office:powerpoint" xmlns:com="http://schemas.openxmlformats.org/drawingml/2006/compatibility" xmlns:p14="http://schemas.microsoft.com/office/powerpoint/2010/main" xmlns:p15="http://schemas.microsoft.com/office/powerpoint/2012/main" xmlns:ahyp="http://schemas.microsoft.com/office/drawing/2018/hyperlinkcolor" showMasterPhAnim="0" showMasterSp="0">
+<p:notes xmlns:a="http://schemas.openxmlformats.org/drawingml/2006/main" xmlns:r="http://schemas.openxmlformats.org/officeDocument/2006/relationships" xmlns:p="http://schemas.openxmlformats.org/presentationml/2006/main" showMasterSp="0" showMasterPhAnim="0">
   <p:cSld>
     <p:spTree>
       <p:nvGrpSpPr>
-        <p:cNvPr id="56" name="Shape 56"/>
+        <p:cNvPr id="1" name="Shape 56"/>
         <p:cNvGrpSpPr/>
         <p:nvPr/>
       </p:nvGrpSpPr>
@@ -813,20 +839,26 @@
       <p:sp>
         <p:nvSpPr>
           <p:cNvPr id="57" name="Google Shape;57;g33bb510c4dd_0_0:notes"/>
-          <p:cNvSpPr/>
+          <p:cNvSpPr>
+            <a:spLocks noGrp="1" noRot="1" noChangeAspect="1"/>
+          </p:cNvSpPr>
           <p:nvPr>
-            <p:ph idx="2" type="sldImg"/>
+            <p:ph type="sldImg" idx="2"/>
           </p:nvPr>
         </p:nvSpPr>
         <p:spPr>
           <a:xfrm>
-            <a:off x="381300" y="685800"/>
+            <a:off x="381000" y="685800"/>
             <a:ext cx="6096000" cy="3429000"/>
           </a:xfrm>
           <a:custGeom>
-            <a:rect b="b" l="l" r="r" t="t"/>
+            <a:avLst/>
+            <a:gdLst/>
+            <a:ahLst/>
+            <a:cxnLst/>
+            <a:rect l="l" t="t" r="r" b="b"/>
             <a:pathLst>
-              <a:path extrusionOk="0" h="120000" w="120000">
+              <a:path w="120000" h="120000" extrusionOk="0">
                 <a:moveTo>
                   <a:pt x="0" y="0"/>
                 </a:moveTo>
@@ -848,9 +880,11 @@
       <p:sp>
         <p:nvSpPr>
           <p:cNvPr id="58" name="Google Shape;58;g33bb510c4dd_0_0:notes"/>
-          <p:cNvSpPr txBox="1"/>
+          <p:cNvSpPr txBox="1">
+            <a:spLocks noGrp="1"/>
+          </p:cNvSpPr>
           <p:nvPr>
-            <p:ph idx="1" type="body"/>
+            <p:ph type="body" idx="1"/>
           </p:nvPr>
         </p:nvSpPr>
         <p:spPr>
@@ -863,12 +897,12 @@
           </a:prstGeom>
         </p:spPr>
         <p:txBody>
-          <a:bodyPr anchorCtr="0" anchor="t" bIns="91425" lIns="91425" spcFirstLastPara="1" rIns="91425" wrap="square" tIns="91425">
+          <a:bodyPr spcFirstLastPara="1" wrap="square" lIns="91425" tIns="91425" rIns="91425" bIns="91425" anchor="t" anchorCtr="0">
             <a:noAutofit/>
           </a:bodyPr>
           <a:lstStyle/>
           <a:p>
-            <a:pPr indent="0" lvl="0" marL="0" rtl="0" algn="l">
+            <a:pPr marL="0" lvl="0" indent="0" algn="l" rtl="0">
               <a:spcBef>
                 <a:spcPts val="0"/>
               </a:spcBef>
@@ -877,9 +911,6 @@
               </a:spcAft>
               <a:buNone/>
             </a:pPr>
-            <a:r>
-              <a:t/>
-            </a:r>
             <a:endParaRPr/>
           </a:p>
         </p:txBody>
@@ -893,11 +924,11 @@
 </file>
 
 <file path=ppt/notesSlides/notesSlide3.xml><?xml version="1.0" encoding="utf-8"?>
-<p:notes xmlns:a="http://schemas.openxmlformats.org/drawingml/2006/main" xmlns:r="http://schemas.openxmlformats.org/officeDocument/2006/relationships" xmlns:mc="http://schemas.openxmlformats.org/markup-compatibility/2006" xmlns:mv="urn:schemas-microsoft-com:mac:vml" xmlns:p="http://schemas.openxmlformats.org/presentationml/2006/main" xmlns:c="http://schemas.openxmlformats.org/drawingml/2006/chart" xmlns:dgm="http://schemas.openxmlformats.org/drawingml/2006/diagram" xmlns:o="urn:schemas-microsoft-com:office:office" xmlns:v="urn:schemas-microsoft-com:vml" xmlns:pvml="urn:schemas-microsoft-com:office:powerpoint" xmlns:com="http://schemas.openxmlformats.org/drawingml/2006/compatibility" xmlns:p14="http://schemas.microsoft.com/office/powerpoint/2010/main" xmlns:p15="http://schemas.microsoft.com/office/powerpoint/2012/main" xmlns:ahyp="http://schemas.microsoft.com/office/drawing/2018/hyperlinkcolor" showMasterPhAnim="0" showMasterSp="0">
+<p:notes xmlns:a="http://schemas.openxmlformats.org/drawingml/2006/main" xmlns:r="http://schemas.openxmlformats.org/officeDocument/2006/relationships" xmlns:p="http://schemas.openxmlformats.org/presentationml/2006/main" showMasterSp="0" showMasterPhAnim="0">
   <p:cSld>
     <p:spTree>
       <p:nvGrpSpPr>
-        <p:cNvPr id="62" name="Shape 62"/>
+        <p:cNvPr id="1" name="Shape 62"/>
         <p:cNvGrpSpPr/>
         <p:nvPr/>
       </p:nvGrpSpPr>
@@ -912,20 +943,26 @@
       <p:sp>
         <p:nvSpPr>
           <p:cNvPr id="63" name="Google Shape;63;g33ab4a1d568_0_5:notes"/>
-          <p:cNvSpPr/>
+          <p:cNvSpPr>
+            <a:spLocks noGrp="1" noRot="1" noChangeAspect="1"/>
+          </p:cNvSpPr>
           <p:nvPr>
-            <p:ph idx="2" type="sldImg"/>
+            <p:ph type="sldImg" idx="2"/>
           </p:nvPr>
         </p:nvSpPr>
         <p:spPr>
           <a:xfrm>
-            <a:off x="381300" y="685800"/>
+            <a:off x="381000" y="685800"/>
             <a:ext cx="6096000" cy="3429000"/>
           </a:xfrm>
           <a:custGeom>
-            <a:rect b="b" l="l" r="r" t="t"/>
+            <a:avLst/>
+            <a:gdLst/>
+            <a:ahLst/>
+            <a:cxnLst/>
+            <a:rect l="l" t="t" r="r" b="b"/>
             <a:pathLst>
-              <a:path extrusionOk="0" h="120000" w="120000">
+              <a:path w="120000" h="120000" extrusionOk="0">
                 <a:moveTo>
                   <a:pt x="0" y="0"/>
                 </a:moveTo>
@@ -947,9 +984,11 @@
       <p:sp>
         <p:nvSpPr>
           <p:cNvPr id="64" name="Google Shape;64;g33ab4a1d568_0_5:notes"/>
-          <p:cNvSpPr txBox="1"/>
+          <p:cNvSpPr txBox="1">
+            <a:spLocks noGrp="1"/>
+          </p:cNvSpPr>
           <p:nvPr>
-            <p:ph idx="1" type="body"/>
+            <p:ph type="body" idx="1"/>
           </p:nvPr>
         </p:nvSpPr>
         <p:spPr>
@@ -962,12 +1001,12 @@
           </a:prstGeom>
         </p:spPr>
         <p:txBody>
-          <a:bodyPr anchorCtr="0" anchor="t" bIns="91425" lIns="91425" spcFirstLastPara="1" rIns="91425" wrap="square" tIns="91425">
+          <a:bodyPr spcFirstLastPara="1" wrap="square" lIns="91425" tIns="91425" rIns="91425" bIns="91425" anchor="t" anchorCtr="0">
             <a:noAutofit/>
           </a:bodyPr>
           <a:lstStyle/>
           <a:p>
-            <a:pPr indent="0" lvl="0" marL="0" rtl="0" algn="l">
+            <a:pPr marL="0" lvl="0" indent="0" algn="l" rtl="0">
               <a:spcBef>
                 <a:spcPts val="0"/>
               </a:spcBef>
@@ -976,9 +1015,6 @@
               </a:spcAft>
               <a:buNone/>
             </a:pPr>
-            <a:r>
-              <a:t/>
-            </a:r>
             <a:endParaRPr/>
           </a:p>
         </p:txBody>
@@ -992,11 +1028,11 @@
 </file>
 
 <file path=ppt/notesSlides/notesSlide4.xml><?xml version="1.0" encoding="utf-8"?>
-<p:notes xmlns:a="http://schemas.openxmlformats.org/drawingml/2006/main" xmlns:r="http://schemas.openxmlformats.org/officeDocument/2006/relationships" xmlns:mc="http://schemas.openxmlformats.org/markup-compatibility/2006" xmlns:mv="urn:schemas-microsoft-com:mac:vml" xmlns:p="http://schemas.openxmlformats.org/presentationml/2006/main" xmlns:c="http://schemas.openxmlformats.org/drawingml/2006/chart" xmlns:dgm="http://schemas.openxmlformats.org/drawingml/2006/diagram" xmlns:o="urn:schemas-microsoft-com:office:office" xmlns:v="urn:schemas-microsoft-com:vml" xmlns:pvml="urn:schemas-microsoft-com:office:powerpoint" xmlns:com="http://schemas.openxmlformats.org/drawingml/2006/compatibility" xmlns:p14="http://schemas.microsoft.com/office/powerpoint/2010/main" xmlns:p15="http://schemas.microsoft.com/office/powerpoint/2012/main" xmlns:ahyp="http://schemas.microsoft.com/office/drawing/2018/hyperlinkcolor" showMasterPhAnim="0" showMasterSp="0">
+<p:notes xmlns:a="http://schemas.openxmlformats.org/drawingml/2006/main" xmlns:r="http://schemas.openxmlformats.org/officeDocument/2006/relationships" xmlns:p="http://schemas.openxmlformats.org/presentationml/2006/main" showMasterSp="0" showMasterPhAnim="0">
   <p:cSld>
     <p:spTree>
       <p:nvGrpSpPr>
-        <p:cNvPr id="73" name="Shape 73"/>
+        <p:cNvPr id="1" name="Shape 73"/>
         <p:cNvGrpSpPr/>
         <p:nvPr/>
       </p:nvGrpSpPr>
@@ -1011,20 +1047,26 @@
       <p:sp>
         <p:nvSpPr>
           <p:cNvPr id="74" name="Google Shape;74;g339dc3acc53_0_10:notes"/>
-          <p:cNvSpPr/>
+          <p:cNvSpPr>
+            <a:spLocks noGrp="1" noRot="1" noChangeAspect="1"/>
+          </p:cNvSpPr>
           <p:nvPr>
-            <p:ph idx="2" type="sldImg"/>
+            <p:ph type="sldImg" idx="2"/>
           </p:nvPr>
         </p:nvSpPr>
         <p:spPr>
           <a:xfrm>
-            <a:off x="381300" y="685800"/>
+            <a:off x="381000" y="685800"/>
             <a:ext cx="6096000" cy="3429000"/>
           </a:xfrm>
           <a:custGeom>
-            <a:rect b="b" l="l" r="r" t="t"/>
+            <a:avLst/>
+            <a:gdLst/>
+            <a:ahLst/>
+            <a:cxnLst/>
+            <a:rect l="l" t="t" r="r" b="b"/>
             <a:pathLst>
-              <a:path extrusionOk="0" h="120000" w="120000">
+              <a:path w="120000" h="120000" extrusionOk="0">
                 <a:moveTo>
                   <a:pt x="0" y="0"/>
                 </a:moveTo>
@@ -1046,9 +1088,11 @@
       <p:sp>
         <p:nvSpPr>
           <p:cNvPr id="75" name="Google Shape;75;g339dc3acc53_0_10:notes"/>
-          <p:cNvSpPr txBox="1"/>
+          <p:cNvSpPr txBox="1">
+            <a:spLocks noGrp="1"/>
+          </p:cNvSpPr>
           <p:nvPr>
-            <p:ph idx="1" type="body"/>
+            <p:ph type="body" idx="1"/>
           </p:nvPr>
         </p:nvSpPr>
         <p:spPr>
@@ -1061,12 +1105,12 @@
           </a:prstGeom>
         </p:spPr>
         <p:txBody>
-          <a:bodyPr anchorCtr="0" anchor="t" bIns="91425" lIns="91425" spcFirstLastPara="1" rIns="91425" wrap="square" tIns="91425">
+          <a:bodyPr spcFirstLastPara="1" wrap="square" lIns="91425" tIns="91425" rIns="91425" bIns="91425" anchor="t" anchorCtr="0">
             <a:noAutofit/>
           </a:bodyPr>
           <a:lstStyle/>
           <a:p>
-            <a:pPr indent="0" lvl="0" marL="0" rtl="0" algn="l">
+            <a:pPr marL="0" lvl="0" indent="0" algn="l" rtl="0">
               <a:spcBef>
                 <a:spcPts val="0"/>
               </a:spcBef>
@@ -1075,9 +1119,6 @@
               </a:spcAft>
               <a:buNone/>
             </a:pPr>
-            <a:r>
-              <a:t/>
-            </a:r>
             <a:endParaRPr/>
           </a:p>
         </p:txBody>
@@ -1091,11 +1132,11 @@
 </file>
 
 <file path=ppt/notesSlides/notesSlide5.xml><?xml version="1.0" encoding="utf-8"?>
-<p:notes xmlns:a="http://schemas.openxmlformats.org/drawingml/2006/main" xmlns:r="http://schemas.openxmlformats.org/officeDocument/2006/relationships" xmlns:mc="http://schemas.openxmlformats.org/markup-compatibility/2006" xmlns:mv="urn:schemas-microsoft-com:mac:vml" xmlns:p="http://schemas.openxmlformats.org/presentationml/2006/main" xmlns:c="http://schemas.openxmlformats.org/drawingml/2006/chart" xmlns:dgm="http://schemas.openxmlformats.org/drawingml/2006/diagram" xmlns:o="urn:schemas-microsoft-com:office:office" xmlns:v="urn:schemas-microsoft-com:vml" xmlns:pvml="urn:schemas-microsoft-com:office:powerpoint" xmlns:com="http://schemas.openxmlformats.org/drawingml/2006/compatibility" xmlns:p14="http://schemas.microsoft.com/office/powerpoint/2010/main" xmlns:p15="http://schemas.microsoft.com/office/powerpoint/2012/main" xmlns:ahyp="http://schemas.microsoft.com/office/drawing/2018/hyperlinkcolor" showMasterPhAnim="0" showMasterSp="0">
+<p:notes xmlns:a="http://schemas.openxmlformats.org/drawingml/2006/main" xmlns:r="http://schemas.openxmlformats.org/officeDocument/2006/relationships" xmlns:p="http://schemas.openxmlformats.org/presentationml/2006/main" showMasterSp="0" showMasterPhAnim="0">
   <p:cSld>
     <p:spTree>
       <p:nvGrpSpPr>
-        <p:cNvPr id="79" name="Shape 79"/>
+        <p:cNvPr id="1" name="Shape 79"/>
         <p:cNvGrpSpPr/>
         <p:nvPr/>
       </p:nvGrpSpPr>
@@ -1110,20 +1151,26 @@
       <p:sp>
         <p:nvSpPr>
           <p:cNvPr id="80" name="Google Shape;80;g339dc3acc53_0_15:notes"/>
-          <p:cNvSpPr/>
+          <p:cNvSpPr>
+            <a:spLocks noGrp="1" noRot="1" noChangeAspect="1"/>
+          </p:cNvSpPr>
           <p:nvPr>
-            <p:ph idx="2" type="sldImg"/>
+            <p:ph type="sldImg" idx="2"/>
           </p:nvPr>
         </p:nvSpPr>
         <p:spPr>
           <a:xfrm>
-            <a:off x="381300" y="685800"/>
+            <a:off x="381000" y="685800"/>
             <a:ext cx="6096000" cy="3429000"/>
           </a:xfrm>
           <a:custGeom>
-            <a:rect b="b" l="l" r="r" t="t"/>
+            <a:avLst/>
+            <a:gdLst/>
+            <a:ahLst/>
+            <a:cxnLst/>
+            <a:rect l="l" t="t" r="r" b="b"/>
             <a:pathLst>
-              <a:path extrusionOk="0" h="120000" w="120000">
+              <a:path w="120000" h="120000" extrusionOk="0">
                 <a:moveTo>
                   <a:pt x="0" y="0"/>
                 </a:moveTo>
@@ -1145,9 +1192,11 @@
       <p:sp>
         <p:nvSpPr>
           <p:cNvPr id="81" name="Google Shape;81;g339dc3acc53_0_15:notes"/>
-          <p:cNvSpPr txBox="1"/>
+          <p:cNvSpPr txBox="1">
+            <a:spLocks noGrp="1"/>
+          </p:cNvSpPr>
           <p:nvPr>
-            <p:ph idx="1" type="body"/>
+            <p:ph type="body" idx="1"/>
           </p:nvPr>
         </p:nvSpPr>
         <p:spPr>
@@ -1160,12 +1209,12 @@
           </a:prstGeom>
         </p:spPr>
         <p:txBody>
-          <a:bodyPr anchorCtr="0" anchor="t" bIns="91425" lIns="91425" spcFirstLastPara="1" rIns="91425" wrap="square" tIns="91425">
+          <a:bodyPr spcFirstLastPara="1" wrap="square" lIns="91425" tIns="91425" rIns="91425" bIns="91425" anchor="t" anchorCtr="0">
             <a:noAutofit/>
           </a:bodyPr>
           <a:lstStyle/>
           <a:p>
-            <a:pPr indent="0" lvl="0" marL="0" rtl="0" algn="l">
+            <a:pPr marL="0" lvl="0" indent="0" algn="l" rtl="0">
               <a:spcBef>
                 <a:spcPts val="0"/>
               </a:spcBef>
@@ -1174,9 +1223,6 @@
               </a:spcAft>
               <a:buNone/>
             </a:pPr>
-            <a:r>
-              <a:t/>
-            </a:r>
             <a:endParaRPr/>
           </a:p>
         </p:txBody>
@@ -1190,11 +1236,11 @@
 </file>
 
 <file path=ppt/notesSlides/notesSlide6.xml><?xml version="1.0" encoding="utf-8"?>
-<p:notes xmlns:a="http://schemas.openxmlformats.org/drawingml/2006/main" xmlns:r="http://schemas.openxmlformats.org/officeDocument/2006/relationships" xmlns:mc="http://schemas.openxmlformats.org/markup-compatibility/2006" xmlns:mv="urn:schemas-microsoft-com:mac:vml" xmlns:p="http://schemas.openxmlformats.org/presentationml/2006/main" xmlns:c="http://schemas.openxmlformats.org/drawingml/2006/chart" xmlns:dgm="http://schemas.openxmlformats.org/drawingml/2006/diagram" xmlns:o="urn:schemas-microsoft-com:office:office" xmlns:v="urn:schemas-microsoft-com:vml" xmlns:pvml="urn:schemas-microsoft-com:office:powerpoint" xmlns:com="http://schemas.openxmlformats.org/drawingml/2006/compatibility" xmlns:p14="http://schemas.microsoft.com/office/powerpoint/2010/main" xmlns:p15="http://schemas.microsoft.com/office/powerpoint/2012/main" xmlns:ahyp="http://schemas.microsoft.com/office/drawing/2018/hyperlinkcolor" showMasterPhAnim="0" showMasterSp="0">
+<p:notes xmlns:a="http://schemas.openxmlformats.org/drawingml/2006/main" xmlns:r="http://schemas.openxmlformats.org/officeDocument/2006/relationships" xmlns:p="http://schemas.openxmlformats.org/presentationml/2006/main" showMasterSp="0" showMasterPhAnim="0">
   <p:cSld>
     <p:spTree>
       <p:nvGrpSpPr>
-        <p:cNvPr id="100" name="Shape 100"/>
+        <p:cNvPr id="1" name="Shape 101"/>
         <p:cNvGrpSpPr/>
         <p:nvPr/>
       </p:nvGrpSpPr>
@@ -1208,21 +1254,27 @@
       </p:grpSpPr>
       <p:sp>
         <p:nvSpPr>
-          <p:cNvPr id="101" name="Google Shape;101;g34a269289f2_1_0:notes"/>
-          <p:cNvSpPr/>
+          <p:cNvPr id="102" name="Google Shape;102;g33ab4a1d568_0_0:notes"/>
+          <p:cNvSpPr>
+            <a:spLocks noGrp="1" noRot="1" noChangeAspect="1"/>
+          </p:cNvSpPr>
           <p:nvPr>
-            <p:ph idx="2" type="sldImg"/>
+            <p:ph type="sldImg" idx="2"/>
           </p:nvPr>
         </p:nvSpPr>
         <p:spPr>
           <a:xfrm>
-            <a:off x="381300" y="685800"/>
+            <a:off x="381000" y="685800"/>
             <a:ext cx="6096000" cy="3429000"/>
           </a:xfrm>
           <a:custGeom>
-            <a:rect b="b" l="l" r="r" t="t"/>
+            <a:avLst/>
+            <a:gdLst/>
+            <a:ahLst/>
+            <a:cxnLst/>
+            <a:rect l="l" t="t" r="r" b="b"/>
             <a:pathLst>
-              <a:path extrusionOk="0" h="120000" w="120000">
+              <a:path w="120000" h="120000" extrusionOk="0">
                 <a:moveTo>
                   <a:pt x="0" y="0"/>
                 </a:moveTo>
@@ -1243,10 +1295,12 @@
       </p:sp>
       <p:sp>
         <p:nvSpPr>
-          <p:cNvPr id="102" name="Google Shape;102;g34a269289f2_1_0:notes"/>
-          <p:cNvSpPr txBox="1"/>
+          <p:cNvPr id="103" name="Google Shape;103;g33ab4a1d568_0_0:notes"/>
+          <p:cNvSpPr txBox="1">
+            <a:spLocks noGrp="1"/>
+          </p:cNvSpPr>
           <p:nvPr>
-            <p:ph idx="1" type="body"/>
+            <p:ph type="body" idx="1"/>
           </p:nvPr>
         </p:nvSpPr>
         <p:spPr>
@@ -1259,12 +1313,12 @@
           </a:prstGeom>
         </p:spPr>
         <p:txBody>
-          <a:bodyPr anchorCtr="0" anchor="t" bIns="91425" lIns="91425" spcFirstLastPara="1" rIns="91425" wrap="square" tIns="91425">
+          <a:bodyPr spcFirstLastPara="1" wrap="square" lIns="91425" tIns="91425" rIns="91425" bIns="91425" anchor="t" anchorCtr="0">
             <a:noAutofit/>
           </a:bodyPr>
           <a:lstStyle/>
           <a:p>
-            <a:pPr indent="0" lvl="0" marL="0" rtl="0" algn="l">
+            <a:pPr marL="0" lvl="0" indent="0" algn="l" rtl="0">
               <a:spcBef>
                 <a:spcPts val="0"/>
               </a:spcBef>
@@ -1273,306 +1327,6 @@
               </a:spcAft>
               <a:buNone/>
             </a:pPr>
-            <a:r>
-              <a:t/>
-            </a:r>
-            <a:endParaRPr/>
-          </a:p>
-        </p:txBody>
-      </p:sp>
-    </p:spTree>
-  </p:cSld>
-  <p:clrMapOvr>
-    <a:masterClrMapping/>
-  </p:clrMapOvr>
-</p:notes>
-</file>
-
-<file path=ppt/notesSlides/notesSlide7.xml><?xml version="1.0" encoding="utf-8"?>
-<p:notes xmlns:a="http://schemas.openxmlformats.org/drawingml/2006/main" xmlns:r="http://schemas.openxmlformats.org/officeDocument/2006/relationships" xmlns:mc="http://schemas.openxmlformats.org/markup-compatibility/2006" xmlns:mv="urn:schemas-microsoft-com:mac:vml" xmlns:p="http://schemas.openxmlformats.org/presentationml/2006/main" xmlns:c="http://schemas.openxmlformats.org/drawingml/2006/chart" xmlns:dgm="http://schemas.openxmlformats.org/drawingml/2006/diagram" xmlns:o="urn:schemas-microsoft-com:office:office" xmlns:v="urn:schemas-microsoft-com:vml" xmlns:pvml="urn:schemas-microsoft-com:office:powerpoint" xmlns:com="http://schemas.openxmlformats.org/drawingml/2006/compatibility" xmlns:p14="http://schemas.microsoft.com/office/powerpoint/2010/main" xmlns:p15="http://schemas.microsoft.com/office/powerpoint/2012/main" xmlns:ahyp="http://schemas.microsoft.com/office/drawing/2018/hyperlinkcolor" showMasterPhAnim="0" showMasterSp="0">
-  <p:cSld>
-    <p:spTree>
-      <p:nvGrpSpPr>
-        <p:cNvPr id="106" name="Shape 106"/>
-        <p:cNvGrpSpPr/>
-        <p:nvPr/>
-      </p:nvGrpSpPr>
-      <p:grpSpPr>
-        <a:xfrm>
-          <a:off x="0" y="0"/>
-          <a:ext cx="0" cy="0"/>
-          <a:chOff x="0" y="0"/>
-          <a:chExt cx="0" cy="0"/>
-        </a:xfrm>
-      </p:grpSpPr>
-      <p:sp>
-        <p:nvSpPr>
-          <p:cNvPr id="107" name="Google Shape;107;g33ab4a1d568_0_0:notes"/>
-          <p:cNvSpPr/>
-          <p:nvPr>
-            <p:ph idx="2" type="sldImg"/>
-          </p:nvPr>
-        </p:nvSpPr>
-        <p:spPr>
-          <a:xfrm>
-            <a:off x="381300" y="685800"/>
-            <a:ext cx="6096000" cy="3429000"/>
-          </a:xfrm>
-          <a:custGeom>
-            <a:rect b="b" l="l" r="r" t="t"/>
-            <a:pathLst>
-              <a:path extrusionOk="0" h="120000" w="120000">
-                <a:moveTo>
-                  <a:pt x="0" y="0"/>
-                </a:moveTo>
-                <a:lnTo>
-                  <a:pt x="120000" y="0"/>
-                </a:lnTo>
-                <a:lnTo>
-                  <a:pt x="120000" y="120000"/>
-                </a:lnTo>
-                <a:lnTo>
-                  <a:pt x="0" y="120000"/>
-                </a:lnTo>
-                <a:close/>
-              </a:path>
-            </a:pathLst>
-          </a:custGeom>
-        </p:spPr>
-      </p:sp>
-      <p:sp>
-        <p:nvSpPr>
-          <p:cNvPr id="108" name="Google Shape;108;g33ab4a1d568_0_0:notes"/>
-          <p:cNvSpPr txBox="1"/>
-          <p:nvPr>
-            <p:ph idx="1" type="body"/>
-          </p:nvPr>
-        </p:nvSpPr>
-        <p:spPr>
-          <a:xfrm>
-            <a:off x="685800" y="4343400"/>
-            <a:ext cx="5486400" cy="4114800"/>
-          </a:xfrm>
-          <a:prstGeom prst="rect">
-            <a:avLst/>
-          </a:prstGeom>
-        </p:spPr>
-        <p:txBody>
-          <a:bodyPr anchorCtr="0" anchor="t" bIns="91425" lIns="91425" spcFirstLastPara="1" rIns="91425" wrap="square" tIns="91425">
-            <a:noAutofit/>
-          </a:bodyPr>
-          <a:lstStyle/>
-          <a:p>
-            <a:pPr indent="0" lvl="0" marL="0" rtl="0" algn="l">
-              <a:spcBef>
-                <a:spcPts val="0"/>
-              </a:spcBef>
-              <a:spcAft>
-                <a:spcPts val="0"/>
-              </a:spcAft>
-              <a:buNone/>
-            </a:pPr>
-            <a:r>
-              <a:t/>
-            </a:r>
-            <a:endParaRPr/>
-          </a:p>
-        </p:txBody>
-      </p:sp>
-    </p:spTree>
-  </p:cSld>
-  <p:clrMapOvr>
-    <a:masterClrMapping/>
-  </p:clrMapOvr>
-</p:notes>
-</file>
-
-<file path=ppt/notesSlides/notesSlide8.xml><?xml version="1.0" encoding="utf-8"?>
-<p:notes xmlns:a="http://schemas.openxmlformats.org/drawingml/2006/main" xmlns:r="http://schemas.openxmlformats.org/officeDocument/2006/relationships" xmlns:mc="http://schemas.openxmlformats.org/markup-compatibility/2006" xmlns:mv="urn:schemas-microsoft-com:mac:vml" xmlns:p="http://schemas.openxmlformats.org/presentationml/2006/main" xmlns:c="http://schemas.openxmlformats.org/drawingml/2006/chart" xmlns:dgm="http://schemas.openxmlformats.org/drawingml/2006/diagram" xmlns:o="urn:schemas-microsoft-com:office:office" xmlns:v="urn:schemas-microsoft-com:vml" xmlns:pvml="urn:schemas-microsoft-com:office:powerpoint" xmlns:com="http://schemas.openxmlformats.org/drawingml/2006/compatibility" xmlns:p14="http://schemas.microsoft.com/office/powerpoint/2010/main" xmlns:p15="http://schemas.microsoft.com/office/powerpoint/2012/main" xmlns:ahyp="http://schemas.microsoft.com/office/drawing/2018/hyperlinkcolor" showMasterPhAnim="0" showMasterSp="0">
-  <p:cSld>
-    <p:spTree>
-      <p:nvGrpSpPr>
-        <p:cNvPr id="112" name="Shape 112"/>
-        <p:cNvGrpSpPr/>
-        <p:nvPr/>
-      </p:nvGrpSpPr>
-      <p:grpSpPr>
-        <a:xfrm>
-          <a:off x="0" y="0"/>
-          <a:ext cx="0" cy="0"/>
-          <a:chOff x="0" y="0"/>
-          <a:chExt cx="0" cy="0"/>
-        </a:xfrm>
-      </p:grpSpPr>
-      <p:sp>
-        <p:nvSpPr>
-          <p:cNvPr id="113" name="Google Shape;113;g339f550c7d0_0_0:notes"/>
-          <p:cNvSpPr/>
-          <p:nvPr>
-            <p:ph idx="2" type="sldImg"/>
-          </p:nvPr>
-        </p:nvSpPr>
-        <p:spPr>
-          <a:xfrm>
-            <a:off x="381300" y="685800"/>
-            <a:ext cx="6096000" cy="3429000"/>
-          </a:xfrm>
-          <a:custGeom>
-            <a:rect b="b" l="l" r="r" t="t"/>
-            <a:pathLst>
-              <a:path extrusionOk="0" h="120000" w="120000">
-                <a:moveTo>
-                  <a:pt x="0" y="0"/>
-                </a:moveTo>
-                <a:lnTo>
-                  <a:pt x="120000" y="0"/>
-                </a:lnTo>
-                <a:lnTo>
-                  <a:pt x="120000" y="120000"/>
-                </a:lnTo>
-                <a:lnTo>
-                  <a:pt x="0" y="120000"/>
-                </a:lnTo>
-                <a:close/>
-              </a:path>
-            </a:pathLst>
-          </a:custGeom>
-        </p:spPr>
-      </p:sp>
-      <p:sp>
-        <p:nvSpPr>
-          <p:cNvPr id="114" name="Google Shape;114;g339f550c7d0_0_0:notes"/>
-          <p:cNvSpPr txBox="1"/>
-          <p:nvPr>
-            <p:ph idx="1" type="body"/>
-          </p:nvPr>
-        </p:nvSpPr>
-        <p:spPr>
-          <a:xfrm>
-            <a:off x="685800" y="4343400"/>
-            <a:ext cx="5486400" cy="4114800"/>
-          </a:xfrm>
-          <a:prstGeom prst="rect">
-            <a:avLst/>
-          </a:prstGeom>
-        </p:spPr>
-        <p:txBody>
-          <a:bodyPr anchorCtr="0" anchor="t" bIns="91425" lIns="91425" spcFirstLastPara="1" rIns="91425" wrap="square" tIns="91425">
-            <a:noAutofit/>
-          </a:bodyPr>
-          <a:lstStyle/>
-          <a:p>
-            <a:pPr indent="0" lvl="0" marL="0" rtl="0" algn="l">
-              <a:spcBef>
-                <a:spcPts val="0"/>
-              </a:spcBef>
-              <a:spcAft>
-                <a:spcPts val="0"/>
-              </a:spcAft>
-              <a:buNone/>
-            </a:pPr>
-            <a:r>
-              <a:t/>
-            </a:r>
-            <a:endParaRPr/>
-          </a:p>
-        </p:txBody>
-      </p:sp>
-    </p:spTree>
-  </p:cSld>
-  <p:clrMapOvr>
-    <a:masterClrMapping/>
-  </p:clrMapOvr>
-</p:notes>
-</file>
-
-<file path=ppt/notesSlides/notesSlide9.xml><?xml version="1.0" encoding="utf-8"?>
-<p:notes xmlns:a="http://schemas.openxmlformats.org/drawingml/2006/main" xmlns:r="http://schemas.openxmlformats.org/officeDocument/2006/relationships" xmlns:mc="http://schemas.openxmlformats.org/markup-compatibility/2006" xmlns:mv="urn:schemas-microsoft-com:mac:vml" xmlns:p="http://schemas.openxmlformats.org/presentationml/2006/main" xmlns:c="http://schemas.openxmlformats.org/drawingml/2006/chart" xmlns:dgm="http://schemas.openxmlformats.org/drawingml/2006/diagram" xmlns:o="urn:schemas-microsoft-com:office:office" xmlns:v="urn:schemas-microsoft-com:vml" xmlns:pvml="urn:schemas-microsoft-com:office:powerpoint" xmlns:com="http://schemas.openxmlformats.org/drawingml/2006/compatibility" xmlns:p14="http://schemas.microsoft.com/office/powerpoint/2010/main" xmlns:p15="http://schemas.microsoft.com/office/powerpoint/2012/main" xmlns:ahyp="http://schemas.microsoft.com/office/drawing/2018/hyperlinkcolor" showMasterPhAnim="0" showMasterSp="0">
-  <p:cSld>
-    <p:spTree>
-      <p:nvGrpSpPr>
-        <p:cNvPr id="118" name="Shape 118"/>
-        <p:cNvGrpSpPr/>
-        <p:nvPr/>
-      </p:nvGrpSpPr>
-      <p:grpSpPr>
-        <a:xfrm>
-          <a:off x="0" y="0"/>
-          <a:ext cx="0" cy="0"/>
-          <a:chOff x="0" y="0"/>
-          <a:chExt cx="0" cy="0"/>
-        </a:xfrm>
-      </p:grpSpPr>
-      <p:sp>
-        <p:nvSpPr>
-          <p:cNvPr id="119" name="Google Shape;119;g33a57edd618_0_5:notes"/>
-          <p:cNvSpPr/>
-          <p:nvPr>
-            <p:ph idx="2" type="sldImg"/>
-          </p:nvPr>
-        </p:nvSpPr>
-        <p:spPr>
-          <a:xfrm>
-            <a:off x="381300" y="685800"/>
-            <a:ext cx="6096000" cy="3429000"/>
-          </a:xfrm>
-          <a:custGeom>
-            <a:rect b="b" l="l" r="r" t="t"/>
-            <a:pathLst>
-              <a:path extrusionOk="0" h="120000" w="120000">
-                <a:moveTo>
-                  <a:pt x="0" y="0"/>
-                </a:moveTo>
-                <a:lnTo>
-                  <a:pt x="120000" y="0"/>
-                </a:lnTo>
-                <a:lnTo>
-                  <a:pt x="120000" y="120000"/>
-                </a:lnTo>
-                <a:lnTo>
-                  <a:pt x="0" y="120000"/>
-                </a:lnTo>
-                <a:close/>
-              </a:path>
-            </a:pathLst>
-          </a:custGeom>
-        </p:spPr>
-      </p:sp>
-      <p:sp>
-        <p:nvSpPr>
-          <p:cNvPr id="120" name="Google Shape;120;g33a57edd618_0_5:notes"/>
-          <p:cNvSpPr txBox="1"/>
-          <p:nvPr>
-            <p:ph idx="1" type="body"/>
-          </p:nvPr>
-        </p:nvSpPr>
-        <p:spPr>
-          <a:xfrm>
-            <a:off x="685800" y="4343400"/>
-            <a:ext cx="5486400" cy="4114800"/>
-          </a:xfrm>
-          <a:prstGeom prst="rect">
-            <a:avLst/>
-          </a:prstGeom>
-        </p:spPr>
-        <p:txBody>
-          <a:bodyPr anchorCtr="0" anchor="t" bIns="91425" lIns="91425" spcFirstLastPara="1" rIns="91425" wrap="square" tIns="91425">
-            <a:noAutofit/>
-          </a:bodyPr>
-          <a:lstStyle/>
-          <a:p>
-            <a:pPr indent="0" lvl="0" marL="0" rtl="0" algn="l">
-              <a:spcBef>
-                <a:spcPts val="0"/>
-              </a:spcBef>
-              <a:spcAft>
-                <a:spcPts val="0"/>
-              </a:spcAft>
-              <a:buNone/>
-            </a:pPr>
-            <a:r>
-              <a:t/>
-            </a:r>
             <a:endParaRPr/>
           </a:p>
         </p:txBody>
@@ -1586,11 +1340,11 @@
 </file>
 
 <file path=ppt/slideLayouts/slideLayout1.xml><?xml version="1.0" encoding="utf-8"?>
-<p:sldLayout xmlns:a="http://schemas.openxmlformats.org/drawingml/2006/main" xmlns:r="http://schemas.openxmlformats.org/officeDocument/2006/relationships" xmlns:mc="http://schemas.openxmlformats.org/markup-compatibility/2006" xmlns:mv="urn:schemas-microsoft-com:mac:vml" xmlns:p="http://schemas.openxmlformats.org/presentationml/2006/main" xmlns:c="http://schemas.openxmlformats.org/drawingml/2006/chart" xmlns:dgm="http://schemas.openxmlformats.org/drawingml/2006/diagram" xmlns:o="urn:schemas-microsoft-com:office:office" xmlns:v="urn:schemas-microsoft-com:vml" xmlns:pvml="urn:schemas-microsoft-com:office:powerpoint" xmlns:com="http://schemas.openxmlformats.org/drawingml/2006/compatibility" xmlns:p14="http://schemas.microsoft.com/office/powerpoint/2010/main" xmlns:p15="http://schemas.microsoft.com/office/powerpoint/2012/main" xmlns:ahyp="http://schemas.microsoft.com/office/drawing/2018/hyperlinkcolor" matchingName="Title slide" type="title">
+<p:sldLayout xmlns:a="http://schemas.openxmlformats.org/drawingml/2006/main" xmlns:r="http://schemas.openxmlformats.org/officeDocument/2006/relationships" xmlns:p="http://schemas.openxmlformats.org/presentationml/2006/main" matchingName="Title slide" type="title">
   <p:cSld name="TITLE">
     <p:spTree>
       <p:nvGrpSpPr>
-        <p:cNvPr id="9" name="Shape 9"/>
+        <p:cNvPr id="1" name="Shape 9"/>
         <p:cNvGrpSpPr/>
         <p:nvPr/>
       </p:nvGrpSpPr>
@@ -1605,7 +1359,9 @@
       <p:sp>
         <p:nvSpPr>
           <p:cNvPr id="10" name="Google Shape;10;p2"/>
-          <p:cNvSpPr txBox="1"/>
+          <p:cNvSpPr txBox="1">
+            <a:spLocks noGrp="1"/>
+          </p:cNvSpPr>
           <p:nvPr>
             <p:ph type="ctrTitle"/>
           </p:nvPr>
@@ -1620,7 +1376,7 @@
           </a:prstGeom>
         </p:spPr>
         <p:txBody>
-          <a:bodyPr anchorCtr="0" anchor="b" bIns="91425" lIns="91425" spcFirstLastPara="1" rIns="91425" wrap="square" tIns="91425">
+          <a:bodyPr spcFirstLastPara="1" wrap="square" lIns="91425" tIns="91425" rIns="91425" bIns="91425" anchor="b" anchorCtr="0">
             <a:normAutofit/>
           </a:bodyPr>
           <a:lstStyle>
@@ -1724,15 +1480,19 @@
               <a:defRPr sz="5200"/>
             </a:lvl9pPr>
           </a:lstStyle>
-          <a:p/>
+          <a:p>
+            <a:endParaRPr/>
+          </a:p>
         </p:txBody>
       </p:sp>
       <p:sp>
         <p:nvSpPr>
           <p:cNvPr id="11" name="Google Shape;11;p2"/>
-          <p:cNvSpPr txBox="1"/>
+          <p:cNvSpPr txBox="1">
+            <a:spLocks noGrp="1"/>
+          </p:cNvSpPr>
           <p:nvPr>
-            <p:ph idx="1" type="subTitle"/>
+            <p:ph type="subTitle" idx="1"/>
           </p:nvPr>
         </p:nvSpPr>
         <p:spPr>
@@ -1745,7 +1505,7 @@
           </a:prstGeom>
         </p:spPr>
         <p:txBody>
-          <a:bodyPr anchorCtr="0" anchor="t" bIns="91425" lIns="91425" spcFirstLastPara="1" rIns="91425" wrap="square" tIns="91425">
+          <a:bodyPr spcFirstLastPara="1" wrap="square" lIns="91425" tIns="91425" rIns="91425" bIns="91425" anchor="t" anchorCtr="0">
             <a:normAutofit/>
           </a:bodyPr>
           <a:lstStyle>
@@ -1876,15 +1636,19 @@
               <a:defRPr sz="2800"/>
             </a:lvl9pPr>
           </a:lstStyle>
-          <a:p/>
+          <a:p>
+            <a:endParaRPr/>
+          </a:p>
         </p:txBody>
       </p:sp>
       <p:sp>
         <p:nvSpPr>
           <p:cNvPr id="12" name="Google Shape;12;p2"/>
-          <p:cNvSpPr txBox="1"/>
+          <p:cNvSpPr txBox="1">
+            <a:spLocks noGrp="1"/>
+          </p:cNvSpPr>
           <p:nvPr>
-            <p:ph idx="12" type="sldNum"/>
+            <p:ph type="sldNum" idx="12"/>
           </p:nvPr>
         </p:nvSpPr>
         <p:spPr>
@@ -1897,7 +1661,7 @@
           </a:prstGeom>
         </p:spPr>
         <p:txBody>
-          <a:bodyPr anchorCtr="0" anchor="ctr" bIns="91425" lIns="91425" spcFirstLastPara="1" rIns="91425" wrap="square" tIns="91425">
+          <a:bodyPr spcFirstLastPara="1" wrap="square" lIns="91425" tIns="91425" rIns="91425" bIns="91425" anchor="ctr" anchorCtr="0">
             <a:normAutofit/>
           </a:bodyPr>
           <a:lstStyle>
@@ -1939,7 +1703,7 @@
             </a:lvl9pPr>
           </a:lstStyle>
           <a:p>
-            <a:pPr indent="0" lvl="0" marL="0" rtl="0" algn="r">
+            <a:pPr marL="0" lvl="0" indent="0" algn="r" rtl="0">
               <a:spcBef>
                 <a:spcPts val="0"/>
               </a:spcBef>
@@ -1965,11 +1729,11 @@
 </file>
 
 <file path=ppt/slideLayouts/slideLayout10.xml><?xml version="1.0" encoding="utf-8"?>
-<p:sldLayout xmlns:a="http://schemas.openxmlformats.org/drawingml/2006/main" xmlns:r="http://schemas.openxmlformats.org/officeDocument/2006/relationships" xmlns:mc="http://schemas.openxmlformats.org/markup-compatibility/2006" xmlns:mv="urn:schemas-microsoft-com:mac:vml" xmlns:p="http://schemas.openxmlformats.org/presentationml/2006/main" xmlns:c="http://schemas.openxmlformats.org/drawingml/2006/chart" xmlns:dgm="http://schemas.openxmlformats.org/drawingml/2006/diagram" xmlns:o="urn:schemas-microsoft-com:office:office" xmlns:v="urn:schemas-microsoft-com:vml" xmlns:pvml="urn:schemas-microsoft-com:office:powerpoint" xmlns:com="http://schemas.openxmlformats.org/drawingml/2006/compatibility" xmlns:p14="http://schemas.microsoft.com/office/powerpoint/2010/main" xmlns:p15="http://schemas.microsoft.com/office/powerpoint/2012/main" xmlns:ahyp="http://schemas.microsoft.com/office/drawing/2018/hyperlinkcolor" matchingName="Big number">
+<p:sldLayout xmlns:a="http://schemas.openxmlformats.org/drawingml/2006/main" xmlns:r="http://schemas.openxmlformats.org/officeDocument/2006/relationships" xmlns:p="http://schemas.openxmlformats.org/presentationml/2006/main" matchingName="Big number">
   <p:cSld name="BIG_NUMBER">
     <p:spTree>
       <p:nvGrpSpPr>
-        <p:cNvPr id="44" name="Shape 44"/>
+        <p:cNvPr id="1" name="Shape 44"/>
         <p:cNvGrpSpPr/>
         <p:nvPr/>
       </p:nvGrpSpPr>
@@ -1984,9 +1748,11 @@
       <p:sp>
         <p:nvSpPr>
           <p:cNvPr id="45" name="Google Shape;45;p11"/>
-          <p:cNvSpPr txBox="1"/>
+          <p:cNvSpPr txBox="1">
+            <a:spLocks noGrp="1"/>
+          </p:cNvSpPr>
           <p:nvPr>
-            <p:ph hasCustomPrompt="1" type="title"/>
+            <p:ph type="title" hasCustomPrompt="1"/>
           </p:nvPr>
         </p:nvSpPr>
         <p:spPr>
@@ -1999,7 +1765,7 @@
           </a:prstGeom>
         </p:spPr>
         <p:txBody>
-          <a:bodyPr anchorCtr="0" anchor="b" bIns="91425" lIns="91425" spcFirstLastPara="1" rIns="91425" wrap="square" tIns="91425">
+          <a:bodyPr spcFirstLastPara="1" wrap="square" lIns="91425" tIns="91425" rIns="91425" bIns="91425" anchor="b" anchorCtr="0">
             <a:normAutofit/>
           </a:bodyPr>
           <a:lstStyle>
@@ -2113,9 +1879,11 @@
       <p:sp>
         <p:nvSpPr>
           <p:cNvPr id="46" name="Google Shape;46;p11"/>
-          <p:cNvSpPr txBox="1"/>
+          <p:cNvSpPr txBox="1">
+            <a:spLocks noGrp="1"/>
+          </p:cNvSpPr>
           <p:nvPr>
-            <p:ph idx="1" type="body"/>
+            <p:ph type="body" idx="1"/>
           </p:nvPr>
         </p:nvSpPr>
         <p:spPr>
@@ -2128,11 +1896,11 @@
           </a:prstGeom>
         </p:spPr>
         <p:txBody>
-          <a:bodyPr anchorCtr="0" anchor="t" bIns="91425" lIns="91425" spcFirstLastPara="1" rIns="91425" wrap="square" tIns="91425">
+          <a:bodyPr spcFirstLastPara="1" wrap="square" lIns="91425" tIns="91425" rIns="91425" bIns="91425" anchor="t" anchorCtr="0">
             <a:normAutofit/>
           </a:bodyPr>
           <a:lstStyle>
-            <a:lvl1pPr indent="-342900" lvl="0" marL="457200" algn="ctr">
+            <a:lvl1pPr marL="457200" lvl="0" indent="-342900" algn="ctr">
               <a:spcBef>
                 <a:spcPts val="0"/>
               </a:spcBef>
@@ -2143,7 +1911,7 @@
               <a:buChar char="●"/>
               <a:defRPr/>
             </a:lvl1pPr>
-            <a:lvl2pPr indent="-317500" lvl="1" marL="914400" algn="ctr">
+            <a:lvl2pPr marL="914400" lvl="1" indent="-317500" algn="ctr">
               <a:spcBef>
                 <a:spcPts val="0"/>
               </a:spcBef>
@@ -2154,7 +1922,7 @@
               <a:buChar char="○"/>
               <a:defRPr/>
             </a:lvl2pPr>
-            <a:lvl3pPr indent="-317500" lvl="2" marL="1371600" algn="ctr">
+            <a:lvl3pPr marL="1371600" lvl="2" indent="-317500" algn="ctr">
               <a:spcBef>
                 <a:spcPts val="0"/>
               </a:spcBef>
@@ -2165,7 +1933,7 @@
               <a:buChar char="■"/>
               <a:defRPr/>
             </a:lvl3pPr>
-            <a:lvl4pPr indent="-317500" lvl="3" marL="1828800" algn="ctr">
+            <a:lvl4pPr marL="1828800" lvl="3" indent="-317500" algn="ctr">
               <a:spcBef>
                 <a:spcPts val="0"/>
               </a:spcBef>
@@ -2176,7 +1944,7 @@
               <a:buChar char="●"/>
               <a:defRPr/>
             </a:lvl4pPr>
-            <a:lvl5pPr indent="-317500" lvl="4" marL="2286000" algn="ctr">
+            <a:lvl5pPr marL="2286000" lvl="4" indent="-317500" algn="ctr">
               <a:spcBef>
                 <a:spcPts val="0"/>
               </a:spcBef>
@@ -2187,7 +1955,7 @@
               <a:buChar char="○"/>
               <a:defRPr/>
             </a:lvl5pPr>
-            <a:lvl6pPr indent="-317500" lvl="5" marL="2743200" algn="ctr">
+            <a:lvl6pPr marL="2743200" lvl="5" indent="-317500" algn="ctr">
               <a:spcBef>
                 <a:spcPts val="0"/>
               </a:spcBef>
@@ -2198,7 +1966,7 @@
               <a:buChar char="■"/>
               <a:defRPr/>
             </a:lvl6pPr>
-            <a:lvl7pPr indent="-317500" lvl="6" marL="3200400" algn="ctr">
+            <a:lvl7pPr marL="3200400" lvl="6" indent="-317500" algn="ctr">
               <a:spcBef>
                 <a:spcPts val="0"/>
               </a:spcBef>
@@ -2209,7 +1977,7 @@
               <a:buChar char="●"/>
               <a:defRPr/>
             </a:lvl7pPr>
-            <a:lvl8pPr indent="-317500" lvl="7" marL="3657600" algn="ctr">
+            <a:lvl8pPr marL="3657600" lvl="7" indent="-317500" algn="ctr">
               <a:spcBef>
                 <a:spcPts val="0"/>
               </a:spcBef>
@@ -2220,7 +1988,7 @@
               <a:buChar char="○"/>
               <a:defRPr/>
             </a:lvl8pPr>
-            <a:lvl9pPr indent="-317500" lvl="8" marL="4114800" algn="ctr">
+            <a:lvl9pPr marL="4114800" lvl="8" indent="-317500" algn="ctr">
               <a:spcBef>
                 <a:spcPts val="0"/>
               </a:spcBef>
@@ -2232,15 +2000,19 @@
               <a:defRPr/>
             </a:lvl9pPr>
           </a:lstStyle>
-          <a:p/>
+          <a:p>
+            <a:endParaRPr/>
+          </a:p>
         </p:txBody>
       </p:sp>
       <p:sp>
         <p:nvSpPr>
           <p:cNvPr id="47" name="Google Shape;47;p11"/>
-          <p:cNvSpPr txBox="1"/>
+          <p:cNvSpPr txBox="1">
+            <a:spLocks noGrp="1"/>
+          </p:cNvSpPr>
           <p:nvPr>
-            <p:ph idx="12" type="sldNum"/>
+            <p:ph type="sldNum" idx="12"/>
           </p:nvPr>
         </p:nvSpPr>
         <p:spPr>
@@ -2253,7 +2025,7 @@
           </a:prstGeom>
         </p:spPr>
         <p:txBody>
-          <a:bodyPr anchorCtr="0" anchor="ctr" bIns="91425" lIns="91425" spcFirstLastPara="1" rIns="91425" wrap="square" tIns="91425">
+          <a:bodyPr spcFirstLastPara="1" wrap="square" lIns="91425" tIns="91425" rIns="91425" bIns="91425" anchor="ctr" anchorCtr="0">
             <a:normAutofit/>
           </a:bodyPr>
           <a:lstStyle>
@@ -2295,7 +2067,7 @@
             </a:lvl9pPr>
           </a:lstStyle>
           <a:p>
-            <a:pPr indent="0" lvl="0" marL="0" rtl="0" algn="r">
+            <a:pPr marL="0" lvl="0" indent="0" algn="r" rtl="0">
               <a:spcBef>
                 <a:spcPts val="0"/>
               </a:spcBef>
@@ -2321,11 +2093,11 @@
 </file>
 
 <file path=ppt/slideLayouts/slideLayout11.xml><?xml version="1.0" encoding="utf-8"?>
-<p:sldLayout xmlns:a="http://schemas.openxmlformats.org/drawingml/2006/main" xmlns:r="http://schemas.openxmlformats.org/officeDocument/2006/relationships" xmlns:mc="http://schemas.openxmlformats.org/markup-compatibility/2006" xmlns:mv="urn:schemas-microsoft-com:mac:vml" xmlns:p="http://schemas.openxmlformats.org/presentationml/2006/main" xmlns:c="http://schemas.openxmlformats.org/drawingml/2006/chart" xmlns:dgm="http://schemas.openxmlformats.org/drawingml/2006/diagram" xmlns:o="urn:schemas-microsoft-com:office:office" xmlns:v="urn:schemas-microsoft-com:vml" xmlns:pvml="urn:schemas-microsoft-com:office:powerpoint" xmlns:com="http://schemas.openxmlformats.org/drawingml/2006/compatibility" xmlns:p14="http://schemas.microsoft.com/office/powerpoint/2010/main" xmlns:p15="http://schemas.microsoft.com/office/powerpoint/2012/main" xmlns:ahyp="http://schemas.microsoft.com/office/drawing/2018/hyperlinkcolor" matchingName="Blank" type="blank">
+<p:sldLayout xmlns:a="http://schemas.openxmlformats.org/drawingml/2006/main" xmlns:r="http://schemas.openxmlformats.org/officeDocument/2006/relationships" xmlns:p="http://schemas.openxmlformats.org/presentationml/2006/main" matchingName="Blank" type="blank">
   <p:cSld name="BLANK">
     <p:spTree>
       <p:nvGrpSpPr>
-        <p:cNvPr id="48" name="Shape 48"/>
+        <p:cNvPr id="1" name="Shape 48"/>
         <p:cNvGrpSpPr/>
         <p:nvPr/>
       </p:nvGrpSpPr>
@@ -2340,9 +2112,11 @@
       <p:sp>
         <p:nvSpPr>
           <p:cNvPr id="49" name="Google Shape;49;p12"/>
-          <p:cNvSpPr txBox="1"/>
+          <p:cNvSpPr txBox="1">
+            <a:spLocks noGrp="1"/>
+          </p:cNvSpPr>
           <p:nvPr>
-            <p:ph idx="12" type="sldNum"/>
+            <p:ph type="sldNum" idx="12"/>
           </p:nvPr>
         </p:nvSpPr>
         <p:spPr>
@@ -2355,7 +2129,7 @@
           </a:prstGeom>
         </p:spPr>
         <p:txBody>
-          <a:bodyPr anchorCtr="0" anchor="ctr" bIns="91425" lIns="91425" spcFirstLastPara="1" rIns="91425" wrap="square" tIns="91425">
+          <a:bodyPr spcFirstLastPara="1" wrap="square" lIns="91425" tIns="91425" rIns="91425" bIns="91425" anchor="ctr" anchorCtr="0">
             <a:normAutofit/>
           </a:bodyPr>
           <a:lstStyle>
@@ -2397,7 +2171,7 @@
             </a:lvl9pPr>
           </a:lstStyle>
           <a:p>
-            <a:pPr indent="0" lvl="0" marL="0" rtl="0" algn="r">
+            <a:pPr marL="0" lvl="0" indent="0" algn="r" rtl="0">
               <a:spcBef>
                 <a:spcPts val="0"/>
               </a:spcBef>
@@ -2423,11 +2197,11 @@
 </file>
 
 <file path=ppt/slideLayouts/slideLayout2.xml><?xml version="1.0" encoding="utf-8"?>
-<p:sldLayout xmlns:a="http://schemas.openxmlformats.org/drawingml/2006/main" xmlns:r="http://schemas.openxmlformats.org/officeDocument/2006/relationships" xmlns:mc="http://schemas.openxmlformats.org/markup-compatibility/2006" xmlns:mv="urn:schemas-microsoft-com:mac:vml" xmlns:p="http://schemas.openxmlformats.org/presentationml/2006/main" xmlns:c="http://schemas.openxmlformats.org/drawingml/2006/chart" xmlns:dgm="http://schemas.openxmlformats.org/drawingml/2006/diagram" xmlns:o="urn:schemas-microsoft-com:office:office" xmlns:v="urn:schemas-microsoft-com:vml" xmlns:pvml="urn:schemas-microsoft-com:office:powerpoint" xmlns:com="http://schemas.openxmlformats.org/drawingml/2006/compatibility" xmlns:p14="http://schemas.microsoft.com/office/powerpoint/2010/main" xmlns:p15="http://schemas.microsoft.com/office/powerpoint/2012/main" xmlns:ahyp="http://schemas.microsoft.com/office/drawing/2018/hyperlinkcolor" matchingName="Section header" type="secHead">
+<p:sldLayout xmlns:a="http://schemas.openxmlformats.org/drawingml/2006/main" xmlns:r="http://schemas.openxmlformats.org/officeDocument/2006/relationships" xmlns:p="http://schemas.openxmlformats.org/presentationml/2006/main" matchingName="Section header" type="secHead">
   <p:cSld name="SECTION_HEADER">
     <p:spTree>
       <p:nvGrpSpPr>
-        <p:cNvPr id="13" name="Shape 13"/>
+        <p:cNvPr id="1" name="Shape 13"/>
         <p:cNvGrpSpPr/>
         <p:nvPr/>
       </p:nvGrpSpPr>
@@ -2442,7 +2216,9 @@
       <p:sp>
         <p:nvSpPr>
           <p:cNvPr id="14" name="Google Shape;14;p3"/>
-          <p:cNvSpPr txBox="1"/>
+          <p:cNvSpPr txBox="1">
+            <a:spLocks noGrp="1"/>
+          </p:cNvSpPr>
           <p:nvPr>
             <p:ph type="title"/>
           </p:nvPr>
@@ -2457,7 +2233,7 @@
           </a:prstGeom>
         </p:spPr>
         <p:txBody>
-          <a:bodyPr anchorCtr="0" anchor="ctr" bIns="91425" lIns="91425" spcFirstLastPara="1" rIns="91425" wrap="square" tIns="91425">
+          <a:bodyPr spcFirstLastPara="1" wrap="square" lIns="91425" tIns="91425" rIns="91425" bIns="91425" anchor="ctr" anchorCtr="0">
             <a:normAutofit/>
           </a:bodyPr>
           <a:lstStyle>
@@ -2561,15 +2337,19 @@
               <a:defRPr sz="3600"/>
             </a:lvl9pPr>
           </a:lstStyle>
-          <a:p/>
+          <a:p>
+            <a:endParaRPr/>
+          </a:p>
         </p:txBody>
       </p:sp>
       <p:sp>
         <p:nvSpPr>
           <p:cNvPr id="15" name="Google Shape;15;p3"/>
-          <p:cNvSpPr txBox="1"/>
+          <p:cNvSpPr txBox="1">
+            <a:spLocks noGrp="1"/>
+          </p:cNvSpPr>
           <p:nvPr>
-            <p:ph idx="12" type="sldNum"/>
+            <p:ph type="sldNum" idx="12"/>
           </p:nvPr>
         </p:nvSpPr>
         <p:spPr>
@@ -2582,7 +2362,7 @@
           </a:prstGeom>
         </p:spPr>
         <p:txBody>
-          <a:bodyPr anchorCtr="0" anchor="ctr" bIns="91425" lIns="91425" spcFirstLastPara="1" rIns="91425" wrap="square" tIns="91425">
+          <a:bodyPr spcFirstLastPara="1" wrap="square" lIns="91425" tIns="91425" rIns="91425" bIns="91425" anchor="ctr" anchorCtr="0">
             <a:normAutofit/>
           </a:bodyPr>
           <a:lstStyle>
@@ -2624,7 +2404,7 @@
             </a:lvl9pPr>
           </a:lstStyle>
           <a:p>
-            <a:pPr indent="0" lvl="0" marL="0" rtl="0" algn="r">
+            <a:pPr marL="0" lvl="0" indent="0" algn="r" rtl="0">
               <a:spcBef>
                 <a:spcPts val="0"/>
               </a:spcBef>
@@ -2650,11 +2430,11 @@
 </file>
 
 <file path=ppt/slideLayouts/slideLayout3.xml><?xml version="1.0" encoding="utf-8"?>
-<p:sldLayout xmlns:a="http://schemas.openxmlformats.org/drawingml/2006/main" xmlns:r="http://schemas.openxmlformats.org/officeDocument/2006/relationships" xmlns:mc="http://schemas.openxmlformats.org/markup-compatibility/2006" xmlns:mv="urn:schemas-microsoft-com:mac:vml" xmlns:p="http://schemas.openxmlformats.org/presentationml/2006/main" xmlns:c="http://schemas.openxmlformats.org/drawingml/2006/chart" xmlns:dgm="http://schemas.openxmlformats.org/drawingml/2006/diagram" xmlns:o="urn:schemas-microsoft-com:office:office" xmlns:v="urn:schemas-microsoft-com:vml" xmlns:pvml="urn:schemas-microsoft-com:office:powerpoint" xmlns:com="http://schemas.openxmlformats.org/drawingml/2006/compatibility" xmlns:p14="http://schemas.microsoft.com/office/powerpoint/2010/main" xmlns:p15="http://schemas.microsoft.com/office/powerpoint/2012/main" xmlns:ahyp="http://schemas.microsoft.com/office/drawing/2018/hyperlinkcolor" matchingName="Title and body" type="tx">
+<p:sldLayout xmlns:a="http://schemas.openxmlformats.org/drawingml/2006/main" xmlns:r="http://schemas.openxmlformats.org/officeDocument/2006/relationships" xmlns:p="http://schemas.openxmlformats.org/presentationml/2006/main" matchingName="Title and body" type="tx">
   <p:cSld name="TITLE_AND_BODY">
     <p:spTree>
       <p:nvGrpSpPr>
-        <p:cNvPr id="16" name="Shape 16"/>
+        <p:cNvPr id="1" name="Shape 16"/>
         <p:cNvGrpSpPr/>
         <p:nvPr/>
       </p:nvGrpSpPr>
@@ -2669,7 +2449,9 @@
       <p:sp>
         <p:nvSpPr>
           <p:cNvPr id="17" name="Google Shape;17;p4"/>
-          <p:cNvSpPr txBox="1"/>
+          <p:cNvSpPr txBox="1">
+            <a:spLocks noGrp="1"/>
+          </p:cNvSpPr>
           <p:nvPr>
             <p:ph type="title"/>
           </p:nvPr>
@@ -2684,7 +2466,7 @@
           </a:prstGeom>
         </p:spPr>
         <p:txBody>
-          <a:bodyPr anchorCtr="0" anchor="t" bIns="91425" lIns="91425" spcFirstLastPara="1" rIns="91425" wrap="square" tIns="91425">
+          <a:bodyPr spcFirstLastPara="1" wrap="square" lIns="91425" tIns="91425" rIns="91425" bIns="91425" anchor="t" anchorCtr="0">
             <a:normAutofit/>
           </a:bodyPr>
           <a:lstStyle>
@@ -2788,15 +2570,19 @@
               <a:defRPr/>
             </a:lvl9pPr>
           </a:lstStyle>
-          <a:p/>
+          <a:p>
+            <a:endParaRPr/>
+          </a:p>
         </p:txBody>
       </p:sp>
       <p:sp>
         <p:nvSpPr>
           <p:cNvPr id="18" name="Google Shape;18;p4"/>
-          <p:cNvSpPr txBox="1"/>
+          <p:cNvSpPr txBox="1">
+            <a:spLocks noGrp="1"/>
+          </p:cNvSpPr>
           <p:nvPr>
-            <p:ph idx="1" type="body"/>
+            <p:ph type="body" idx="1"/>
           </p:nvPr>
         </p:nvSpPr>
         <p:spPr>
@@ -2809,11 +2595,11 @@
           </a:prstGeom>
         </p:spPr>
         <p:txBody>
-          <a:bodyPr anchorCtr="0" anchor="t" bIns="91425" lIns="91425" spcFirstLastPara="1" rIns="91425" wrap="square" tIns="91425">
+          <a:bodyPr spcFirstLastPara="1" wrap="square" lIns="91425" tIns="91425" rIns="91425" bIns="91425" anchor="t" anchorCtr="0">
             <a:normAutofit/>
           </a:bodyPr>
           <a:lstStyle>
-            <a:lvl1pPr indent="-342900" lvl="0" marL="457200">
+            <a:lvl1pPr marL="457200" lvl="0" indent="-342900">
               <a:spcBef>
                 <a:spcPts val="0"/>
               </a:spcBef>
@@ -2824,7 +2610,7 @@
               <a:buChar char="●"/>
               <a:defRPr/>
             </a:lvl1pPr>
-            <a:lvl2pPr indent="-317500" lvl="1" marL="914400">
+            <a:lvl2pPr marL="914400" lvl="1" indent="-317500">
               <a:spcBef>
                 <a:spcPts val="0"/>
               </a:spcBef>
@@ -2835,7 +2621,7 @@
               <a:buChar char="○"/>
               <a:defRPr/>
             </a:lvl2pPr>
-            <a:lvl3pPr indent="-317500" lvl="2" marL="1371600">
+            <a:lvl3pPr marL="1371600" lvl="2" indent="-317500">
               <a:spcBef>
                 <a:spcPts val="0"/>
               </a:spcBef>
@@ -2846,7 +2632,7 @@
               <a:buChar char="■"/>
               <a:defRPr/>
             </a:lvl3pPr>
-            <a:lvl4pPr indent="-317500" lvl="3" marL="1828800">
+            <a:lvl4pPr marL="1828800" lvl="3" indent="-317500">
               <a:spcBef>
                 <a:spcPts val="0"/>
               </a:spcBef>
@@ -2857,7 +2643,7 @@
               <a:buChar char="●"/>
               <a:defRPr/>
             </a:lvl4pPr>
-            <a:lvl5pPr indent="-317500" lvl="4" marL="2286000">
+            <a:lvl5pPr marL="2286000" lvl="4" indent="-317500">
               <a:spcBef>
                 <a:spcPts val="0"/>
               </a:spcBef>
@@ -2868,7 +2654,7 @@
               <a:buChar char="○"/>
               <a:defRPr/>
             </a:lvl5pPr>
-            <a:lvl6pPr indent="-317500" lvl="5" marL="2743200">
+            <a:lvl6pPr marL="2743200" lvl="5" indent="-317500">
               <a:spcBef>
                 <a:spcPts val="0"/>
               </a:spcBef>
@@ -2879,7 +2665,7 @@
               <a:buChar char="■"/>
               <a:defRPr/>
             </a:lvl6pPr>
-            <a:lvl7pPr indent="-317500" lvl="6" marL="3200400">
+            <a:lvl7pPr marL="3200400" lvl="6" indent="-317500">
               <a:spcBef>
                 <a:spcPts val="0"/>
               </a:spcBef>
@@ -2890,7 +2676,7 @@
               <a:buChar char="●"/>
               <a:defRPr/>
             </a:lvl7pPr>
-            <a:lvl8pPr indent="-317500" lvl="7" marL="3657600">
+            <a:lvl8pPr marL="3657600" lvl="7" indent="-317500">
               <a:spcBef>
                 <a:spcPts val="0"/>
               </a:spcBef>
@@ -2901,7 +2687,7 @@
               <a:buChar char="○"/>
               <a:defRPr/>
             </a:lvl8pPr>
-            <a:lvl9pPr indent="-317500" lvl="8" marL="4114800">
+            <a:lvl9pPr marL="4114800" lvl="8" indent="-317500">
               <a:spcBef>
                 <a:spcPts val="0"/>
               </a:spcBef>
@@ -2913,15 +2699,19 @@
               <a:defRPr/>
             </a:lvl9pPr>
           </a:lstStyle>
-          <a:p/>
+          <a:p>
+            <a:endParaRPr/>
+          </a:p>
         </p:txBody>
       </p:sp>
       <p:sp>
         <p:nvSpPr>
           <p:cNvPr id="19" name="Google Shape;19;p4"/>
-          <p:cNvSpPr txBox="1"/>
+          <p:cNvSpPr txBox="1">
+            <a:spLocks noGrp="1"/>
+          </p:cNvSpPr>
           <p:nvPr>
-            <p:ph idx="12" type="sldNum"/>
+            <p:ph type="sldNum" idx="12"/>
           </p:nvPr>
         </p:nvSpPr>
         <p:spPr>
@@ -2934,7 +2724,7 @@
           </a:prstGeom>
         </p:spPr>
         <p:txBody>
-          <a:bodyPr anchorCtr="0" anchor="ctr" bIns="91425" lIns="91425" spcFirstLastPara="1" rIns="91425" wrap="square" tIns="91425">
+          <a:bodyPr spcFirstLastPara="1" wrap="square" lIns="91425" tIns="91425" rIns="91425" bIns="91425" anchor="ctr" anchorCtr="0">
             <a:normAutofit/>
           </a:bodyPr>
           <a:lstStyle>
@@ -2976,7 +2766,7 @@
             </a:lvl9pPr>
           </a:lstStyle>
           <a:p>
-            <a:pPr indent="0" lvl="0" marL="0" rtl="0" algn="r">
+            <a:pPr marL="0" lvl="0" indent="0" algn="r" rtl="0">
               <a:spcBef>
                 <a:spcPts val="0"/>
               </a:spcBef>
@@ -3002,11 +2792,11 @@
 </file>
 
 <file path=ppt/slideLayouts/slideLayout4.xml><?xml version="1.0" encoding="utf-8"?>
-<p:sldLayout xmlns:a="http://schemas.openxmlformats.org/drawingml/2006/main" xmlns:r="http://schemas.openxmlformats.org/officeDocument/2006/relationships" xmlns:mc="http://schemas.openxmlformats.org/markup-compatibility/2006" xmlns:mv="urn:schemas-microsoft-com:mac:vml" xmlns:p="http://schemas.openxmlformats.org/presentationml/2006/main" xmlns:c="http://schemas.openxmlformats.org/drawingml/2006/chart" xmlns:dgm="http://schemas.openxmlformats.org/drawingml/2006/diagram" xmlns:o="urn:schemas-microsoft-com:office:office" xmlns:v="urn:schemas-microsoft-com:vml" xmlns:pvml="urn:schemas-microsoft-com:office:powerpoint" xmlns:com="http://schemas.openxmlformats.org/drawingml/2006/compatibility" xmlns:p14="http://schemas.microsoft.com/office/powerpoint/2010/main" xmlns:p15="http://schemas.microsoft.com/office/powerpoint/2012/main" xmlns:ahyp="http://schemas.microsoft.com/office/drawing/2018/hyperlinkcolor" matchingName="Title and two columns" type="twoColTx">
+<p:sldLayout xmlns:a="http://schemas.openxmlformats.org/drawingml/2006/main" xmlns:r="http://schemas.openxmlformats.org/officeDocument/2006/relationships" xmlns:p="http://schemas.openxmlformats.org/presentationml/2006/main" matchingName="Title and two columns" type="twoColTx">
   <p:cSld name="TITLE_AND_TWO_COLUMNS">
     <p:spTree>
       <p:nvGrpSpPr>
-        <p:cNvPr id="20" name="Shape 20"/>
+        <p:cNvPr id="1" name="Shape 20"/>
         <p:cNvGrpSpPr/>
         <p:nvPr/>
       </p:nvGrpSpPr>
@@ -3021,7 +2811,9 @@
       <p:sp>
         <p:nvSpPr>
           <p:cNvPr id="21" name="Google Shape;21;p5"/>
-          <p:cNvSpPr txBox="1"/>
+          <p:cNvSpPr txBox="1">
+            <a:spLocks noGrp="1"/>
+          </p:cNvSpPr>
           <p:nvPr>
             <p:ph type="title"/>
           </p:nvPr>
@@ -3036,7 +2828,7 @@
           </a:prstGeom>
         </p:spPr>
         <p:txBody>
-          <a:bodyPr anchorCtr="0" anchor="t" bIns="91425" lIns="91425" spcFirstLastPara="1" rIns="91425" wrap="square" tIns="91425">
+          <a:bodyPr spcFirstLastPara="1" wrap="square" lIns="91425" tIns="91425" rIns="91425" bIns="91425" anchor="t" anchorCtr="0">
             <a:normAutofit/>
           </a:bodyPr>
           <a:lstStyle>
@@ -3140,15 +2932,19 @@
               <a:defRPr/>
             </a:lvl9pPr>
           </a:lstStyle>
-          <a:p/>
+          <a:p>
+            <a:endParaRPr/>
+          </a:p>
         </p:txBody>
       </p:sp>
       <p:sp>
         <p:nvSpPr>
           <p:cNvPr id="22" name="Google Shape;22;p5"/>
-          <p:cNvSpPr txBox="1"/>
+          <p:cNvSpPr txBox="1">
+            <a:spLocks noGrp="1"/>
+          </p:cNvSpPr>
           <p:nvPr>
-            <p:ph idx="1" type="body"/>
+            <p:ph type="body" idx="1"/>
           </p:nvPr>
         </p:nvSpPr>
         <p:spPr>
@@ -3161,11 +2957,11 @@
           </a:prstGeom>
         </p:spPr>
         <p:txBody>
-          <a:bodyPr anchorCtr="0" anchor="t" bIns="91425" lIns="91425" spcFirstLastPara="1" rIns="91425" wrap="square" tIns="91425">
+          <a:bodyPr spcFirstLastPara="1" wrap="square" lIns="91425" tIns="91425" rIns="91425" bIns="91425" anchor="t" anchorCtr="0">
             <a:normAutofit/>
           </a:bodyPr>
           <a:lstStyle>
-            <a:lvl1pPr indent="-317500" lvl="0" marL="457200">
+            <a:lvl1pPr marL="457200" lvl="0" indent="-317500">
               <a:spcBef>
                 <a:spcPts val="0"/>
               </a:spcBef>
@@ -3176,7 +2972,7 @@
               <a:buChar char="●"/>
               <a:defRPr sz="1400"/>
             </a:lvl1pPr>
-            <a:lvl2pPr indent="-304800" lvl="1" marL="914400">
+            <a:lvl2pPr marL="914400" lvl="1" indent="-304800">
               <a:spcBef>
                 <a:spcPts val="0"/>
               </a:spcBef>
@@ -3187,7 +2983,7 @@
               <a:buChar char="○"/>
               <a:defRPr sz="1200"/>
             </a:lvl2pPr>
-            <a:lvl3pPr indent="-304800" lvl="2" marL="1371600">
+            <a:lvl3pPr marL="1371600" lvl="2" indent="-304800">
               <a:spcBef>
                 <a:spcPts val="0"/>
               </a:spcBef>
@@ -3198,7 +2994,7 @@
               <a:buChar char="■"/>
               <a:defRPr sz="1200"/>
             </a:lvl3pPr>
-            <a:lvl4pPr indent="-304800" lvl="3" marL="1828800">
+            <a:lvl4pPr marL="1828800" lvl="3" indent="-304800">
               <a:spcBef>
                 <a:spcPts val="0"/>
               </a:spcBef>
@@ -3209,7 +3005,7 @@
               <a:buChar char="●"/>
               <a:defRPr sz="1200"/>
             </a:lvl4pPr>
-            <a:lvl5pPr indent="-304800" lvl="4" marL="2286000">
+            <a:lvl5pPr marL="2286000" lvl="4" indent="-304800">
               <a:spcBef>
                 <a:spcPts val="0"/>
               </a:spcBef>
@@ -3220,7 +3016,7 @@
               <a:buChar char="○"/>
               <a:defRPr sz="1200"/>
             </a:lvl5pPr>
-            <a:lvl6pPr indent="-304800" lvl="5" marL="2743200">
+            <a:lvl6pPr marL="2743200" lvl="5" indent="-304800">
               <a:spcBef>
                 <a:spcPts val="0"/>
               </a:spcBef>
@@ -3231,7 +3027,7 @@
               <a:buChar char="■"/>
               <a:defRPr sz="1200"/>
             </a:lvl6pPr>
-            <a:lvl7pPr indent="-304800" lvl="6" marL="3200400">
+            <a:lvl7pPr marL="3200400" lvl="6" indent="-304800">
               <a:spcBef>
                 <a:spcPts val="0"/>
               </a:spcBef>
@@ -3242,7 +3038,7 @@
               <a:buChar char="●"/>
               <a:defRPr sz="1200"/>
             </a:lvl7pPr>
-            <a:lvl8pPr indent="-304800" lvl="7" marL="3657600">
+            <a:lvl8pPr marL="3657600" lvl="7" indent="-304800">
               <a:spcBef>
                 <a:spcPts val="0"/>
               </a:spcBef>
@@ -3253,7 +3049,7 @@
               <a:buChar char="○"/>
               <a:defRPr sz="1200"/>
             </a:lvl8pPr>
-            <a:lvl9pPr indent="-304800" lvl="8" marL="4114800">
+            <a:lvl9pPr marL="4114800" lvl="8" indent="-304800">
               <a:spcBef>
                 <a:spcPts val="0"/>
               </a:spcBef>
@@ -3265,15 +3061,19 @@
               <a:defRPr sz="1200"/>
             </a:lvl9pPr>
           </a:lstStyle>
-          <a:p/>
+          <a:p>
+            <a:endParaRPr/>
+          </a:p>
         </p:txBody>
       </p:sp>
       <p:sp>
         <p:nvSpPr>
           <p:cNvPr id="23" name="Google Shape;23;p5"/>
-          <p:cNvSpPr txBox="1"/>
+          <p:cNvSpPr txBox="1">
+            <a:spLocks noGrp="1"/>
+          </p:cNvSpPr>
           <p:nvPr>
-            <p:ph idx="2" type="body"/>
+            <p:ph type="body" idx="2"/>
           </p:nvPr>
         </p:nvSpPr>
         <p:spPr>
@@ -3286,11 +3086,11 @@
           </a:prstGeom>
         </p:spPr>
         <p:txBody>
-          <a:bodyPr anchorCtr="0" anchor="t" bIns="91425" lIns="91425" spcFirstLastPara="1" rIns="91425" wrap="square" tIns="91425">
+          <a:bodyPr spcFirstLastPara="1" wrap="square" lIns="91425" tIns="91425" rIns="91425" bIns="91425" anchor="t" anchorCtr="0">
             <a:normAutofit/>
           </a:bodyPr>
           <a:lstStyle>
-            <a:lvl1pPr indent="-317500" lvl="0" marL="457200">
+            <a:lvl1pPr marL="457200" lvl="0" indent="-317500">
               <a:spcBef>
                 <a:spcPts val="0"/>
               </a:spcBef>
@@ -3301,7 +3101,7 @@
               <a:buChar char="●"/>
               <a:defRPr sz="1400"/>
             </a:lvl1pPr>
-            <a:lvl2pPr indent="-304800" lvl="1" marL="914400">
+            <a:lvl2pPr marL="914400" lvl="1" indent="-304800">
               <a:spcBef>
                 <a:spcPts val="0"/>
               </a:spcBef>
@@ -3312,7 +3112,7 @@
               <a:buChar char="○"/>
               <a:defRPr sz="1200"/>
             </a:lvl2pPr>
-            <a:lvl3pPr indent="-304800" lvl="2" marL="1371600">
+            <a:lvl3pPr marL="1371600" lvl="2" indent="-304800">
               <a:spcBef>
                 <a:spcPts val="0"/>
               </a:spcBef>
@@ -3323,7 +3123,7 @@
               <a:buChar char="■"/>
               <a:defRPr sz="1200"/>
             </a:lvl3pPr>
-            <a:lvl4pPr indent="-304800" lvl="3" marL="1828800">
+            <a:lvl4pPr marL="1828800" lvl="3" indent="-304800">
               <a:spcBef>
                 <a:spcPts val="0"/>
               </a:spcBef>
@@ -3334,7 +3134,7 @@
               <a:buChar char="●"/>
               <a:defRPr sz="1200"/>
             </a:lvl4pPr>
-            <a:lvl5pPr indent="-304800" lvl="4" marL="2286000">
+            <a:lvl5pPr marL="2286000" lvl="4" indent="-304800">
               <a:spcBef>
                 <a:spcPts val="0"/>
               </a:spcBef>
@@ -3345,7 +3145,7 @@
               <a:buChar char="○"/>
               <a:defRPr sz="1200"/>
             </a:lvl5pPr>
-            <a:lvl6pPr indent="-304800" lvl="5" marL="2743200">
+            <a:lvl6pPr marL="2743200" lvl="5" indent="-304800">
               <a:spcBef>
                 <a:spcPts val="0"/>
               </a:spcBef>
@@ -3356,7 +3156,7 @@
               <a:buChar char="■"/>
               <a:defRPr sz="1200"/>
             </a:lvl6pPr>
-            <a:lvl7pPr indent="-304800" lvl="6" marL="3200400">
+            <a:lvl7pPr marL="3200400" lvl="6" indent="-304800">
               <a:spcBef>
                 <a:spcPts val="0"/>
               </a:spcBef>
@@ -3367,7 +3167,7 @@
               <a:buChar char="●"/>
               <a:defRPr sz="1200"/>
             </a:lvl7pPr>
-            <a:lvl8pPr indent="-304800" lvl="7" marL="3657600">
+            <a:lvl8pPr marL="3657600" lvl="7" indent="-304800">
               <a:spcBef>
                 <a:spcPts val="0"/>
               </a:spcBef>
@@ -3378,7 +3178,7 @@
               <a:buChar char="○"/>
               <a:defRPr sz="1200"/>
             </a:lvl8pPr>
-            <a:lvl9pPr indent="-304800" lvl="8" marL="4114800">
+            <a:lvl9pPr marL="4114800" lvl="8" indent="-304800">
               <a:spcBef>
                 <a:spcPts val="0"/>
               </a:spcBef>
@@ -3390,15 +3190,19 @@
               <a:defRPr sz="1200"/>
             </a:lvl9pPr>
           </a:lstStyle>
-          <a:p/>
+          <a:p>
+            <a:endParaRPr/>
+          </a:p>
         </p:txBody>
       </p:sp>
       <p:sp>
         <p:nvSpPr>
           <p:cNvPr id="24" name="Google Shape;24;p5"/>
-          <p:cNvSpPr txBox="1"/>
+          <p:cNvSpPr txBox="1">
+            <a:spLocks noGrp="1"/>
+          </p:cNvSpPr>
           <p:nvPr>
-            <p:ph idx="12" type="sldNum"/>
+            <p:ph type="sldNum" idx="12"/>
           </p:nvPr>
         </p:nvSpPr>
         <p:spPr>
@@ -3411,7 +3215,7 @@
           </a:prstGeom>
         </p:spPr>
         <p:txBody>
-          <a:bodyPr anchorCtr="0" anchor="ctr" bIns="91425" lIns="91425" spcFirstLastPara="1" rIns="91425" wrap="square" tIns="91425">
+          <a:bodyPr spcFirstLastPara="1" wrap="square" lIns="91425" tIns="91425" rIns="91425" bIns="91425" anchor="ctr" anchorCtr="0">
             <a:normAutofit/>
           </a:bodyPr>
           <a:lstStyle>
@@ -3453,7 +3257,7 @@
             </a:lvl9pPr>
           </a:lstStyle>
           <a:p>
-            <a:pPr indent="0" lvl="0" marL="0" rtl="0" algn="r">
+            <a:pPr marL="0" lvl="0" indent="0" algn="r" rtl="0">
               <a:spcBef>
                 <a:spcPts val="0"/>
               </a:spcBef>
@@ -3479,11 +3283,11 @@
 </file>
 
 <file path=ppt/slideLayouts/slideLayout5.xml><?xml version="1.0" encoding="utf-8"?>
-<p:sldLayout xmlns:a="http://schemas.openxmlformats.org/drawingml/2006/main" xmlns:r="http://schemas.openxmlformats.org/officeDocument/2006/relationships" xmlns:mc="http://schemas.openxmlformats.org/markup-compatibility/2006" xmlns:mv="urn:schemas-microsoft-com:mac:vml" xmlns:p="http://schemas.openxmlformats.org/presentationml/2006/main" xmlns:c="http://schemas.openxmlformats.org/drawingml/2006/chart" xmlns:dgm="http://schemas.openxmlformats.org/drawingml/2006/diagram" xmlns:o="urn:schemas-microsoft-com:office:office" xmlns:v="urn:schemas-microsoft-com:vml" xmlns:pvml="urn:schemas-microsoft-com:office:powerpoint" xmlns:com="http://schemas.openxmlformats.org/drawingml/2006/compatibility" xmlns:p14="http://schemas.microsoft.com/office/powerpoint/2010/main" xmlns:p15="http://schemas.microsoft.com/office/powerpoint/2012/main" xmlns:ahyp="http://schemas.microsoft.com/office/drawing/2018/hyperlinkcolor" matchingName="Title only" type="titleOnly">
+<p:sldLayout xmlns:a="http://schemas.openxmlformats.org/drawingml/2006/main" xmlns:r="http://schemas.openxmlformats.org/officeDocument/2006/relationships" xmlns:p="http://schemas.openxmlformats.org/presentationml/2006/main" matchingName="Title only" type="titleOnly">
   <p:cSld name="TITLE_ONLY">
     <p:spTree>
       <p:nvGrpSpPr>
-        <p:cNvPr id="25" name="Shape 25"/>
+        <p:cNvPr id="1" name="Shape 25"/>
         <p:cNvGrpSpPr/>
         <p:nvPr/>
       </p:nvGrpSpPr>
@@ -3498,7 +3302,9 @@
       <p:sp>
         <p:nvSpPr>
           <p:cNvPr id="26" name="Google Shape;26;p6"/>
-          <p:cNvSpPr txBox="1"/>
+          <p:cNvSpPr txBox="1">
+            <a:spLocks noGrp="1"/>
+          </p:cNvSpPr>
           <p:nvPr>
             <p:ph type="title"/>
           </p:nvPr>
@@ -3513,7 +3319,7 @@
           </a:prstGeom>
         </p:spPr>
         <p:txBody>
-          <a:bodyPr anchorCtr="0" anchor="t" bIns="91425" lIns="91425" spcFirstLastPara="1" rIns="91425" wrap="square" tIns="91425">
+          <a:bodyPr spcFirstLastPara="1" wrap="square" lIns="91425" tIns="91425" rIns="91425" bIns="91425" anchor="t" anchorCtr="0">
             <a:normAutofit/>
           </a:bodyPr>
           <a:lstStyle>
@@ -3617,15 +3423,19 @@
               <a:defRPr/>
             </a:lvl9pPr>
           </a:lstStyle>
-          <a:p/>
+          <a:p>
+            <a:endParaRPr/>
+          </a:p>
         </p:txBody>
       </p:sp>
       <p:sp>
         <p:nvSpPr>
           <p:cNvPr id="27" name="Google Shape;27;p6"/>
-          <p:cNvSpPr txBox="1"/>
+          <p:cNvSpPr txBox="1">
+            <a:spLocks noGrp="1"/>
+          </p:cNvSpPr>
           <p:nvPr>
-            <p:ph idx="12" type="sldNum"/>
+            <p:ph type="sldNum" idx="12"/>
           </p:nvPr>
         </p:nvSpPr>
         <p:spPr>
@@ -3638,7 +3448,7 @@
           </a:prstGeom>
         </p:spPr>
         <p:txBody>
-          <a:bodyPr anchorCtr="0" anchor="ctr" bIns="91425" lIns="91425" spcFirstLastPara="1" rIns="91425" wrap="square" tIns="91425">
+          <a:bodyPr spcFirstLastPara="1" wrap="square" lIns="91425" tIns="91425" rIns="91425" bIns="91425" anchor="ctr" anchorCtr="0">
             <a:normAutofit/>
           </a:bodyPr>
           <a:lstStyle>
@@ -3680,7 +3490,7 @@
             </a:lvl9pPr>
           </a:lstStyle>
           <a:p>
-            <a:pPr indent="0" lvl="0" marL="0" rtl="0" algn="r">
+            <a:pPr marL="0" lvl="0" indent="0" algn="r" rtl="0">
               <a:spcBef>
                 <a:spcPts val="0"/>
               </a:spcBef>
@@ -3706,11 +3516,11 @@
 </file>
 
 <file path=ppt/slideLayouts/slideLayout6.xml><?xml version="1.0" encoding="utf-8"?>
-<p:sldLayout xmlns:a="http://schemas.openxmlformats.org/drawingml/2006/main" xmlns:r="http://schemas.openxmlformats.org/officeDocument/2006/relationships" xmlns:mc="http://schemas.openxmlformats.org/markup-compatibility/2006" xmlns:mv="urn:schemas-microsoft-com:mac:vml" xmlns:p="http://schemas.openxmlformats.org/presentationml/2006/main" xmlns:c="http://schemas.openxmlformats.org/drawingml/2006/chart" xmlns:dgm="http://schemas.openxmlformats.org/drawingml/2006/diagram" xmlns:o="urn:schemas-microsoft-com:office:office" xmlns:v="urn:schemas-microsoft-com:vml" xmlns:pvml="urn:schemas-microsoft-com:office:powerpoint" xmlns:com="http://schemas.openxmlformats.org/drawingml/2006/compatibility" xmlns:p14="http://schemas.microsoft.com/office/powerpoint/2010/main" xmlns:p15="http://schemas.microsoft.com/office/powerpoint/2012/main" xmlns:ahyp="http://schemas.microsoft.com/office/drawing/2018/hyperlinkcolor" matchingName="One column text">
+<p:sldLayout xmlns:a="http://schemas.openxmlformats.org/drawingml/2006/main" xmlns:r="http://schemas.openxmlformats.org/officeDocument/2006/relationships" xmlns:p="http://schemas.openxmlformats.org/presentationml/2006/main" matchingName="One column text">
   <p:cSld name="ONE_COLUMN_TEXT">
     <p:spTree>
       <p:nvGrpSpPr>
-        <p:cNvPr id="28" name="Shape 28"/>
+        <p:cNvPr id="1" name="Shape 28"/>
         <p:cNvGrpSpPr/>
         <p:nvPr/>
       </p:nvGrpSpPr>
@@ -3725,7 +3535,9 @@
       <p:sp>
         <p:nvSpPr>
           <p:cNvPr id="29" name="Google Shape;29;p7"/>
-          <p:cNvSpPr txBox="1"/>
+          <p:cNvSpPr txBox="1">
+            <a:spLocks noGrp="1"/>
+          </p:cNvSpPr>
           <p:nvPr>
             <p:ph type="title"/>
           </p:nvPr>
@@ -3740,7 +3552,7 @@
           </a:prstGeom>
         </p:spPr>
         <p:txBody>
-          <a:bodyPr anchorCtr="0" anchor="b" bIns="91425" lIns="91425" spcFirstLastPara="1" rIns="91425" wrap="square" tIns="91425">
+          <a:bodyPr spcFirstLastPara="1" wrap="square" lIns="91425" tIns="91425" rIns="91425" bIns="91425" anchor="b" anchorCtr="0">
             <a:normAutofit/>
           </a:bodyPr>
           <a:lstStyle>
@@ -3844,15 +3656,19 @@
               <a:defRPr sz="2400"/>
             </a:lvl9pPr>
           </a:lstStyle>
-          <a:p/>
+          <a:p>
+            <a:endParaRPr/>
+          </a:p>
         </p:txBody>
       </p:sp>
       <p:sp>
         <p:nvSpPr>
           <p:cNvPr id="30" name="Google Shape;30;p7"/>
-          <p:cNvSpPr txBox="1"/>
+          <p:cNvSpPr txBox="1">
+            <a:spLocks noGrp="1"/>
+          </p:cNvSpPr>
           <p:nvPr>
-            <p:ph idx="1" type="body"/>
+            <p:ph type="body" idx="1"/>
           </p:nvPr>
         </p:nvSpPr>
         <p:spPr>
@@ -3865,11 +3681,11 @@
           </a:prstGeom>
         </p:spPr>
         <p:txBody>
-          <a:bodyPr anchorCtr="0" anchor="t" bIns="91425" lIns="91425" spcFirstLastPara="1" rIns="91425" wrap="square" tIns="91425">
+          <a:bodyPr spcFirstLastPara="1" wrap="square" lIns="91425" tIns="91425" rIns="91425" bIns="91425" anchor="t" anchorCtr="0">
             <a:normAutofit/>
           </a:bodyPr>
           <a:lstStyle>
-            <a:lvl1pPr indent="-304800" lvl="0" marL="457200">
+            <a:lvl1pPr marL="457200" lvl="0" indent="-304800">
               <a:spcBef>
                 <a:spcPts val="0"/>
               </a:spcBef>
@@ -3880,7 +3696,7 @@
               <a:buChar char="●"/>
               <a:defRPr sz="1200"/>
             </a:lvl1pPr>
-            <a:lvl2pPr indent="-304800" lvl="1" marL="914400">
+            <a:lvl2pPr marL="914400" lvl="1" indent="-304800">
               <a:spcBef>
                 <a:spcPts val="0"/>
               </a:spcBef>
@@ -3891,7 +3707,7 @@
               <a:buChar char="○"/>
               <a:defRPr sz="1200"/>
             </a:lvl2pPr>
-            <a:lvl3pPr indent="-304800" lvl="2" marL="1371600">
+            <a:lvl3pPr marL="1371600" lvl="2" indent="-304800">
               <a:spcBef>
                 <a:spcPts val="0"/>
               </a:spcBef>
@@ -3902,7 +3718,7 @@
               <a:buChar char="■"/>
               <a:defRPr sz="1200"/>
             </a:lvl3pPr>
-            <a:lvl4pPr indent="-304800" lvl="3" marL="1828800">
+            <a:lvl4pPr marL="1828800" lvl="3" indent="-304800">
               <a:spcBef>
                 <a:spcPts val="0"/>
               </a:spcBef>
@@ -3913,7 +3729,7 @@
               <a:buChar char="●"/>
               <a:defRPr sz="1200"/>
             </a:lvl4pPr>
-            <a:lvl5pPr indent="-304800" lvl="4" marL="2286000">
+            <a:lvl5pPr marL="2286000" lvl="4" indent="-304800">
               <a:spcBef>
                 <a:spcPts val="0"/>
               </a:spcBef>
@@ -3924,7 +3740,7 @@
               <a:buChar char="○"/>
               <a:defRPr sz="1200"/>
             </a:lvl5pPr>
-            <a:lvl6pPr indent="-304800" lvl="5" marL="2743200">
+            <a:lvl6pPr marL="2743200" lvl="5" indent="-304800">
               <a:spcBef>
                 <a:spcPts val="0"/>
               </a:spcBef>
@@ -3935,7 +3751,7 @@
               <a:buChar char="■"/>
               <a:defRPr sz="1200"/>
             </a:lvl6pPr>
-            <a:lvl7pPr indent="-304800" lvl="6" marL="3200400">
+            <a:lvl7pPr marL="3200400" lvl="6" indent="-304800">
               <a:spcBef>
                 <a:spcPts val="0"/>
               </a:spcBef>
@@ -3946,7 +3762,7 @@
               <a:buChar char="●"/>
               <a:defRPr sz="1200"/>
             </a:lvl7pPr>
-            <a:lvl8pPr indent="-304800" lvl="7" marL="3657600">
+            <a:lvl8pPr marL="3657600" lvl="7" indent="-304800">
               <a:spcBef>
                 <a:spcPts val="0"/>
               </a:spcBef>
@@ -3957,7 +3773,7 @@
               <a:buChar char="○"/>
               <a:defRPr sz="1200"/>
             </a:lvl8pPr>
-            <a:lvl9pPr indent="-304800" lvl="8" marL="4114800">
+            <a:lvl9pPr marL="4114800" lvl="8" indent="-304800">
               <a:spcBef>
                 <a:spcPts val="0"/>
               </a:spcBef>
@@ -3969,15 +3785,19 @@
               <a:defRPr sz="1200"/>
             </a:lvl9pPr>
           </a:lstStyle>
-          <a:p/>
+          <a:p>
+            <a:endParaRPr/>
+          </a:p>
         </p:txBody>
       </p:sp>
       <p:sp>
         <p:nvSpPr>
           <p:cNvPr id="31" name="Google Shape;31;p7"/>
-          <p:cNvSpPr txBox="1"/>
+          <p:cNvSpPr txBox="1">
+            <a:spLocks noGrp="1"/>
+          </p:cNvSpPr>
           <p:nvPr>
-            <p:ph idx="12" type="sldNum"/>
+            <p:ph type="sldNum" idx="12"/>
           </p:nvPr>
         </p:nvSpPr>
         <p:spPr>
@@ -3990,7 +3810,7 @@
           </a:prstGeom>
         </p:spPr>
         <p:txBody>
-          <a:bodyPr anchorCtr="0" anchor="ctr" bIns="91425" lIns="91425" spcFirstLastPara="1" rIns="91425" wrap="square" tIns="91425">
+          <a:bodyPr spcFirstLastPara="1" wrap="square" lIns="91425" tIns="91425" rIns="91425" bIns="91425" anchor="ctr" anchorCtr="0">
             <a:normAutofit/>
           </a:bodyPr>
           <a:lstStyle>
@@ -4032,7 +3852,7 @@
             </a:lvl9pPr>
           </a:lstStyle>
           <a:p>
-            <a:pPr indent="0" lvl="0" marL="0" rtl="0" algn="r">
+            <a:pPr marL="0" lvl="0" indent="0" algn="r" rtl="0">
               <a:spcBef>
                 <a:spcPts val="0"/>
               </a:spcBef>
@@ -4058,11 +3878,11 @@
 </file>
 
 <file path=ppt/slideLayouts/slideLayout7.xml><?xml version="1.0" encoding="utf-8"?>
-<p:sldLayout xmlns:a="http://schemas.openxmlformats.org/drawingml/2006/main" xmlns:r="http://schemas.openxmlformats.org/officeDocument/2006/relationships" xmlns:mc="http://schemas.openxmlformats.org/markup-compatibility/2006" xmlns:mv="urn:schemas-microsoft-com:mac:vml" xmlns:p="http://schemas.openxmlformats.org/presentationml/2006/main" xmlns:c="http://schemas.openxmlformats.org/drawingml/2006/chart" xmlns:dgm="http://schemas.openxmlformats.org/drawingml/2006/diagram" xmlns:o="urn:schemas-microsoft-com:office:office" xmlns:v="urn:schemas-microsoft-com:vml" xmlns:pvml="urn:schemas-microsoft-com:office:powerpoint" xmlns:com="http://schemas.openxmlformats.org/drawingml/2006/compatibility" xmlns:p14="http://schemas.microsoft.com/office/powerpoint/2010/main" xmlns:p15="http://schemas.microsoft.com/office/powerpoint/2012/main" xmlns:ahyp="http://schemas.microsoft.com/office/drawing/2018/hyperlinkcolor" matchingName="Main point">
+<p:sldLayout xmlns:a="http://schemas.openxmlformats.org/drawingml/2006/main" xmlns:r="http://schemas.openxmlformats.org/officeDocument/2006/relationships" xmlns:p="http://schemas.openxmlformats.org/presentationml/2006/main" matchingName="Main point">
   <p:cSld name="MAIN_POINT">
     <p:spTree>
       <p:nvGrpSpPr>
-        <p:cNvPr id="32" name="Shape 32"/>
+        <p:cNvPr id="1" name="Shape 32"/>
         <p:cNvGrpSpPr/>
         <p:nvPr/>
       </p:nvGrpSpPr>
@@ -4077,7 +3897,9 @@
       <p:sp>
         <p:nvSpPr>
           <p:cNvPr id="33" name="Google Shape;33;p8"/>
-          <p:cNvSpPr txBox="1"/>
+          <p:cNvSpPr txBox="1">
+            <a:spLocks noGrp="1"/>
+          </p:cNvSpPr>
           <p:nvPr>
             <p:ph type="title"/>
           </p:nvPr>
@@ -4092,7 +3914,7 @@
           </a:prstGeom>
         </p:spPr>
         <p:txBody>
-          <a:bodyPr anchorCtr="0" anchor="ctr" bIns="91425" lIns="91425" spcFirstLastPara="1" rIns="91425" wrap="square" tIns="91425">
+          <a:bodyPr spcFirstLastPara="1" wrap="square" lIns="91425" tIns="91425" rIns="91425" bIns="91425" anchor="ctr" anchorCtr="0">
             <a:normAutofit/>
           </a:bodyPr>
           <a:lstStyle>
@@ -4196,15 +4018,19 @@
               <a:defRPr sz="4800"/>
             </a:lvl9pPr>
           </a:lstStyle>
-          <a:p/>
+          <a:p>
+            <a:endParaRPr/>
+          </a:p>
         </p:txBody>
       </p:sp>
       <p:sp>
         <p:nvSpPr>
           <p:cNvPr id="34" name="Google Shape;34;p8"/>
-          <p:cNvSpPr txBox="1"/>
+          <p:cNvSpPr txBox="1">
+            <a:spLocks noGrp="1"/>
+          </p:cNvSpPr>
           <p:nvPr>
-            <p:ph idx="12" type="sldNum"/>
+            <p:ph type="sldNum" idx="12"/>
           </p:nvPr>
         </p:nvSpPr>
         <p:spPr>
@@ -4217,7 +4043,7 @@
           </a:prstGeom>
         </p:spPr>
         <p:txBody>
-          <a:bodyPr anchorCtr="0" anchor="ctr" bIns="91425" lIns="91425" spcFirstLastPara="1" rIns="91425" wrap="square" tIns="91425">
+          <a:bodyPr spcFirstLastPara="1" wrap="square" lIns="91425" tIns="91425" rIns="91425" bIns="91425" anchor="ctr" anchorCtr="0">
             <a:normAutofit/>
           </a:bodyPr>
           <a:lstStyle>
@@ -4259,7 +4085,7 @@
             </a:lvl9pPr>
           </a:lstStyle>
           <a:p>
-            <a:pPr indent="0" lvl="0" marL="0" rtl="0" algn="r">
+            <a:pPr marL="0" lvl="0" indent="0" algn="r" rtl="0">
               <a:spcBef>
                 <a:spcPts val="0"/>
               </a:spcBef>
@@ -4285,11 +4111,11 @@
 </file>
 
 <file path=ppt/slideLayouts/slideLayout8.xml><?xml version="1.0" encoding="utf-8"?>
-<p:sldLayout xmlns:a="http://schemas.openxmlformats.org/drawingml/2006/main" xmlns:r="http://schemas.openxmlformats.org/officeDocument/2006/relationships" xmlns:mc="http://schemas.openxmlformats.org/markup-compatibility/2006" xmlns:mv="urn:schemas-microsoft-com:mac:vml" xmlns:p="http://schemas.openxmlformats.org/presentationml/2006/main" xmlns:c="http://schemas.openxmlformats.org/drawingml/2006/chart" xmlns:dgm="http://schemas.openxmlformats.org/drawingml/2006/diagram" xmlns:o="urn:schemas-microsoft-com:office:office" xmlns:v="urn:schemas-microsoft-com:vml" xmlns:pvml="urn:schemas-microsoft-com:office:powerpoint" xmlns:com="http://schemas.openxmlformats.org/drawingml/2006/compatibility" xmlns:p14="http://schemas.microsoft.com/office/powerpoint/2010/main" xmlns:p15="http://schemas.microsoft.com/office/powerpoint/2012/main" xmlns:ahyp="http://schemas.microsoft.com/office/drawing/2018/hyperlinkcolor" matchingName="Section title and description">
+<p:sldLayout xmlns:a="http://schemas.openxmlformats.org/drawingml/2006/main" xmlns:r="http://schemas.openxmlformats.org/officeDocument/2006/relationships" xmlns:p="http://schemas.openxmlformats.org/presentationml/2006/main" matchingName="Section title and description">
   <p:cSld name="SECTION_TITLE_AND_DESCRIPTION">
     <p:spTree>
       <p:nvGrpSpPr>
-        <p:cNvPr id="35" name="Shape 35"/>
+        <p:cNvPr id="1" name="Shape 35"/>
         <p:cNvGrpSpPr/>
         <p:nvPr/>
       </p:nvGrpSpPr>
@@ -4323,12 +4149,12 @@
           </a:ln>
         </p:spPr>
         <p:txBody>
-          <a:bodyPr anchorCtr="0" anchor="ctr" bIns="91425" lIns="91425" spcFirstLastPara="1" rIns="91425" wrap="square" tIns="91425">
+          <a:bodyPr spcFirstLastPara="1" wrap="square" lIns="91425" tIns="91425" rIns="91425" bIns="91425" anchor="ctr" anchorCtr="0">
             <a:noAutofit/>
           </a:bodyPr>
           <a:lstStyle/>
           <a:p>
-            <a:pPr indent="0" lvl="0" marL="0" rtl="0" algn="l">
+            <a:pPr marL="0" lvl="0" indent="0" algn="l" rtl="0">
               <a:spcBef>
                 <a:spcPts val="0"/>
               </a:spcBef>
@@ -4337,9 +4163,6 @@
               </a:spcAft>
               <a:buNone/>
             </a:pPr>
-            <a:r>
-              <a:t/>
-            </a:r>
             <a:endParaRPr/>
           </a:p>
         </p:txBody>
@@ -4347,7 +4170,9 @@
       <p:sp>
         <p:nvSpPr>
           <p:cNvPr id="37" name="Google Shape;37;p9"/>
-          <p:cNvSpPr txBox="1"/>
+          <p:cNvSpPr txBox="1">
+            <a:spLocks noGrp="1"/>
+          </p:cNvSpPr>
           <p:nvPr>
             <p:ph type="title"/>
           </p:nvPr>
@@ -4362,7 +4187,7 @@
           </a:prstGeom>
         </p:spPr>
         <p:txBody>
-          <a:bodyPr anchorCtr="0" anchor="b" bIns="91425" lIns="91425" spcFirstLastPara="1" rIns="91425" wrap="square" tIns="91425">
+          <a:bodyPr spcFirstLastPara="1" wrap="square" lIns="91425" tIns="91425" rIns="91425" bIns="91425" anchor="b" anchorCtr="0">
             <a:normAutofit/>
           </a:bodyPr>
           <a:lstStyle>
@@ -4466,15 +4291,19 @@
               <a:defRPr sz="4200"/>
             </a:lvl9pPr>
           </a:lstStyle>
-          <a:p/>
+          <a:p>
+            <a:endParaRPr/>
+          </a:p>
         </p:txBody>
       </p:sp>
       <p:sp>
         <p:nvSpPr>
           <p:cNvPr id="38" name="Google Shape;38;p9"/>
-          <p:cNvSpPr txBox="1"/>
+          <p:cNvSpPr txBox="1">
+            <a:spLocks noGrp="1"/>
+          </p:cNvSpPr>
           <p:nvPr>
-            <p:ph idx="1" type="subTitle"/>
+            <p:ph type="subTitle" idx="1"/>
           </p:nvPr>
         </p:nvSpPr>
         <p:spPr>
@@ -4487,7 +4316,7 @@
           </a:prstGeom>
         </p:spPr>
         <p:txBody>
-          <a:bodyPr anchorCtr="0" anchor="t" bIns="91425" lIns="91425" spcFirstLastPara="1" rIns="91425" wrap="square" tIns="91425">
+          <a:bodyPr spcFirstLastPara="1" wrap="square" lIns="91425" tIns="91425" rIns="91425" bIns="91425" anchor="t" anchorCtr="0">
             <a:normAutofit/>
           </a:bodyPr>
           <a:lstStyle>
@@ -4618,15 +4447,19 @@
               <a:defRPr sz="2100"/>
             </a:lvl9pPr>
           </a:lstStyle>
-          <a:p/>
+          <a:p>
+            <a:endParaRPr/>
+          </a:p>
         </p:txBody>
       </p:sp>
       <p:sp>
         <p:nvSpPr>
           <p:cNvPr id="39" name="Google Shape;39;p9"/>
-          <p:cNvSpPr txBox="1"/>
+          <p:cNvSpPr txBox="1">
+            <a:spLocks noGrp="1"/>
+          </p:cNvSpPr>
           <p:nvPr>
-            <p:ph idx="2" type="body"/>
+            <p:ph type="body" idx="2"/>
           </p:nvPr>
         </p:nvSpPr>
         <p:spPr>
@@ -4639,11 +4472,11 @@
           </a:prstGeom>
         </p:spPr>
         <p:txBody>
-          <a:bodyPr anchorCtr="0" anchor="ctr" bIns="91425" lIns="91425" spcFirstLastPara="1" rIns="91425" wrap="square" tIns="91425">
+          <a:bodyPr spcFirstLastPara="1" wrap="square" lIns="91425" tIns="91425" rIns="91425" bIns="91425" anchor="ctr" anchorCtr="0">
             <a:normAutofit/>
           </a:bodyPr>
           <a:lstStyle>
-            <a:lvl1pPr indent="-342900" lvl="0" marL="457200">
+            <a:lvl1pPr marL="457200" lvl="0" indent="-342900">
               <a:spcBef>
                 <a:spcPts val="0"/>
               </a:spcBef>
@@ -4654,7 +4487,7 @@
               <a:buChar char="●"/>
               <a:defRPr/>
             </a:lvl1pPr>
-            <a:lvl2pPr indent="-317500" lvl="1" marL="914400">
+            <a:lvl2pPr marL="914400" lvl="1" indent="-317500">
               <a:spcBef>
                 <a:spcPts val="0"/>
               </a:spcBef>
@@ -4665,7 +4498,7 @@
               <a:buChar char="○"/>
               <a:defRPr/>
             </a:lvl2pPr>
-            <a:lvl3pPr indent="-317500" lvl="2" marL="1371600">
+            <a:lvl3pPr marL="1371600" lvl="2" indent="-317500">
               <a:spcBef>
                 <a:spcPts val="0"/>
               </a:spcBef>
@@ -4676,7 +4509,7 @@
               <a:buChar char="■"/>
               <a:defRPr/>
             </a:lvl3pPr>
-            <a:lvl4pPr indent="-317500" lvl="3" marL="1828800">
+            <a:lvl4pPr marL="1828800" lvl="3" indent="-317500">
               <a:spcBef>
                 <a:spcPts val="0"/>
               </a:spcBef>
@@ -4687,7 +4520,7 @@
               <a:buChar char="●"/>
               <a:defRPr/>
             </a:lvl4pPr>
-            <a:lvl5pPr indent="-317500" lvl="4" marL="2286000">
+            <a:lvl5pPr marL="2286000" lvl="4" indent="-317500">
               <a:spcBef>
                 <a:spcPts val="0"/>
               </a:spcBef>
@@ -4698,7 +4531,7 @@
               <a:buChar char="○"/>
               <a:defRPr/>
             </a:lvl5pPr>
-            <a:lvl6pPr indent="-317500" lvl="5" marL="2743200">
+            <a:lvl6pPr marL="2743200" lvl="5" indent="-317500">
               <a:spcBef>
                 <a:spcPts val="0"/>
               </a:spcBef>
@@ -4709,7 +4542,7 @@
               <a:buChar char="■"/>
               <a:defRPr/>
             </a:lvl6pPr>
-            <a:lvl7pPr indent="-317500" lvl="6" marL="3200400">
+            <a:lvl7pPr marL="3200400" lvl="6" indent="-317500">
               <a:spcBef>
                 <a:spcPts val="0"/>
               </a:spcBef>
@@ -4720,7 +4553,7 @@
               <a:buChar char="●"/>
               <a:defRPr/>
             </a:lvl7pPr>
-            <a:lvl8pPr indent="-317500" lvl="7" marL="3657600">
+            <a:lvl8pPr marL="3657600" lvl="7" indent="-317500">
               <a:spcBef>
                 <a:spcPts val="0"/>
               </a:spcBef>
@@ -4731,7 +4564,7 @@
               <a:buChar char="○"/>
               <a:defRPr/>
             </a:lvl8pPr>
-            <a:lvl9pPr indent="-317500" lvl="8" marL="4114800">
+            <a:lvl9pPr marL="4114800" lvl="8" indent="-317500">
               <a:spcBef>
                 <a:spcPts val="0"/>
               </a:spcBef>
@@ -4743,15 +4576,19 @@
               <a:defRPr/>
             </a:lvl9pPr>
           </a:lstStyle>
-          <a:p/>
+          <a:p>
+            <a:endParaRPr/>
+          </a:p>
         </p:txBody>
       </p:sp>
       <p:sp>
         <p:nvSpPr>
           <p:cNvPr id="40" name="Google Shape;40;p9"/>
-          <p:cNvSpPr txBox="1"/>
+          <p:cNvSpPr txBox="1">
+            <a:spLocks noGrp="1"/>
+          </p:cNvSpPr>
           <p:nvPr>
-            <p:ph idx="12" type="sldNum"/>
+            <p:ph type="sldNum" idx="12"/>
           </p:nvPr>
         </p:nvSpPr>
         <p:spPr>
@@ -4764,7 +4601,7 @@
           </a:prstGeom>
         </p:spPr>
         <p:txBody>
-          <a:bodyPr anchorCtr="0" anchor="ctr" bIns="91425" lIns="91425" spcFirstLastPara="1" rIns="91425" wrap="square" tIns="91425">
+          <a:bodyPr spcFirstLastPara="1" wrap="square" lIns="91425" tIns="91425" rIns="91425" bIns="91425" anchor="ctr" anchorCtr="0">
             <a:normAutofit/>
           </a:bodyPr>
           <a:lstStyle>
@@ -4806,7 +4643,7 @@
             </a:lvl9pPr>
           </a:lstStyle>
           <a:p>
-            <a:pPr indent="0" lvl="0" marL="0" rtl="0" algn="r">
+            <a:pPr marL="0" lvl="0" indent="0" algn="r" rtl="0">
               <a:spcBef>
                 <a:spcPts val="0"/>
               </a:spcBef>
@@ -4832,11 +4669,11 @@
 </file>
 
 <file path=ppt/slideLayouts/slideLayout9.xml><?xml version="1.0" encoding="utf-8"?>
-<p:sldLayout xmlns:a="http://schemas.openxmlformats.org/drawingml/2006/main" xmlns:r="http://schemas.openxmlformats.org/officeDocument/2006/relationships" xmlns:mc="http://schemas.openxmlformats.org/markup-compatibility/2006" xmlns:mv="urn:schemas-microsoft-com:mac:vml" xmlns:p="http://schemas.openxmlformats.org/presentationml/2006/main" xmlns:c="http://schemas.openxmlformats.org/drawingml/2006/chart" xmlns:dgm="http://schemas.openxmlformats.org/drawingml/2006/diagram" xmlns:o="urn:schemas-microsoft-com:office:office" xmlns:v="urn:schemas-microsoft-com:vml" xmlns:pvml="urn:schemas-microsoft-com:office:powerpoint" xmlns:com="http://schemas.openxmlformats.org/drawingml/2006/compatibility" xmlns:p14="http://schemas.microsoft.com/office/powerpoint/2010/main" xmlns:p15="http://schemas.microsoft.com/office/powerpoint/2012/main" xmlns:ahyp="http://schemas.microsoft.com/office/drawing/2018/hyperlinkcolor" matchingName="Caption">
+<p:sldLayout xmlns:a="http://schemas.openxmlformats.org/drawingml/2006/main" xmlns:r="http://schemas.openxmlformats.org/officeDocument/2006/relationships" xmlns:p="http://schemas.openxmlformats.org/presentationml/2006/main" matchingName="Caption">
   <p:cSld name="CAPTION_ONLY">
     <p:spTree>
       <p:nvGrpSpPr>
-        <p:cNvPr id="41" name="Shape 41"/>
+        <p:cNvPr id="1" name="Shape 41"/>
         <p:cNvGrpSpPr/>
         <p:nvPr/>
       </p:nvGrpSpPr>
@@ -4851,9 +4688,11 @@
       <p:sp>
         <p:nvSpPr>
           <p:cNvPr id="42" name="Google Shape;42;p10"/>
-          <p:cNvSpPr txBox="1"/>
+          <p:cNvSpPr txBox="1">
+            <a:spLocks noGrp="1"/>
+          </p:cNvSpPr>
           <p:nvPr>
-            <p:ph idx="1" type="body"/>
+            <p:ph type="body" idx="1"/>
           </p:nvPr>
         </p:nvSpPr>
         <p:spPr>
@@ -4866,11 +4705,11 @@
           </a:prstGeom>
         </p:spPr>
         <p:txBody>
-          <a:bodyPr anchorCtr="0" anchor="ctr" bIns="91425" lIns="91425" spcFirstLastPara="1" rIns="91425" wrap="square" tIns="91425">
+          <a:bodyPr spcFirstLastPara="1" wrap="square" lIns="91425" tIns="91425" rIns="91425" bIns="91425" anchor="ctr" anchorCtr="0">
             <a:normAutofit/>
           </a:bodyPr>
           <a:lstStyle>
-            <a:lvl1pPr indent="-228600" lvl="0" marL="457200">
+            <a:lvl1pPr marL="457200" lvl="0" indent="-228600">
               <a:lnSpc>
                 <a:spcPct val="100000"/>
               </a:lnSpc>
@@ -4885,15 +4724,19 @@
               <a:defRPr/>
             </a:lvl1pPr>
           </a:lstStyle>
-          <a:p/>
+          <a:p>
+            <a:endParaRPr/>
+          </a:p>
         </p:txBody>
       </p:sp>
       <p:sp>
         <p:nvSpPr>
           <p:cNvPr id="43" name="Google Shape;43;p10"/>
-          <p:cNvSpPr txBox="1"/>
+          <p:cNvSpPr txBox="1">
+            <a:spLocks noGrp="1"/>
+          </p:cNvSpPr>
           <p:nvPr>
-            <p:ph idx="12" type="sldNum"/>
+            <p:ph type="sldNum" idx="12"/>
           </p:nvPr>
         </p:nvSpPr>
         <p:spPr>
@@ -4906,7 +4749,7 @@
           </a:prstGeom>
         </p:spPr>
         <p:txBody>
-          <a:bodyPr anchorCtr="0" anchor="ctr" bIns="91425" lIns="91425" spcFirstLastPara="1" rIns="91425" wrap="square" tIns="91425">
+          <a:bodyPr spcFirstLastPara="1" wrap="square" lIns="91425" tIns="91425" rIns="91425" bIns="91425" anchor="ctr" anchorCtr="0">
             <a:normAutofit/>
           </a:bodyPr>
           <a:lstStyle>
@@ -4948,7 +4791,7 @@
             </a:lvl9pPr>
           </a:lstStyle>
           <a:p>
-            <a:pPr indent="0" lvl="0" marL="0" rtl="0" algn="r">
+            <a:pPr marL="0" lvl="0" indent="0" algn="r" rtl="0">
               <a:spcBef>
                 <a:spcPts val="0"/>
               </a:spcBef>
@@ -4974,18 +4817,19 @@
 </file>
 
 <file path=ppt/slideMasters/slideMaster1.xml><?xml version="1.0" encoding="utf-8"?>
-<p:sldMaster xmlns:a="http://schemas.openxmlformats.org/drawingml/2006/main" xmlns:r="http://schemas.openxmlformats.org/officeDocument/2006/relationships" xmlns:mc="http://schemas.openxmlformats.org/markup-compatibility/2006" xmlns:mv="urn:schemas-microsoft-com:mac:vml" xmlns:p="http://schemas.openxmlformats.org/presentationml/2006/main" xmlns:c="http://schemas.openxmlformats.org/drawingml/2006/chart" xmlns:dgm="http://schemas.openxmlformats.org/drawingml/2006/diagram" xmlns:o="urn:schemas-microsoft-com:office:office" xmlns:v="urn:schemas-microsoft-com:vml" xmlns:pvml="urn:schemas-microsoft-com:office:powerpoint" xmlns:com="http://schemas.openxmlformats.org/drawingml/2006/compatibility" xmlns:p14="http://schemas.microsoft.com/office/powerpoint/2010/main" xmlns:p15="http://schemas.microsoft.com/office/powerpoint/2012/main" xmlns:ahyp="http://schemas.microsoft.com/office/drawing/2018/hyperlinkcolor">
+<p:sldMaster xmlns:a="http://schemas.openxmlformats.org/drawingml/2006/main" xmlns:r="http://schemas.openxmlformats.org/officeDocument/2006/relationships" xmlns:p="http://schemas.openxmlformats.org/presentationml/2006/main">
   <p:cSld name="simple-light-2">
     <p:bg>
       <p:bgPr>
         <a:solidFill>
           <a:schemeClr val="lt1"/>
         </a:solidFill>
+        <a:effectLst/>
       </p:bgPr>
     </p:bg>
     <p:spTree>
       <p:nvGrpSpPr>
-        <p:cNvPr id="5" name="Shape 5"/>
+        <p:cNvPr id="1" name="Shape 5"/>
         <p:cNvGrpSpPr/>
         <p:nvPr/>
       </p:nvGrpSpPr>
@@ -5000,7 +4844,9 @@
       <p:sp>
         <p:nvSpPr>
           <p:cNvPr id="6" name="Google Shape;6;p1"/>
-          <p:cNvSpPr txBox="1"/>
+          <p:cNvSpPr txBox="1">
+            <a:spLocks noGrp="1"/>
+          </p:cNvSpPr>
           <p:nvPr>
             <p:ph type="title"/>
           </p:nvPr>
@@ -5019,7 +4865,7 @@
           </a:ln>
         </p:spPr>
         <p:txBody>
-          <a:bodyPr anchorCtr="0" anchor="t" bIns="91425" lIns="91425" spcFirstLastPara="1" rIns="91425" wrap="square" tIns="91425">
+          <a:bodyPr spcFirstLastPara="1" wrap="square" lIns="91425" tIns="91425" rIns="91425" bIns="91425" anchor="t" anchorCtr="0">
             <a:normAutofit/>
           </a:bodyPr>
           <a:lstStyle>
@@ -5186,15 +5032,19 @@
               </a:defRPr>
             </a:lvl9pPr>
           </a:lstStyle>
-          <a:p/>
+          <a:p>
+            <a:endParaRPr/>
+          </a:p>
         </p:txBody>
       </p:sp>
       <p:sp>
         <p:nvSpPr>
           <p:cNvPr id="7" name="Google Shape;7;p1"/>
-          <p:cNvSpPr txBox="1"/>
+          <p:cNvSpPr txBox="1">
+            <a:spLocks noGrp="1"/>
+          </p:cNvSpPr>
           <p:nvPr>
-            <p:ph idx="1" type="body"/>
+            <p:ph type="body" idx="1"/>
           </p:nvPr>
         </p:nvSpPr>
         <p:spPr>
@@ -5211,11 +5061,11 @@
           </a:ln>
         </p:spPr>
         <p:txBody>
-          <a:bodyPr anchorCtr="0" anchor="t" bIns="91425" lIns="91425" spcFirstLastPara="1" rIns="91425" wrap="square" tIns="91425">
+          <a:bodyPr spcFirstLastPara="1" wrap="square" lIns="91425" tIns="91425" rIns="91425" bIns="91425" anchor="t" anchorCtr="0">
             <a:normAutofit/>
           </a:bodyPr>
           <a:lstStyle>
-            <a:lvl1pPr indent="-342900" lvl="0" marL="457200">
+            <a:lvl1pPr marL="457200" lvl="0" indent="-342900">
               <a:lnSpc>
                 <a:spcPct val="115000"/>
               </a:lnSpc>
@@ -5236,7 +5086,7 @@
                 </a:solidFill>
               </a:defRPr>
             </a:lvl1pPr>
-            <a:lvl2pPr indent="-317500" lvl="1" marL="914400">
+            <a:lvl2pPr marL="914400" lvl="1" indent="-317500">
               <a:lnSpc>
                 <a:spcPct val="115000"/>
               </a:lnSpc>
@@ -5257,7 +5107,7 @@
                 </a:solidFill>
               </a:defRPr>
             </a:lvl2pPr>
-            <a:lvl3pPr indent="-317500" lvl="2" marL="1371600">
+            <a:lvl3pPr marL="1371600" lvl="2" indent="-317500">
               <a:lnSpc>
                 <a:spcPct val="115000"/>
               </a:lnSpc>
@@ -5278,7 +5128,7 @@
                 </a:solidFill>
               </a:defRPr>
             </a:lvl3pPr>
-            <a:lvl4pPr indent="-317500" lvl="3" marL="1828800">
+            <a:lvl4pPr marL="1828800" lvl="3" indent="-317500">
               <a:lnSpc>
                 <a:spcPct val="115000"/>
               </a:lnSpc>
@@ -5299,7 +5149,7 @@
                 </a:solidFill>
               </a:defRPr>
             </a:lvl4pPr>
-            <a:lvl5pPr indent="-317500" lvl="4" marL="2286000">
+            <a:lvl5pPr marL="2286000" lvl="4" indent="-317500">
               <a:lnSpc>
                 <a:spcPct val="115000"/>
               </a:lnSpc>
@@ -5320,7 +5170,7 @@
                 </a:solidFill>
               </a:defRPr>
             </a:lvl5pPr>
-            <a:lvl6pPr indent="-317500" lvl="5" marL="2743200">
+            <a:lvl6pPr marL="2743200" lvl="5" indent="-317500">
               <a:lnSpc>
                 <a:spcPct val="115000"/>
               </a:lnSpc>
@@ -5341,7 +5191,7 @@
                 </a:solidFill>
               </a:defRPr>
             </a:lvl6pPr>
-            <a:lvl7pPr indent="-317500" lvl="6" marL="3200400">
+            <a:lvl7pPr marL="3200400" lvl="6" indent="-317500">
               <a:lnSpc>
                 <a:spcPct val="115000"/>
               </a:lnSpc>
@@ -5362,7 +5212,7 @@
                 </a:solidFill>
               </a:defRPr>
             </a:lvl7pPr>
-            <a:lvl8pPr indent="-317500" lvl="7" marL="3657600">
+            <a:lvl8pPr marL="3657600" lvl="7" indent="-317500">
               <a:lnSpc>
                 <a:spcPct val="115000"/>
               </a:lnSpc>
@@ -5383,7 +5233,7 @@
                 </a:solidFill>
               </a:defRPr>
             </a:lvl8pPr>
-            <a:lvl9pPr indent="-317500" lvl="8" marL="4114800">
+            <a:lvl9pPr marL="4114800" lvl="8" indent="-317500">
               <a:lnSpc>
                 <a:spcPct val="115000"/>
               </a:lnSpc>
@@ -5405,15 +5255,19 @@
               </a:defRPr>
             </a:lvl9pPr>
           </a:lstStyle>
-          <a:p/>
+          <a:p>
+            <a:endParaRPr/>
+          </a:p>
         </p:txBody>
       </p:sp>
       <p:sp>
         <p:nvSpPr>
           <p:cNvPr id="8" name="Google Shape;8;p1"/>
-          <p:cNvSpPr txBox="1"/>
+          <p:cNvSpPr txBox="1">
+            <a:spLocks noGrp="1"/>
+          </p:cNvSpPr>
           <p:nvPr>
-            <p:ph idx="12" type="sldNum"/>
+            <p:ph type="sldNum" idx="12"/>
           </p:nvPr>
         </p:nvSpPr>
         <p:spPr>
@@ -5430,7 +5284,7 @@
           </a:ln>
         </p:spPr>
         <p:txBody>
-          <a:bodyPr anchorCtr="0" anchor="ctr" bIns="91425" lIns="91425" spcFirstLastPara="1" rIns="91425" wrap="square" tIns="91425">
+          <a:bodyPr spcFirstLastPara="1" wrap="square" lIns="91425" tIns="91425" rIns="91425" bIns="91425" anchor="ctr" anchorCtr="0">
             <a:normAutofit/>
           </a:bodyPr>
           <a:lstStyle>
@@ -5508,7 +5362,7 @@
             </a:lvl9pPr>
           </a:lstStyle>
           <a:p>
-            <a:pPr indent="0" lvl="0" marL="0" rtl="0" algn="r">
+            <a:pPr marL="0" lvl="0" indent="0" algn="r" rtl="0">
               <a:spcBef>
                 <a:spcPts val="0"/>
               </a:spcBef>
@@ -5527,7 +5381,7 @@
       </p:sp>
     </p:spTree>
   </p:cSld>
-  <p:clrMap accent1="accent1" accent2="accent2" accent3="accent3" accent4="accent4" accent5="accent5" accent6="accent6" bg1="lt1" bg2="dk2" tx1="dk1" tx2="lt2" folHlink="folHlink" hlink="hlink"/>
+  <p:clrMap bg1="lt1" tx1="dk1" bg2="dk2" tx2="lt2" accent1="accent1" accent2="accent2" accent3="accent3" accent4="accent4" accent5="accent5" accent6="accent6" hlink="hlink" folHlink="folHlink"/>
   <p:sldLayoutIdLst>
     <p:sldLayoutId id="2147483648" r:id="rId1"/>
     <p:sldLayoutId id="2147483649" r:id="rId2"/>
@@ -5541,10 +5395,10 @@
     <p:sldLayoutId id="2147483657" r:id="rId10"/>
     <p:sldLayoutId id="2147483658" r:id="rId11"/>
   </p:sldLayoutIdLst>
-  <p:hf dt="0" ftr="0" hdr="0" sldNum="0"/>
+  <p:hf sldNum="0" hdr="0" ftr="0" dt="0"/>
   <p:txStyles>
     <p:titleStyle>
-      <a:defPPr lvl="0" marR="0" rtl="0" algn="l">
+      <a:defPPr marR="0" lvl="0" algn="l" rtl="0">
         <a:lnSpc>
           <a:spcPct val="100000"/>
         </a:lnSpc>
@@ -5555,7 +5409,7 @@
           <a:spcPts val="0"/>
         </a:spcAft>
       </a:defPPr>
-      <a:lvl1pPr lvl="0" marR="0" rtl="0" algn="l">
+      <a:lvl1pPr marR="0" lvl="0" algn="l" rtl="0">
         <a:lnSpc>
           <a:spcPct val="100000"/>
         </a:lnSpc>
@@ -5569,7 +5423,7 @@
           <a:srgbClr val="000000"/>
         </a:buClr>
         <a:buFont typeface="Arial"/>
-        <a:defRPr b="0" i="0" sz="1400" u="none" cap="none" strike="noStrike">
+        <a:defRPr sz="1400" b="0" i="0" u="none" strike="noStrike" cap="none">
           <a:solidFill>
             <a:srgbClr val="000000"/>
           </a:solidFill>
@@ -5579,7 +5433,7 @@
           <a:sym typeface="Arial"/>
         </a:defRPr>
       </a:lvl1pPr>
-      <a:lvl2pPr lvl="1" marR="0" rtl="0" algn="l">
+      <a:lvl2pPr marR="0" lvl="1" algn="l" rtl="0">
         <a:lnSpc>
           <a:spcPct val="100000"/>
         </a:lnSpc>
@@ -5593,7 +5447,7 @@
           <a:srgbClr val="000000"/>
         </a:buClr>
         <a:buFont typeface="Arial"/>
-        <a:defRPr b="0" i="0" sz="1400" u="none" cap="none" strike="noStrike">
+        <a:defRPr sz="1400" b="0" i="0" u="none" strike="noStrike" cap="none">
           <a:solidFill>
             <a:srgbClr val="000000"/>
           </a:solidFill>
@@ -5603,7 +5457,7 @@
           <a:sym typeface="Arial"/>
         </a:defRPr>
       </a:lvl2pPr>
-      <a:lvl3pPr lvl="2" marR="0" rtl="0" algn="l">
+      <a:lvl3pPr marR="0" lvl="2" algn="l" rtl="0">
         <a:lnSpc>
           <a:spcPct val="100000"/>
         </a:lnSpc>
@@ -5617,7 +5471,7 @@
           <a:srgbClr val="000000"/>
         </a:buClr>
         <a:buFont typeface="Arial"/>
-        <a:defRPr b="0" i="0" sz="1400" u="none" cap="none" strike="noStrike">
+        <a:defRPr sz="1400" b="0" i="0" u="none" strike="noStrike" cap="none">
           <a:solidFill>
             <a:srgbClr val="000000"/>
           </a:solidFill>
@@ -5627,7 +5481,7 @@
           <a:sym typeface="Arial"/>
         </a:defRPr>
       </a:lvl3pPr>
-      <a:lvl4pPr lvl="3" marR="0" rtl="0" algn="l">
+      <a:lvl4pPr marR="0" lvl="3" algn="l" rtl="0">
         <a:lnSpc>
           <a:spcPct val="100000"/>
         </a:lnSpc>
@@ -5641,7 +5495,7 @@
           <a:srgbClr val="000000"/>
         </a:buClr>
         <a:buFont typeface="Arial"/>
-        <a:defRPr b="0" i="0" sz="1400" u="none" cap="none" strike="noStrike">
+        <a:defRPr sz="1400" b="0" i="0" u="none" strike="noStrike" cap="none">
           <a:solidFill>
             <a:srgbClr val="000000"/>
           </a:solidFill>
@@ -5651,7 +5505,7 @@
           <a:sym typeface="Arial"/>
         </a:defRPr>
       </a:lvl4pPr>
-      <a:lvl5pPr lvl="4" marR="0" rtl="0" algn="l">
+      <a:lvl5pPr marR="0" lvl="4" algn="l" rtl="0">
         <a:lnSpc>
           <a:spcPct val="100000"/>
         </a:lnSpc>
@@ -5665,7 +5519,7 @@
           <a:srgbClr val="000000"/>
         </a:buClr>
         <a:buFont typeface="Arial"/>
-        <a:defRPr b="0" i="0" sz="1400" u="none" cap="none" strike="noStrike">
+        <a:defRPr sz="1400" b="0" i="0" u="none" strike="noStrike" cap="none">
           <a:solidFill>
             <a:srgbClr val="000000"/>
           </a:solidFill>
@@ -5675,7 +5529,7 @@
           <a:sym typeface="Arial"/>
         </a:defRPr>
       </a:lvl5pPr>
-      <a:lvl6pPr lvl="5" marR="0" rtl="0" algn="l">
+      <a:lvl6pPr marR="0" lvl="5" algn="l" rtl="0">
         <a:lnSpc>
           <a:spcPct val="100000"/>
         </a:lnSpc>
@@ -5689,7 +5543,7 @@
           <a:srgbClr val="000000"/>
         </a:buClr>
         <a:buFont typeface="Arial"/>
-        <a:defRPr b="0" i="0" sz="1400" u="none" cap="none" strike="noStrike">
+        <a:defRPr sz="1400" b="0" i="0" u="none" strike="noStrike" cap="none">
           <a:solidFill>
             <a:srgbClr val="000000"/>
           </a:solidFill>
@@ -5699,7 +5553,7 @@
           <a:sym typeface="Arial"/>
         </a:defRPr>
       </a:lvl6pPr>
-      <a:lvl7pPr lvl="6" marR="0" rtl="0" algn="l">
+      <a:lvl7pPr marR="0" lvl="6" algn="l" rtl="0">
         <a:lnSpc>
           <a:spcPct val="100000"/>
         </a:lnSpc>
@@ -5713,7 +5567,7 @@
           <a:srgbClr val="000000"/>
         </a:buClr>
         <a:buFont typeface="Arial"/>
-        <a:defRPr b="0" i="0" sz="1400" u="none" cap="none" strike="noStrike">
+        <a:defRPr sz="1400" b="0" i="0" u="none" strike="noStrike" cap="none">
           <a:solidFill>
             <a:srgbClr val="000000"/>
           </a:solidFill>
@@ -5723,7 +5577,7 @@
           <a:sym typeface="Arial"/>
         </a:defRPr>
       </a:lvl7pPr>
-      <a:lvl8pPr lvl="7" marR="0" rtl="0" algn="l">
+      <a:lvl8pPr marR="0" lvl="7" algn="l" rtl="0">
         <a:lnSpc>
           <a:spcPct val="100000"/>
         </a:lnSpc>
@@ -5737,7 +5591,7 @@
           <a:srgbClr val="000000"/>
         </a:buClr>
         <a:buFont typeface="Arial"/>
-        <a:defRPr b="0" i="0" sz="1400" u="none" cap="none" strike="noStrike">
+        <a:defRPr sz="1400" b="0" i="0" u="none" strike="noStrike" cap="none">
           <a:solidFill>
             <a:srgbClr val="000000"/>
           </a:solidFill>
@@ -5747,7 +5601,7 @@
           <a:sym typeface="Arial"/>
         </a:defRPr>
       </a:lvl8pPr>
-      <a:lvl9pPr lvl="8" marR="0" rtl="0" algn="l">
+      <a:lvl9pPr marR="0" lvl="8" algn="l" rtl="0">
         <a:lnSpc>
           <a:spcPct val="100000"/>
         </a:lnSpc>
@@ -5761,7 +5615,7 @@
           <a:srgbClr val="000000"/>
         </a:buClr>
         <a:buFont typeface="Arial"/>
-        <a:defRPr b="0" i="0" sz="1400" u="none" cap="none" strike="noStrike">
+        <a:defRPr sz="1400" b="0" i="0" u="none" strike="noStrike" cap="none">
           <a:solidFill>
             <a:srgbClr val="000000"/>
           </a:solidFill>
@@ -5773,7 +5627,7 @@
       </a:lvl9pPr>
     </p:titleStyle>
     <p:bodyStyle>
-      <a:defPPr lvl="0" marR="0" rtl="0" algn="l">
+      <a:defPPr marR="0" lvl="0" algn="l" rtl="0">
         <a:lnSpc>
           <a:spcPct val="100000"/>
         </a:lnSpc>
@@ -5784,7 +5638,7 @@
           <a:spcPts val="0"/>
         </a:spcAft>
       </a:defPPr>
-      <a:lvl1pPr lvl="0" marR="0" rtl="0" algn="l">
+      <a:lvl1pPr marR="0" lvl="0" algn="l" rtl="0">
         <a:lnSpc>
           <a:spcPct val="100000"/>
         </a:lnSpc>
@@ -5798,7 +5652,7 @@
           <a:srgbClr val="000000"/>
         </a:buClr>
         <a:buFont typeface="Arial"/>
-        <a:defRPr b="0" i="0" sz="1400" u="none" cap="none" strike="noStrike">
+        <a:defRPr sz="1400" b="0" i="0" u="none" strike="noStrike" cap="none">
           <a:solidFill>
             <a:srgbClr val="000000"/>
           </a:solidFill>
@@ -5808,7 +5662,7 @@
           <a:sym typeface="Arial"/>
         </a:defRPr>
       </a:lvl1pPr>
-      <a:lvl2pPr lvl="1" marR="0" rtl="0" algn="l">
+      <a:lvl2pPr marR="0" lvl="1" algn="l" rtl="0">
         <a:lnSpc>
           <a:spcPct val="100000"/>
         </a:lnSpc>
@@ -5822,7 +5676,7 @@
           <a:srgbClr val="000000"/>
         </a:buClr>
         <a:buFont typeface="Arial"/>
-        <a:defRPr b="0" i="0" sz="1400" u="none" cap="none" strike="noStrike">
+        <a:defRPr sz="1400" b="0" i="0" u="none" strike="noStrike" cap="none">
           <a:solidFill>
             <a:srgbClr val="000000"/>
           </a:solidFill>
@@ -5832,7 +5686,7 @@
           <a:sym typeface="Arial"/>
         </a:defRPr>
       </a:lvl2pPr>
-      <a:lvl3pPr lvl="2" marR="0" rtl="0" algn="l">
+      <a:lvl3pPr marR="0" lvl="2" algn="l" rtl="0">
         <a:lnSpc>
           <a:spcPct val="100000"/>
         </a:lnSpc>
@@ -5846,7 +5700,7 @@
           <a:srgbClr val="000000"/>
         </a:buClr>
         <a:buFont typeface="Arial"/>
-        <a:defRPr b="0" i="0" sz="1400" u="none" cap="none" strike="noStrike">
+        <a:defRPr sz="1400" b="0" i="0" u="none" strike="noStrike" cap="none">
           <a:solidFill>
             <a:srgbClr val="000000"/>
           </a:solidFill>
@@ -5856,7 +5710,7 @@
           <a:sym typeface="Arial"/>
         </a:defRPr>
       </a:lvl3pPr>
-      <a:lvl4pPr lvl="3" marR="0" rtl="0" algn="l">
+      <a:lvl4pPr marR="0" lvl="3" algn="l" rtl="0">
         <a:lnSpc>
           <a:spcPct val="100000"/>
         </a:lnSpc>
@@ -5870,7 +5724,7 @@
           <a:srgbClr val="000000"/>
         </a:buClr>
         <a:buFont typeface="Arial"/>
-        <a:defRPr b="0" i="0" sz="1400" u="none" cap="none" strike="noStrike">
+        <a:defRPr sz="1400" b="0" i="0" u="none" strike="noStrike" cap="none">
           <a:solidFill>
             <a:srgbClr val="000000"/>
           </a:solidFill>
@@ -5880,7 +5734,7 @@
           <a:sym typeface="Arial"/>
         </a:defRPr>
       </a:lvl4pPr>
-      <a:lvl5pPr lvl="4" marR="0" rtl="0" algn="l">
+      <a:lvl5pPr marR="0" lvl="4" algn="l" rtl="0">
         <a:lnSpc>
           <a:spcPct val="100000"/>
         </a:lnSpc>
@@ -5894,7 +5748,7 @@
           <a:srgbClr val="000000"/>
         </a:buClr>
         <a:buFont typeface="Arial"/>
-        <a:defRPr b="0" i="0" sz="1400" u="none" cap="none" strike="noStrike">
+        <a:defRPr sz="1400" b="0" i="0" u="none" strike="noStrike" cap="none">
           <a:solidFill>
             <a:srgbClr val="000000"/>
           </a:solidFill>
@@ -5904,7 +5758,7 @@
           <a:sym typeface="Arial"/>
         </a:defRPr>
       </a:lvl5pPr>
-      <a:lvl6pPr lvl="5" marR="0" rtl="0" algn="l">
+      <a:lvl6pPr marR="0" lvl="5" algn="l" rtl="0">
         <a:lnSpc>
           <a:spcPct val="100000"/>
         </a:lnSpc>
@@ -5918,7 +5772,7 @@
           <a:srgbClr val="000000"/>
         </a:buClr>
         <a:buFont typeface="Arial"/>
-        <a:defRPr b="0" i="0" sz="1400" u="none" cap="none" strike="noStrike">
+        <a:defRPr sz="1400" b="0" i="0" u="none" strike="noStrike" cap="none">
           <a:solidFill>
             <a:srgbClr val="000000"/>
           </a:solidFill>
@@ -5928,7 +5782,7 @@
           <a:sym typeface="Arial"/>
         </a:defRPr>
       </a:lvl6pPr>
-      <a:lvl7pPr lvl="6" marR="0" rtl="0" algn="l">
+      <a:lvl7pPr marR="0" lvl="6" algn="l" rtl="0">
         <a:lnSpc>
           <a:spcPct val="100000"/>
         </a:lnSpc>
@@ -5942,7 +5796,7 @@
           <a:srgbClr val="000000"/>
         </a:buClr>
         <a:buFont typeface="Arial"/>
-        <a:defRPr b="0" i="0" sz="1400" u="none" cap="none" strike="noStrike">
+        <a:defRPr sz="1400" b="0" i="0" u="none" strike="noStrike" cap="none">
           <a:solidFill>
             <a:srgbClr val="000000"/>
           </a:solidFill>
@@ -5952,7 +5806,7 @@
           <a:sym typeface="Arial"/>
         </a:defRPr>
       </a:lvl7pPr>
-      <a:lvl8pPr lvl="7" marR="0" rtl="0" algn="l">
+      <a:lvl8pPr marR="0" lvl="7" algn="l" rtl="0">
         <a:lnSpc>
           <a:spcPct val="100000"/>
         </a:lnSpc>
@@ -5966,7 +5820,7 @@
           <a:srgbClr val="000000"/>
         </a:buClr>
         <a:buFont typeface="Arial"/>
-        <a:defRPr b="0" i="0" sz="1400" u="none" cap="none" strike="noStrike">
+        <a:defRPr sz="1400" b="0" i="0" u="none" strike="noStrike" cap="none">
           <a:solidFill>
             <a:srgbClr val="000000"/>
           </a:solidFill>
@@ -5976,7 +5830,7 @@
           <a:sym typeface="Arial"/>
         </a:defRPr>
       </a:lvl8pPr>
-      <a:lvl9pPr lvl="8" marR="0" rtl="0" algn="l">
+      <a:lvl9pPr marR="0" lvl="8" algn="l" rtl="0">
         <a:lnSpc>
           <a:spcPct val="100000"/>
         </a:lnSpc>
@@ -5990,7 +5844,7 @@
           <a:srgbClr val="000000"/>
         </a:buClr>
         <a:buFont typeface="Arial"/>
-        <a:defRPr b="0" i="0" sz="1400" u="none" cap="none" strike="noStrike">
+        <a:defRPr sz="1400" b="0" i="0" u="none" strike="noStrike" cap="none">
           <a:solidFill>
             <a:srgbClr val="000000"/>
           </a:solidFill>
@@ -6002,7 +5856,7 @@
       </a:lvl9pPr>
     </p:bodyStyle>
     <p:otherStyle>
-      <a:defPPr lvl="0" marR="0" rtl="0" algn="l">
+      <a:defPPr marR="0" lvl="0" algn="l" rtl="0">
         <a:lnSpc>
           <a:spcPct val="100000"/>
         </a:lnSpc>
@@ -6013,7 +5867,7 @@
           <a:spcPts val="0"/>
         </a:spcAft>
       </a:defPPr>
-      <a:lvl1pPr lvl="0" marR="0" rtl="0" algn="l">
+      <a:lvl1pPr marR="0" lvl="0" algn="l" rtl="0">
         <a:lnSpc>
           <a:spcPct val="100000"/>
         </a:lnSpc>
@@ -6027,7 +5881,7 @@
           <a:srgbClr val="000000"/>
         </a:buClr>
         <a:buFont typeface="Arial"/>
-        <a:defRPr b="0" i="0" sz="1400" u="none" cap="none" strike="noStrike">
+        <a:defRPr sz="1400" b="0" i="0" u="none" strike="noStrike" cap="none">
           <a:solidFill>
             <a:srgbClr val="000000"/>
           </a:solidFill>
@@ -6037,7 +5891,7 @@
           <a:sym typeface="Arial"/>
         </a:defRPr>
       </a:lvl1pPr>
-      <a:lvl2pPr lvl="1" marR="0" rtl="0" algn="l">
+      <a:lvl2pPr marR="0" lvl="1" algn="l" rtl="0">
         <a:lnSpc>
           <a:spcPct val="100000"/>
         </a:lnSpc>
@@ -6051,7 +5905,7 @@
           <a:srgbClr val="000000"/>
         </a:buClr>
         <a:buFont typeface="Arial"/>
-        <a:defRPr b="0" i="0" sz="1400" u="none" cap="none" strike="noStrike">
+        <a:defRPr sz="1400" b="0" i="0" u="none" strike="noStrike" cap="none">
           <a:solidFill>
             <a:srgbClr val="000000"/>
           </a:solidFill>
@@ -6061,7 +5915,7 @@
           <a:sym typeface="Arial"/>
         </a:defRPr>
       </a:lvl2pPr>
-      <a:lvl3pPr lvl="2" marR="0" rtl="0" algn="l">
+      <a:lvl3pPr marR="0" lvl="2" algn="l" rtl="0">
         <a:lnSpc>
           <a:spcPct val="100000"/>
         </a:lnSpc>
@@ -6075,7 +5929,7 @@
           <a:srgbClr val="000000"/>
         </a:buClr>
         <a:buFont typeface="Arial"/>
-        <a:defRPr b="0" i="0" sz="1400" u="none" cap="none" strike="noStrike">
+        <a:defRPr sz="1400" b="0" i="0" u="none" strike="noStrike" cap="none">
           <a:solidFill>
             <a:srgbClr val="000000"/>
           </a:solidFill>
@@ -6085,7 +5939,7 @@
           <a:sym typeface="Arial"/>
         </a:defRPr>
       </a:lvl3pPr>
-      <a:lvl4pPr lvl="3" marR="0" rtl="0" algn="l">
+      <a:lvl4pPr marR="0" lvl="3" algn="l" rtl="0">
         <a:lnSpc>
           <a:spcPct val="100000"/>
         </a:lnSpc>
@@ -6099,7 +5953,7 @@
           <a:srgbClr val="000000"/>
         </a:buClr>
         <a:buFont typeface="Arial"/>
-        <a:defRPr b="0" i="0" sz="1400" u="none" cap="none" strike="noStrike">
+        <a:defRPr sz="1400" b="0" i="0" u="none" strike="noStrike" cap="none">
           <a:solidFill>
             <a:srgbClr val="000000"/>
           </a:solidFill>
@@ -6109,7 +5963,7 @@
           <a:sym typeface="Arial"/>
         </a:defRPr>
       </a:lvl4pPr>
-      <a:lvl5pPr lvl="4" marR="0" rtl="0" algn="l">
+      <a:lvl5pPr marR="0" lvl="4" algn="l" rtl="0">
         <a:lnSpc>
           <a:spcPct val="100000"/>
         </a:lnSpc>
@@ -6123,7 +5977,7 @@
           <a:srgbClr val="000000"/>
         </a:buClr>
         <a:buFont typeface="Arial"/>
-        <a:defRPr b="0" i="0" sz="1400" u="none" cap="none" strike="noStrike">
+        <a:defRPr sz="1400" b="0" i="0" u="none" strike="noStrike" cap="none">
           <a:solidFill>
             <a:srgbClr val="000000"/>
           </a:solidFill>
@@ -6133,7 +5987,7 @@
           <a:sym typeface="Arial"/>
         </a:defRPr>
       </a:lvl5pPr>
-      <a:lvl6pPr lvl="5" marR="0" rtl="0" algn="l">
+      <a:lvl6pPr marR="0" lvl="5" algn="l" rtl="0">
         <a:lnSpc>
           <a:spcPct val="100000"/>
         </a:lnSpc>
@@ -6147,7 +6001,7 @@
           <a:srgbClr val="000000"/>
         </a:buClr>
         <a:buFont typeface="Arial"/>
-        <a:defRPr b="0" i="0" sz="1400" u="none" cap="none" strike="noStrike">
+        <a:defRPr sz="1400" b="0" i="0" u="none" strike="noStrike" cap="none">
           <a:solidFill>
             <a:srgbClr val="000000"/>
           </a:solidFill>
@@ -6157,7 +6011,7 @@
           <a:sym typeface="Arial"/>
         </a:defRPr>
       </a:lvl6pPr>
-      <a:lvl7pPr lvl="6" marR="0" rtl="0" algn="l">
+      <a:lvl7pPr marR="0" lvl="6" algn="l" rtl="0">
         <a:lnSpc>
           <a:spcPct val="100000"/>
         </a:lnSpc>
@@ -6171,7 +6025,7 @@
           <a:srgbClr val="000000"/>
         </a:buClr>
         <a:buFont typeface="Arial"/>
-        <a:defRPr b="0" i="0" sz="1400" u="none" cap="none" strike="noStrike">
+        <a:defRPr sz="1400" b="0" i="0" u="none" strike="noStrike" cap="none">
           <a:solidFill>
             <a:srgbClr val="000000"/>
           </a:solidFill>
@@ -6181,7 +6035,7 @@
           <a:sym typeface="Arial"/>
         </a:defRPr>
       </a:lvl7pPr>
-      <a:lvl8pPr lvl="7" marR="0" rtl="0" algn="l">
+      <a:lvl8pPr marR="0" lvl="7" algn="l" rtl="0">
         <a:lnSpc>
           <a:spcPct val="100000"/>
         </a:lnSpc>
@@ -6195,7 +6049,7 @@
           <a:srgbClr val="000000"/>
         </a:buClr>
         <a:buFont typeface="Arial"/>
-        <a:defRPr b="0" i="0" sz="1400" u="none" cap="none" strike="noStrike">
+        <a:defRPr sz="1400" b="0" i="0" u="none" strike="noStrike" cap="none">
           <a:solidFill>
             <a:srgbClr val="000000"/>
           </a:solidFill>
@@ -6205,7 +6059,7 @@
           <a:sym typeface="Arial"/>
         </a:defRPr>
       </a:lvl8pPr>
-      <a:lvl9pPr lvl="8" marR="0" rtl="0" algn="l">
+      <a:lvl9pPr marR="0" lvl="8" algn="l" rtl="0">
         <a:lnSpc>
           <a:spcPct val="100000"/>
         </a:lnSpc>
@@ -6219,7 +6073,7 @@
           <a:srgbClr val="000000"/>
         </a:buClr>
         <a:buFont typeface="Arial"/>
-        <a:defRPr b="0" i="0" sz="1400" u="none" cap="none" strike="noStrike">
+        <a:defRPr sz="1400" b="0" i="0" u="none" strike="noStrike" cap="none">
           <a:solidFill>
             <a:srgbClr val="000000"/>
           </a:solidFill>
@@ -6235,7 +6089,7 @@
 </file>
 
 <file path=ppt/slides/slide1.xml><?xml version="1.0" encoding="utf-8"?>
-<p:sld xmlns:a="http://schemas.openxmlformats.org/drawingml/2006/main" xmlns:r="http://schemas.openxmlformats.org/officeDocument/2006/relationships" xmlns:mc="http://schemas.openxmlformats.org/markup-compatibility/2006" xmlns:mv="urn:schemas-microsoft-com:mac:vml" xmlns:p="http://schemas.openxmlformats.org/presentationml/2006/main" xmlns:c="http://schemas.openxmlformats.org/drawingml/2006/chart" xmlns:dgm="http://schemas.openxmlformats.org/drawingml/2006/diagram" xmlns:o="urn:schemas-microsoft-com:office:office" xmlns:v="urn:schemas-microsoft-com:vml" xmlns:pvml="urn:schemas-microsoft-com:office:powerpoint" xmlns:com="http://schemas.openxmlformats.org/drawingml/2006/compatibility" xmlns:p14="http://schemas.microsoft.com/office/powerpoint/2010/main" xmlns:p15="http://schemas.microsoft.com/office/powerpoint/2012/main" xmlns:ahyp="http://schemas.microsoft.com/office/drawing/2018/hyperlinkcolor">
+<p:sld xmlns:a="http://schemas.openxmlformats.org/drawingml/2006/main" xmlns:r="http://schemas.openxmlformats.org/officeDocument/2006/relationships" xmlns:p="http://schemas.openxmlformats.org/presentationml/2006/main">
   <p:cSld>
     <p:bg>
       <p:bgPr>
@@ -6247,11 +6101,12 @@
             <a:fillRect/>
           </a:stretch>
         </a:blipFill>
+        <a:effectLst/>
       </p:bgPr>
     </p:bg>
     <p:spTree>
       <p:nvGrpSpPr>
-        <p:cNvPr id="53" name="Shape 53"/>
+        <p:cNvPr id="1" name="Shape 53"/>
         <p:cNvGrpSpPr/>
         <p:nvPr/>
       </p:nvGrpSpPr>
@@ -6266,7 +6121,9 @@
       <p:sp>
         <p:nvSpPr>
           <p:cNvPr id="54" name="Google Shape;54;p13"/>
-          <p:cNvSpPr txBox="1"/>
+          <p:cNvSpPr txBox="1">
+            <a:spLocks noGrp="1"/>
+          </p:cNvSpPr>
           <p:nvPr>
             <p:ph type="ctrTitle"/>
           </p:nvPr>
@@ -6281,12 +6138,12 @@
           </a:prstGeom>
         </p:spPr>
         <p:txBody>
-          <a:bodyPr anchorCtr="0" anchor="b" bIns="91425" lIns="91425" spcFirstLastPara="1" rIns="91425" wrap="square" tIns="91425">
+          <a:bodyPr spcFirstLastPara="1" wrap="square" lIns="91425" tIns="91425" rIns="91425" bIns="91425" anchor="b" anchorCtr="0">
             <a:normAutofit/>
           </a:bodyPr>
           <a:lstStyle/>
           <a:p>
-            <a:pPr indent="0" lvl="0" marL="0" rtl="0" algn="ctr">
+            <a:pPr marL="0" lvl="0" indent="0" algn="ctr" rtl="0">
               <a:spcBef>
                 <a:spcPts val="0"/>
               </a:spcBef>
@@ -6314,9 +6171,11 @@
       <p:sp>
         <p:nvSpPr>
           <p:cNvPr id="55" name="Google Shape;55;p13"/>
-          <p:cNvSpPr txBox="1"/>
+          <p:cNvSpPr txBox="1">
+            <a:spLocks noGrp="1"/>
+          </p:cNvSpPr>
           <p:nvPr>
-            <p:ph idx="1" type="subTitle"/>
+            <p:ph type="subTitle" idx="1"/>
           </p:nvPr>
         </p:nvSpPr>
         <p:spPr>
@@ -6329,12 +6188,12 @@
           </a:prstGeom>
         </p:spPr>
         <p:txBody>
-          <a:bodyPr anchorCtr="0" anchor="t" bIns="91425" lIns="91425" spcFirstLastPara="1" rIns="91425" wrap="square" tIns="91425">
+          <a:bodyPr spcFirstLastPara="1" wrap="square" lIns="91425" tIns="91425" rIns="91425" bIns="91425" anchor="t" anchorCtr="0">
             <a:normAutofit/>
           </a:bodyPr>
           <a:lstStyle/>
           <a:p>
-            <a:pPr indent="0" lvl="0" marL="0" rtl="0" algn="ctr">
+            <a:pPr marL="0" lvl="0" indent="0" algn="ctr" rtl="0">
               <a:spcBef>
                 <a:spcPts val="0"/>
               </a:spcBef>
@@ -6368,7 +6227,7 @@
 </file>
 
 <file path=ppt/slides/slide2.xml><?xml version="1.0" encoding="utf-8"?>
-<p:sld xmlns:a="http://schemas.openxmlformats.org/drawingml/2006/main" xmlns:r="http://schemas.openxmlformats.org/officeDocument/2006/relationships" xmlns:mc="http://schemas.openxmlformats.org/markup-compatibility/2006" xmlns:mv="urn:schemas-microsoft-com:mac:vml" xmlns:p="http://schemas.openxmlformats.org/presentationml/2006/main" xmlns:c="http://schemas.openxmlformats.org/drawingml/2006/chart" xmlns:dgm="http://schemas.openxmlformats.org/drawingml/2006/diagram" xmlns:o="urn:schemas-microsoft-com:office:office" xmlns:v="urn:schemas-microsoft-com:vml" xmlns:pvml="urn:schemas-microsoft-com:office:powerpoint" xmlns:com="http://schemas.openxmlformats.org/drawingml/2006/compatibility" xmlns:p14="http://schemas.microsoft.com/office/powerpoint/2010/main" xmlns:p15="http://schemas.microsoft.com/office/powerpoint/2012/main" xmlns:ahyp="http://schemas.microsoft.com/office/drawing/2018/hyperlinkcolor">
+<p:sld xmlns:a="http://schemas.openxmlformats.org/drawingml/2006/main" xmlns:r="http://schemas.openxmlformats.org/officeDocument/2006/relationships" xmlns:p="http://schemas.openxmlformats.org/presentationml/2006/main">
   <p:cSld>
     <p:bg>
       <p:bgPr>
@@ -6380,11 +6239,12 @@
             <a:fillRect/>
           </a:stretch>
         </a:blipFill>
+        <a:effectLst/>
       </p:bgPr>
     </p:bg>
     <p:spTree>
       <p:nvGrpSpPr>
-        <p:cNvPr id="59" name="Shape 59"/>
+        <p:cNvPr id="1" name="Shape 59"/>
         <p:cNvGrpSpPr/>
         <p:nvPr/>
       </p:nvGrpSpPr>
@@ -6399,7 +6259,9 @@
       <p:sp>
         <p:nvSpPr>
           <p:cNvPr id="60" name="Google Shape;60;p14"/>
-          <p:cNvSpPr txBox="1"/>
+          <p:cNvSpPr txBox="1">
+            <a:spLocks noGrp="1"/>
+          </p:cNvSpPr>
           <p:nvPr>
             <p:ph type="title"/>
           </p:nvPr>
@@ -6414,12 +6276,12 @@
           </a:prstGeom>
         </p:spPr>
         <p:txBody>
-          <a:bodyPr anchorCtr="0" anchor="t" bIns="91425" lIns="91425" spcFirstLastPara="1" rIns="91425" wrap="square" tIns="91425">
+          <a:bodyPr spcFirstLastPara="1" wrap="square" lIns="91425" tIns="91425" rIns="91425" bIns="91425" anchor="t" anchorCtr="0">
             <a:normAutofit fontScale="90000"/>
           </a:bodyPr>
           <a:lstStyle/>
           <a:p>
-            <a:pPr indent="0" lvl="0" marL="0" rtl="0" algn="l">
+            <a:pPr marL="0" lvl="0" indent="0" algn="l" rtl="0">
               <a:spcBef>
                 <a:spcPts val="0"/>
               </a:spcBef>
@@ -6439,9 +6301,11 @@
       <p:sp>
         <p:nvSpPr>
           <p:cNvPr id="61" name="Google Shape;61;p14"/>
-          <p:cNvSpPr txBox="1"/>
+          <p:cNvSpPr txBox="1">
+            <a:spLocks noGrp="1"/>
+          </p:cNvSpPr>
           <p:nvPr>
-            <p:ph idx="1" type="body"/>
+            <p:ph type="body" idx="1"/>
           </p:nvPr>
         </p:nvSpPr>
         <p:spPr>
@@ -6454,12 +6318,12 @@
           </a:prstGeom>
         </p:spPr>
         <p:txBody>
-          <a:bodyPr anchorCtr="0" anchor="t" bIns="91425" lIns="91425" spcFirstLastPara="1" rIns="91425" wrap="square" tIns="91425">
+          <a:bodyPr spcFirstLastPara="1" wrap="square" lIns="91425" tIns="91425" rIns="91425" bIns="91425" anchor="t" anchorCtr="0">
             <a:normAutofit/>
           </a:bodyPr>
           <a:lstStyle/>
           <a:p>
-            <a:pPr indent="0" lvl="0" marL="0" rtl="0" algn="l">
+            <a:pPr marL="0" lvl="0" indent="0" algn="l" rtl="0">
               <a:spcBef>
                 <a:spcPts val="0"/>
               </a:spcBef>
@@ -6469,17 +6333,13 @@
               <a:buNone/>
             </a:pPr>
             <a:r>
-              <a:rPr lang="en"/>
-              <a:t>Objective: Compare </a:t>
+              <a:rPr lang="en" dirty="0"/>
+              <a:t>Objective: Compare salaries of job listings based on if AWS is listed as a requirement in the description to see if knowing AWS pays more than jobs without AWS in the description</a:t>
             </a:r>
-            <a:r>
-              <a:rPr lang="en"/>
-              <a:t>salaries of job listings based on if AWS is listed as a requirement in the description to see if knowing AWS pays more than jobs without AWS in the description</a:t>
-            </a:r>
-            <a:endParaRPr/>
-          </a:p>
-          <a:p>
-            <a:pPr indent="-342900" lvl="0" marL="457200" rtl="0" algn="l">
+            <a:endParaRPr dirty="0"/>
+          </a:p>
+          <a:p>
+            <a:pPr marL="457200" lvl="0" indent="-342900" algn="l" rtl="0">
               <a:spcBef>
                 <a:spcPts val="1200"/>
               </a:spcBef>
@@ -6490,43 +6350,26 @@
               <a:buChar char="-"/>
             </a:pPr>
             <a:r>
-              <a:rPr lang="en"/>
-              <a:t>Compared to all tech job listings in 2017 on Glassdoor</a:t>
+              <a:rPr lang="en" dirty="0"/>
+              <a:t>Compared to all data science job listings in 2017 on Glassdoor</a:t>
             </a:r>
-            <a:endParaRPr/>
-          </a:p>
-          <a:p>
-            <a:pPr indent="-342900" lvl="0" marL="457200" rtl="0" algn="l">
-              <a:spcBef>
-                <a:spcPts val="0"/>
-              </a:spcBef>
-              <a:spcAft>
-                <a:spcPts val="0"/>
-              </a:spcAft>
-              <a:buSzPts val="1800"/>
-              <a:buChar char="-"/>
+            <a:endParaRPr dirty="0"/>
+          </a:p>
+          <a:p>
+            <a:pPr marL="0" lvl="0" indent="0" algn="l" rtl="0">
+              <a:spcBef>
+                <a:spcPts val="1200"/>
+              </a:spcBef>
+              <a:spcAft>
+                <a:spcPts val="1200"/>
+              </a:spcAft>
+              <a:buNone/>
             </a:pPr>
             <a:r>
-              <a:rPr lang="en"/>
-              <a:t>Compared to data science related job listings in 2017 on Glassdoor</a:t>
-            </a:r>
-            <a:endParaRPr/>
-          </a:p>
-          <a:p>
-            <a:pPr indent="0" lvl="0" marL="0" rtl="0" algn="l">
-              <a:spcBef>
-                <a:spcPts val="1200"/>
-              </a:spcBef>
-              <a:spcAft>
-                <a:spcPts val="1200"/>
-              </a:spcAft>
-              <a:buNone/>
-            </a:pPr>
-            <a:r>
-              <a:rPr lang="en"/>
+              <a:rPr lang="en" dirty="0"/>
               <a:t>Goal: Create a dashboard in QuickSight to visualize our findings</a:t>
             </a:r>
-            <a:endParaRPr/>
+            <a:endParaRPr dirty="0"/>
           </a:p>
         </p:txBody>
       </p:sp>
@@ -6539,7 +6382,7 @@
 </file>
 
 <file path=ppt/slides/slide3.xml><?xml version="1.0" encoding="utf-8"?>
-<p:sld xmlns:a="http://schemas.openxmlformats.org/drawingml/2006/main" xmlns:r="http://schemas.openxmlformats.org/officeDocument/2006/relationships" xmlns:mc="http://schemas.openxmlformats.org/markup-compatibility/2006" xmlns:mv="urn:schemas-microsoft-com:mac:vml" xmlns:p="http://schemas.openxmlformats.org/presentationml/2006/main" xmlns:c="http://schemas.openxmlformats.org/drawingml/2006/chart" xmlns:dgm="http://schemas.openxmlformats.org/drawingml/2006/diagram" xmlns:o="urn:schemas-microsoft-com:office:office" xmlns:v="urn:schemas-microsoft-com:vml" xmlns:pvml="urn:schemas-microsoft-com:office:powerpoint" xmlns:com="http://schemas.openxmlformats.org/drawingml/2006/compatibility" xmlns:p14="http://schemas.microsoft.com/office/powerpoint/2010/main" xmlns:p15="http://schemas.microsoft.com/office/powerpoint/2012/main" xmlns:ahyp="http://schemas.microsoft.com/office/drawing/2018/hyperlinkcolor">
+<p:sld xmlns:a="http://schemas.openxmlformats.org/drawingml/2006/main" xmlns:r="http://schemas.openxmlformats.org/officeDocument/2006/relationships" xmlns:p="http://schemas.openxmlformats.org/presentationml/2006/main">
   <p:cSld>
     <p:bg>
       <p:bgPr>
@@ -6551,11 +6394,12 @@
             <a:fillRect/>
           </a:stretch>
         </a:blipFill>
+        <a:effectLst/>
       </p:bgPr>
     </p:bg>
     <p:spTree>
       <p:nvGrpSpPr>
-        <p:cNvPr id="65" name="Shape 65"/>
+        <p:cNvPr id="1" name="Shape 65"/>
         <p:cNvGrpSpPr/>
         <p:nvPr/>
       </p:nvGrpSpPr>
@@ -6570,7 +6414,9 @@
       <p:sp>
         <p:nvSpPr>
           <p:cNvPr id="66" name="Google Shape;66;p15"/>
-          <p:cNvSpPr txBox="1"/>
+          <p:cNvSpPr txBox="1">
+            <a:spLocks noGrp="1"/>
+          </p:cNvSpPr>
           <p:nvPr>
             <p:ph type="title"/>
           </p:nvPr>
@@ -6585,12 +6431,12 @@
           </a:prstGeom>
         </p:spPr>
         <p:txBody>
-          <a:bodyPr anchorCtr="0" anchor="t" bIns="91425" lIns="91425" spcFirstLastPara="1" rIns="91425" wrap="square" tIns="91425">
+          <a:bodyPr spcFirstLastPara="1" wrap="square" lIns="91425" tIns="91425" rIns="91425" bIns="91425" anchor="t" anchorCtr="0">
             <a:normAutofit fontScale="90000"/>
           </a:bodyPr>
           <a:lstStyle/>
           <a:p>
-            <a:pPr indent="0" lvl="0" marL="0" rtl="0" algn="l">
+            <a:pPr marL="0" lvl="0" indent="0" algn="l" rtl="0">
               <a:spcBef>
                 <a:spcPts val="0"/>
               </a:spcBef>
@@ -6610,9 +6456,11 @@
       <p:sp>
         <p:nvSpPr>
           <p:cNvPr id="67" name="Google Shape;67;p15"/>
-          <p:cNvSpPr txBox="1"/>
+          <p:cNvSpPr txBox="1">
+            <a:spLocks noGrp="1"/>
+          </p:cNvSpPr>
           <p:nvPr>
-            <p:ph idx="1" type="body"/>
+            <p:ph type="body" idx="1"/>
           </p:nvPr>
         </p:nvSpPr>
         <p:spPr>
@@ -6625,12 +6473,12 @@
           </a:prstGeom>
         </p:spPr>
         <p:txBody>
-          <a:bodyPr anchorCtr="0" anchor="t" bIns="91425" lIns="91425" spcFirstLastPara="1" rIns="91425" wrap="square" tIns="91425">
-            <a:normAutofit fontScale="55000" lnSpcReduction="20000"/>
+          <a:bodyPr spcFirstLastPara="1" wrap="square" lIns="91425" tIns="91425" rIns="91425" bIns="91425" anchor="t" anchorCtr="0">
+            <a:normAutofit fontScale="47500" lnSpcReduction="20000"/>
           </a:bodyPr>
           <a:lstStyle/>
           <a:p>
-            <a:pPr indent="0" lvl="0" marL="0" rtl="0" algn="l">
+            <a:pPr marL="0" lvl="0" indent="0" algn="l" rtl="0">
               <a:spcBef>
                 <a:spcPts val="0"/>
               </a:spcBef>
@@ -6639,13 +6487,10 @@
               </a:spcAft>
               <a:buNone/>
             </a:pPr>
-            <a:r>
-              <a:t/>
-            </a:r>
             <a:endParaRPr/>
           </a:p>
           <a:p>
-            <a:pPr indent="0" lvl="0" marL="0" rtl="0" algn="l">
+            <a:pPr marL="0" lvl="0" indent="0" algn="l" rtl="0">
               <a:spcBef>
                 <a:spcPts val="1200"/>
               </a:spcBef>
@@ -6654,13 +6499,10 @@
               </a:spcAft>
               <a:buNone/>
             </a:pPr>
-            <a:r>
-              <a:t/>
-            </a:r>
             <a:endParaRPr/>
           </a:p>
           <a:p>
-            <a:pPr indent="0" lvl="0" marL="0" rtl="0" algn="l">
+            <a:pPr marL="0" lvl="0" indent="0" algn="l" rtl="0">
               <a:spcBef>
                 <a:spcPts val="1200"/>
               </a:spcBef>
@@ -6669,13 +6511,10 @@
               </a:spcAft>
               <a:buNone/>
             </a:pPr>
-            <a:r>
-              <a:t/>
-            </a:r>
             <a:endParaRPr/>
           </a:p>
           <a:p>
-            <a:pPr indent="0" lvl="0" marL="0" rtl="0" algn="l">
+            <a:pPr marL="0" lvl="0" indent="0" algn="l" rtl="0">
               <a:spcBef>
                 <a:spcPts val="1200"/>
               </a:spcBef>
@@ -6684,13 +6523,10 @@
               </a:spcAft>
               <a:buNone/>
             </a:pPr>
-            <a:r>
-              <a:t/>
-            </a:r>
             <a:endParaRPr/>
           </a:p>
           <a:p>
-            <a:pPr indent="0" lvl="0" marL="0" rtl="0" algn="l">
+            <a:pPr marL="0" lvl="0" indent="0" algn="l" rtl="0">
               <a:spcBef>
                 <a:spcPts val="1200"/>
               </a:spcBef>
@@ -6699,13 +6535,10 @@
               </a:spcAft>
               <a:buNone/>
             </a:pPr>
-            <a:r>
-              <a:t/>
-            </a:r>
             <a:endParaRPr/>
           </a:p>
           <a:p>
-            <a:pPr indent="0" lvl="0" marL="0" rtl="0" algn="l">
+            <a:pPr marL="0" lvl="0" indent="0" algn="l" rtl="0">
               <a:spcBef>
                 <a:spcPts val="1200"/>
               </a:spcBef>
@@ -6714,13 +6547,10 @@
               </a:spcAft>
               <a:buNone/>
             </a:pPr>
-            <a:r>
-              <a:t/>
-            </a:r>
             <a:endParaRPr/>
           </a:p>
           <a:p>
-            <a:pPr indent="0" lvl="0" marL="0" rtl="0" algn="l">
+            <a:pPr marL="0" lvl="0" indent="0" algn="l" rtl="0">
               <a:spcBef>
                 <a:spcPts val="1200"/>
               </a:spcBef>
@@ -6729,13 +6559,10 @@
               </a:spcAft>
               <a:buNone/>
             </a:pPr>
-            <a:r>
-              <a:t/>
-            </a:r>
             <a:endParaRPr/>
           </a:p>
           <a:p>
-            <a:pPr indent="0" lvl="0" marL="0" rtl="0" algn="l">
+            <a:pPr marL="0" lvl="0" indent="0" algn="l" rtl="0">
               <a:spcBef>
                 <a:spcPts val="1200"/>
               </a:spcBef>
@@ -6744,13 +6571,10 @@
               </a:spcAft>
               <a:buNone/>
             </a:pPr>
-            <a:r>
-              <a:t/>
-            </a:r>
             <a:endParaRPr/>
           </a:p>
           <a:p>
-            <a:pPr indent="0" lvl="0" marL="0" rtl="0" algn="l">
+            <a:pPr marL="0" lvl="0" indent="0" algn="l" rtl="0">
               <a:spcBef>
                 <a:spcPts val="1200"/>
               </a:spcBef>
@@ -6759,13 +6583,10 @@
               </a:spcAft>
               <a:buNone/>
             </a:pPr>
-            <a:r>
-              <a:t/>
-            </a:r>
             <a:endParaRPr/>
           </a:p>
           <a:p>
-            <a:pPr indent="0" lvl="0" marL="0" rtl="0" algn="l">
+            <a:pPr marL="0" lvl="0" indent="0" algn="l" rtl="0">
               <a:spcBef>
                 <a:spcPts val="1200"/>
               </a:spcBef>
@@ -6774,13 +6595,10 @@
               </a:spcAft>
               <a:buNone/>
             </a:pPr>
-            <a:r>
-              <a:t/>
-            </a:r>
             <a:endParaRPr/>
           </a:p>
           <a:p>
-            <a:pPr indent="0" lvl="0" marL="0" rtl="0" algn="l">
+            <a:pPr marL="0" lvl="0" indent="0" algn="l" rtl="0">
               <a:spcBef>
                 <a:spcPts val="1200"/>
               </a:spcBef>
@@ -6789,13 +6607,10 @@
               </a:spcAft>
               <a:buNone/>
             </a:pPr>
-            <a:r>
-              <a:t/>
-            </a:r>
             <a:endParaRPr/>
           </a:p>
           <a:p>
-            <a:pPr indent="0" lvl="0" marL="0" rtl="0" algn="l">
+            <a:pPr marL="0" lvl="0" indent="0" algn="l" rtl="0">
               <a:spcBef>
                 <a:spcPts val="1200"/>
               </a:spcBef>
@@ -6804,13 +6619,10 @@
               </a:spcAft>
               <a:buNone/>
             </a:pPr>
-            <a:r>
-              <a:t/>
-            </a:r>
             <a:endParaRPr/>
           </a:p>
           <a:p>
-            <a:pPr indent="0" lvl="0" marL="0" rtl="0" algn="l">
+            <a:pPr marL="0" lvl="0" indent="0" algn="l" rtl="0">
               <a:spcBef>
                 <a:spcPts val="1200"/>
               </a:spcBef>
@@ -6831,7 +6643,7 @@
                 <a:hlinkClick r:id="rId4">
                   <a:extLst>
                     <a:ext uri="{A12FA001-AC4F-418D-AE19-62706E023703}">
-                      <ahyp:hlinkClr val="tx"/>
+                      <ahyp:hlinkClr xmlns:ahyp="http://schemas.microsoft.com/office/drawing/2018/hyperlinkcolor" val="tx"/>
                     </a:ext>
                   </a:extLst>
                 </a:hlinkClick>
@@ -6841,7 +6653,7 @@
             <a:endParaRPr sz="1821"/>
           </a:p>
           <a:p>
-            <a:pPr indent="0" lvl="0" marL="0" rtl="0" algn="l">
+            <a:pPr marL="0" lvl="0" indent="0" algn="l" rtl="0">
               <a:spcBef>
                 <a:spcPts val="1200"/>
               </a:spcBef>
@@ -6896,7 +6708,7 @@
           <a:blip r:embed="rId6">
             <a:alphaModFix/>
           </a:blip>
-          <a:srcRect b="0" l="0" r="25412" t="0"/>
+          <a:srcRect r="25412"/>
           <a:stretch/>
         </p:blipFill>
         <p:spPr>
@@ -6956,23 +6768,23 @@
             <a:avLst/>
           </a:prstGeom>
           <a:noFill/>
-          <a:ln cap="flat" cmpd="sng" w="28575">
+          <a:ln w="28575" cap="flat" cmpd="sng">
             <a:solidFill>
               <a:srgbClr val="FF9900"/>
             </a:solidFill>
             <a:prstDash val="solid"/>
             <a:round/>
-            <a:headEnd len="sm" w="sm" type="none"/>
-            <a:tailEnd len="sm" w="sm" type="none"/>
+            <a:headEnd type="none" w="sm" len="sm"/>
+            <a:tailEnd type="none" w="sm" len="sm"/>
           </a:ln>
         </p:spPr>
         <p:txBody>
-          <a:bodyPr anchorCtr="0" anchor="ctr" bIns="91425" lIns="91425" spcFirstLastPara="1" rIns="91425" wrap="square" tIns="91425">
+          <a:bodyPr spcFirstLastPara="1" wrap="square" lIns="91425" tIns="91425" rIns="91425" bIns="91425" anchor="ctr" anchorCtr="0">
             <a:noAutofit/>
           </a:bodyPr>
           <a:lstStyle/>
           <a:p>
-            <a:pPr indent="0" lvl="0" marL="0" rtl="0" algn="ctr">
+            <a:pPr marL="0" lvl="0" indent="0" algn="ctr" rtl="0">
               <a:spcBef>
                 <a:spcPts val="0"/>
               </a:spcBef>
@@ -6981,9 +6793,6 @@
               </a:spcAft>
               <a:buNone/>
             </a:pPr>
-            <a:r>
-              <a:t/>
-            </a:r>
             <a:endParaRPr/>
           </a:p>
         </p:txBody>
@@ -7003,23 +6812,23 @@
             <a:avLst/>
           </a:prstGeom>
           <a:noFill/>
-          <a:ln cap="flat" cmpd="sng" w="28575">
+          <a:ln w="28575" cap="flat" cmpd="sng">
             <a:solidFill>
               <a:srgbClr val="FF9900"/>
             </a:solidFill>
             <a:prstDash val="solid"/>
             <a:round/>
-            <a:headEnd len="sm" w="sm" type="none"/>
-            <a:tailEnd len="sm" w="sm" type="none"/>
+            <a:headEnd type="none" w="sm" len="sm"/>
+            <a:tailEnd type="none" w="sm" len="sm"/>
           </a:ln>
         </p:spPr>
         <p:txBody>
-          <a:bodyPr anchorCtr="0" anchor="ctr" bIns="91425" lIns="91425" spcFirstLastPara="1" rIns="91425" wrap="square" tIns="91425">
+          <a:bodyPr spcFirstLastPara="1" wrap="square" lIns="91425" tIns="91425" rIns="91425" bIns="91425" anchor="ctr" anchorCtr="0">
             <a:noAutofit/>
           </a:bodyPr>
           <a:lstStyle/>
           <a:p>
-            <a:pPr indent="0" lvl="0" marL="0" rtl="0" algn="ctr">
+            <a:pPr marL="0" lvl="0" indent="0" algn="ctr" rtl="0">
               <a:spcBef>
                 <a:spcPts val="0"/>
               </a:spcBef>
@@ -7028,9 +6837,6 @@
               </a:spcAft>
               <a:buNone/>
             </a:pPr>
-            <a:r>
-              <a:t/>
-            </a:r>
             <a:endParaRPr/>
           </a:p>
         </p:txBody>
@@ -7044,7 +6850,7 @@
 </file>
 
 <file path=ppt/slides/slide4.xml><?xml version="1.0" encoding="utf-8"?>
-<p:sld xmlns:a="http://schemas.openxmlformats.org/drawingml/2006/main" xmlns:r="http://schemas.openxmlformats.org/officeDocument/2006/relationships" xmlns:mc="http://schemas.openxmlformats.org/markup-compatibility/2006" xmlns:mv="urn:schemas-microsoft-com:mac:vml" xmlns:p="http://schemas.openxmlformats.org/presentationml/2006/main" xmlns:c="http://schemas.openxmlformats.org/drawingml/2006/chart" xmlns:dgm="http://schemas.openxmlformats.org/drawingml/2006/diagram" xmlns:o="urn:schemas-microsoft-com:office:office" xmlns:v="urn:schemas-microsoft-com:vml" xmlns:pvml="urn:schemas-microsoft-com:office:powerpoint" xmlns:com="http://schemas.openxmlformats.org/drawingml/2006/compatibility" xmlns:p14="http://schemas.microsoft.com/office/powerpoint/2010/main" xmlns:p15="http://schemas.microsoft.com/office/powerpoint/2012/main" xmlns:ahyp="http://schemas.microsoft.com/office/drawing/2018/hyperlinkcolor">
+<p:sld xmlns:a="http://schemas.openxmlformats.org/drawingml/2006/main" xmlns:r="http://schemas.openxmlformats.org/officeDocument/2006/relationships" xmlns:p="http://schemas.openxmlformats.org/presentationml/2006/main">
   <p:cSld>
     <p:bg>
       <p:bgPr>
@@ -7056,11 +6862,12 @@
             <a:fillRect/>
           </a:stretch>
         </a:blipFill>
+        <a:effectLst/>
       </p:bgPr>
     </p:bg>
     <p:spTree>
       <p:nvGrpSpPr>
-        <p:cNvPr id="76" name="Shape 76"/>
+        <p:cNvPr id="1" name="Shape 76"/>
         <p:cNvGrpSpPr/>
         <p:nvPr/>
       </p:nvGrpSpPr>
@@ -7075,7 +6882,9 @@
       <p:sp>
         <p:nvSpPr>
           <p:cNvPr id="77" name="Google Shape;77;p16"/>
-          <p:cNvSpPr txBox="1"/>
+          <p:cNvSpPr txBox="1">
+            <a:spLocks noGrp="1"/>
+          </p:cNvSpPr>
           <p:nvPr>
             <p:ph type="title"/>
           </p:nvPr>
@@ -7090,12 +6899,12 @@
           </a:prstGeom>
         </p:spPr>
         <p:txBody>
-          <a:bodyPr anchorCtr="0" anchor="t" bIns="91425" lIns="91425" spcFirstLastPara="1" rIns="91425" wrap="square" tIns="91425">
+          <a:bodyPr spcFirstLastPara="1" wrap="square" lIns="91425" tIns="91425" rIns="91425" bIns="91425" anchor="t" anchorCtr="0">
             <a:normAutofit fontScale="90000"/>
           </a:bodyPr>
           <a:lstStyle/>
           <a:p>
-            <a:pPr indent="0" lvl="0" marL="0" rtl="0" algn="l">
+            <a:pPr marL="0" lvl="0" indent="0" algn="l" rtl="0">
               <a:spcBef>
                 <a:spcPts val="0"/>
               </a:spcBef>
@@ -7115,9 +6924,11 @@
       <p:sp>
         <p:nvSpPr>
           <p:cNvPr id="78" name="Google Shape;78;p16"/>
-          <p:cNvSpPr txBox="1"/>
+          <p:cNvSpPr txBox="1">
+            <a:spLocks noGrp="1"/>
+          </p:cNvSpPr>
           <p:nvPr>
-            <p:ph idx="1" type="body"/>
+            <p:ph type="body" idx="1"/>
           </p:nvPr>
         </p:nvSpPr>
         <p:spPr>
@@ -7130,12 +6941,12 @@
           </a:prstGeom>
         </p:spPr>
         <p:txBody>
-          <a:bodyPr anchorCtr="0" anchor="t" bIns="91425" lIns="91425" spcFirstLastPara="1" rIns="91425" wrap="square" tIns="91425">
+          <a:bodyPr spcFirstLastPara="1" wrap="square" lIns="91425" tIns="91425" rIns="91425" bIns="91425" anchor="t" anchorCtr="0">
             <a:normAutofit/>
           </a:bodyPr>
           <a:lstStyle/>
           <a:p>
-            <a:pPr indent="-342900" lvl="0" marL="457200" rtl="0" algn="l">
+            <a:pPr marL="457200" lvl="0" indent="-342900" algn="l" rtl="0">
               <a:spcBef>
                 <a:spcPts val="0"/>
               </a:spcBef>
@@ -7146,13 +6957,13 @@
               <a:buChar char="-"/>
             </a:pPr>
             <a:r>
-              <a:rPr lang="en"/>
+              <a:rPr lang="en" dirty="0"/>
               <a:t>S3 Bucket</a:t>
             </a:r>
-            <a:endParaRPr/>
-          </a:p>
-          <a:p>
-            <a:pPr indent="-317500" lvl="1" marL="914400" rtl="0" algn="l">
+            <a:endParaRPr dirty="0"/>
+          </a:p>
+          <a:p>
+            <a:pPr marL="914400" lvl="1" indent="-317500" algn="l" rtl="0">
               <a:spcBef>
                 <a:spcPts val="0"/>
               </a:spcBef>
@@ -7163,13 +6974,13 @@
               <a:buChar char="-"/>
             </a:pPr>
             <a:r>
-              <a:rPr lang="en"/>
+              <a:rPr lang="en" dirty="0"/>
               <a:t>Store data in buckets</a:t>
             </a:r>
-            <a:endParaRPr/>
-          </a:p>
-          <a:p>
-            <a:pPr indent="-317500" lvl="1" marL="914400" rtl="0" algn="l">
+            <a:endParaRPr dirty="0"/>
+          </a:p>
+          <a:p>
+            <a:pPr marL="914400" lvl="1" indent="-317500" algn="l" rtl="0">
               <a:spcBef>
                 <a:spcPts val="0"/>
               </a:spcBef>
@@ -7180,13 +6991,13 @@
               <a:buChar char="-"/>
             </a:pPr>
             <a:r>
-              <a:rPr lang="en"/>
+              <a:rPr lang="en" dirty="0"/>
               <a:t>Create static website to display findings in one place</a:t>
             </a:r>
-            <a:endParaRPr/>
-          </a:p>
-          <a:p>
-            <a:pPr indent="-342900" lvl="0" marL="457200" rtl="0" algn="l">
+            <a:endParaRPr dirty="0"/>
+          </a:p>
+          <a:p>
+            <a:pPr marL="457200" lvl="0" indent="-342900" algn="l" rtl="0">
               <a:spcBef>
                 <a:spcPts val="0"/>
               </a:spcBef>
@@ -7197,13 +7008,13 @@
               <a:buChar char="-"/>
             </a:pPr>
             <a:r>
-              <a:rPr lang="en"/>
+              <a:rPr lang="en" dirty="0"/>
               <a:t>VPC</a:t>
             </a:r>
-            <a:endParaRPr/>
-          </a:p>
-          <a:p>
-            <a:pPr indent="-317500" lvl="1" marL="914400" rtl="0" algn="l">
+            <a:endParaRPr dirty="0"/>
+          </a:p>
+          <a:p>
+            <a:pPr marL="914400" lvl="1" indent="-317500" algn="l" rtl="0">
               <a:spcBef>
                 <a:spcPts val="0"/>
               </a:spcBef>
@@ -7214,13 +7025,13 @@
               <a:buChar char="-"/>
             </a:pPr>
             <a:r>
-              <a:rPr lang="en"/>
+              <a:rPr lang="en" dirty="0"/>
               <a:t>Create internet gateways, subnets, and routing tables for EC2 instances</a:t>
             </a:r>
-            <a:endParaRPr/>
-          </a:p>
-          <a:p>
-            <a:pPr indent="-342900" lvl="0" marL="457200" rtl="0" algn="l">
+            <a:endParaRPr dirty="0"/>
+          </a:p>
+          <a:p>
+            <a:pPr marL="457200" lvl="0" indent="-342900" algn="l" rtl="0">
               <a:spcBef>
                 <a:spcPts val="0"/>
               </a:spcBef>
@@ -7231,13 +7042,13 @@
               <a:buChar char="-"/>
             </a:pPr>
             <a:r>
-              <a:rPr lang="en"/>
+              <a:rPr lang="en" dirty="0"/>
               <a:t>EC2</a:t>
             </a:r>
-            <a:endParaRPr/>
-          </a:p>
-          <a:p>
-            <a:pPr indent="-317500" lvl="1" marL="914400" rtl="0" algn="l">
+            <a:endParaRPr dirty="0"/>
+          </a:p>
+          <a:p>
+            <a:pPr marL="914400" lvl="1" indent="-317500" algn="l" rtl="0">
               <a:spcBef>
                 <a:spcPts val="0"/>
               </a:spcBef>
@@ -7248,13 +7059,13 @@
               <a:buChar char="-"/>
             </a:pPr>
             <a:r>
-              <a:rPr lang="en"/>
+              <a:rPr lang="en" dirty="0"/>
               <a:t>Create instances from computing sources in the cloud</a:t>
             </a:r>
-            <a:endParaRPr/>
-          </a:p>
-          <a:p>
-            <a:pPr indent="-317500" lvl="1" marL="914400" rtl="0" algn="l">
+            <a:endParaRPr dirty="0"/>
+          </a:p>
+          <a:p>
+            <a:pPr marL="914400" lvl="1" indent="-317500" algn="l" rtl="0">
               <a:spcBef>
                 <a:spcPts val="0"/>
               </a:spcBef>
@@ -7265,13 +7076,21 @@
               <a:buChar char="-"/>
             </a:pPr>
             <a:r>
-              <a:rPr lang="en"/>
-              <a:t>Run a Jupyter Notebook or Python file to preprocess data</a:t>
+              <a:rPr lang="en" dirty="0"/>
+              <a:t>Run a </a:t>
             </a:r>
-            <a:endParaRPr/>
-          </a:p>
-          <a:p>
-            <a:pPr indent="-342900" lvl="0" marL="457200" rtl="0" algn="l">
+            <a:r>
+              <a:rPr lang="en" dirty="0" err="1"/>
+              <a:t>Jupyter</a:t>
+            </a:r>
+            <a:r>
+              <a:rPr lang="en" dirty="0"/>
+              <a:t> Notebook or Python file to preprocess data</a:t>
+            </a:r>
+            <a:endParaRPr dirty="0"/>
+          </a:p>
+          <a:p>
+            <a:pPr marL="457200" lvl="0" indent="-342900" algn="l" rtl="0">
               <a:spcBef>
                 <a:spcPts val="0"/>
               </a:spcBef>
@@ -7282,13 +7101,13 @@
               <a:buChar char="-"/>
             </a:pPr>
             <a:r>
-              <a:rPr lang="en"/>
+              <a:rPr lang="en" dirty="0" err="1"/>
               <a:t>QuickSight</a:t>
             </a:r>
-            <a:endParaRPr/>
-          </a:p>
-          <a:p>
-            <a:pPr indent="-317500" lvl="1" marL="914400" rtl="0" algn="l">
+            <a:endParaRPr dirty="0"/>
+          </a:p>
+          <a:p>
+            <a:pPr marL="914400" lvl="1" indent="-317500" algn="l" rtl="0">
               <a:spcBef>
                 <a:spcPts val="0"/>
               </a:spcBef>
@@ -7299,13 +7118,13 @@
               <a:buChar char="-"/>
             </a:pPr>
             <a:r>
-              <a:rPr lang="en"/>
+              <a:rPr lang="en" dirty="0"/>
               <a:t>Connect with data from S3 bucket to create dashboards</a:t>
             </a:r>
-            <a:endParaRPr/>
-          </a:p>
-          <a:p>
-            <a:pPr indent="-317500" lvl="1" marL="914400" rtl="0" algn="l">
+            <a:endParaRPr dirty="0"/>
+          </a:p>
+          <a:p>
+            <a:pPr marL="914400" lvl="1" indent="-317500" algn="l" rtl="0">
               <a:spcBef>
                 <a:spcPts val="0"/>
               </a:spcBef>
@@ -7316,10 +7135,10 @@
               <a:buChar char="-"/>
             </a:pPr>
             <a:r>
-              <a:rPr lang="en"/>
+              <a:rPr lang="en" dirty="0"/>
               <a:t>Create histogram to show the distribution of salaries</a:t>
             </a:r>
-            <a:endParaRPr/>
+            <a:endParaRPr dirty="0"/>
           </a:p>
         </p:txBody>
       </p:sp>
@@ -7332,7 +7151,7 @@
 </file>
 
 <file path=ppt/slides/slide5.xml><?xml version="1.0" encoding="utf-8"?>
-<p:sld xmlns:a="http://schemas.openxmlformats.org/drawingml/2006/main" xmlns:r="http://schemas.openxmlformats.org/officeDocument/2006/relationships" xmlns:mc="http://schemas.openxmlformats.org/markup-compatibility/2006" xmlns:mv="urn:schemas-microsoft-com:mac:vml" xmlns:p="http://schemas.openxmlformats.org/presentationml/2006/main" xmlns:c="http://schemas.openxmlformats.org/drawingml/2006/chart" xmlns:dgm="http://schemas.openxmlformats.org/drawingml/2006/diagram" xmlns:o="urn:schemas-microsoft-com:office:office" xmlns:v="urn:schemas-microsoft-com:vml" xmlns:pvml="urn:schemas-microsoft-com:office:powerpoint" xmlns:com="http://schemas.openxmlformats.org/drawingml/2006/compatibility" xmlns:p14="http://schemas.microsoft.com/office/powerpoint/2010/main" xmlns:p15="http://schemas.microsoft.com/office/powerpoint/2012/main" xmlns:ahyp="http://schemas.microsoft.com/office/drawing/2018/hyperlinkcolor">
+<p:sld xmlns:a="http://schemas.openxmlformats.org/drawingml/2006/main" xmlns:r="http://schemas.openxmlformats.org/officeDocument/2006/relationships" xmlns:p="http://schemas.openxmlformats.org/presentationml/2006/main">
   <p:cSld>
     <p:bg>
       <p:bgPr>
@@ -7344,11 +7163,12 @@
             <a:fillRect/>
           </a:stretch>
         </a:blipFill>
+        <a:effectLst/>
       </p:bgPr>
     </p:bg>
     <p:spTree>
       <p:nvGrpSpPr>
-        <p:cNvPr id="82" name="Shape 82"/>
+        <p:cNvPr id="1" name="Shape 82"/>
         <p:cNvGrpSpPr/>
         <p:nvPr/>
       </p:nvGrpSpPr>
@@ -7363,7 +7183,9 @@
       <p:sp>
         <p:nvSpPr>
           <p:cNvPr id="83" name="Google Shape;83;p17"/>
-          <p:cNvSpPr txBox="1"/>
+          <p:cNvSpPr txBox="1">
+            <a:spLocks noGrp="1"/>
+          </p:cNvSpPr>
           <p:nvPr>
             <p:ph type="title"/>
           </p:nvPr>
@@ -7378,12 +7200,12 @@
           </a:prstGeom>
         </p:spPr>
         <p:txBody>
-          <a:bodyPr anchorCtr="0" anchor="t" bIns="91425" lIns="91425" spcFirstLastPara="1" rIns="91425" wrap="square" tIns="91425">
+          <a:bodyPr spcFirstLastPara="1" wrap="square" lIns="91425" tIns="91425" rIns="91425" bIns="91425" anchor="t" anchorCtr="0">
             <a:normAutofit fontScale="90000"/>
           </a:bodyPr>
           <a:lstStyle/>
           <a:p>
-            <a:pPr indent="0" lvl="0" marL="0" rtl="0" algn="l">
+            <a:pPr marL="0" lvl="0" indent="0" algn="l" rtl="0">
               <a:spcBef>
                 <a:spcPts val="0"/>
               </a:spcBef>
@@ -7394,7 +7216,7 @@
             </a:pPr>
             <a:r>
               <a:rPr lang="en"/>
-              <a:t>Project Architecture and Data Flow</a:t>
+              <a:t>Project Architecture</a:t>
             </a:r>
             <a:endParaRPr/>
           </a:p>
@@ -7420,12 +7242,12 @@
           </a:ln>
         </p:spPr>
         <p:txBody>
-          <a:bodyPr anchorCtr="0" anchor="t" bIns="91425" lIns="91425" spcFirstLastPara="1" rIns="91425" wrap="square" tIns="91425">
+          <a:bodyPr spcFirstLastPara="1" wrap="square" lIns="91425" tIns="91425" rIns="91425" bIns="91425" anchor="t" anchorCtr="0">
             <a:noAutofit/>
           </a:bodyPr>
           <a:lstStyle/>
           <a:p>
-            <a:pPr indent="0" lvl="0" marL="0" rtl="0" algn="ctr">
+            <a:pPr marL="0" lvl="0" indent="0" algn="ctr" rtl="0">
               <a:spcBef>
                 <a:spcPts val="0"/>
               </a:spcBef>
@@ -7449,7 +7271,7 @@
             </a:endParaRPr>
           </a:p>
           <a:p>
-            <a:pPr indent="0" lvl="0" marL="0" rtl="0" algn="ctr">
+            <a:pPr marL="0" lvl="0" indent="0" algn="ctr" rtl="0">
               <a:spcBef>
                 <a:spcPts val="0"/>
               </a:spcBef>
@@ -7492,20 +7314,20 @@
             <a:avLst/>
           </a:prstGeom>
           <a:noFill/>
-          <a:ln cap="flat" cmpd="sng" w="9525">
+          <a:ln w="9525" cap="flat" cmpd="sng">
             <a:solidFill>
               <a:schemeClr val="dk2"/>
             </a:solidFill>
             <a:prstDash val="solid"/>
             <a:round/>
-            <a:headEnd len="med" w="med" type="none"/>
-            <a:tailEnd len="med" w="med" type="triangle"/>
+            <a:headEnd type="none" w="med" len="med"/>
+            <a:tailEnd type="triangle" w="med" len="med"/>
           </a:ln>
         </p:spPr>
       </p:cxnSp>
       <p:sp>
         <p:nvSpPr>
-          <p:cNvPr id="87" name="Google Shape;87;p17"/>
+          <p:cNvPr id="88" name="Google Shape;88;p17"/>
           <p:cNvSpPr txBox="1"/>
           <p:nvPr/>
         </p:nvSpPr>
@@ -7523,12 +7345,12 @@
           </a:ln>
         </p:spPr>
         <p:txBody>
-          <a:bodyPr anchorCtr="0" anchor="t" bIns="91425" lIns="91425" spcFirstLastPara="1" rIns="91425" wrap="square" tIns="91425">
+          <a:bodyPr spcFirstLastPara="1" wrap="square" lIns="91425" tIns="91425" rIns="91425" bIns="91425" anchor="t" anchorCtr="0">
             <a:noAutofit/>
           </a:bodyPr>
           <a:lstStyle/>
           <a:p>
-            <a:pPr indent="0" lvl="0" marL="0" rtl="0" algn="ctr">
+            <a:pPr marL="0" lvl="0" indent="0" algn="ctr" rtl="0">
               <a:spcBef>
                 <a:spcPts val="0"/>
               </a:spcBef>
@@ -7555,10 +7377,10 @@
       </p:sp>
       <p:cxnSp>
         <p:nvCxnSpPr>
-          <p:cNvPr id="88" name="Google Shape;88;p17"/>
+          <p:cNvPr id="89" name="Google Shape;89;p17"/>
           <p:cNvCxnSpPr>
             <a:stCxn id="86" idx="4"/>
-            <a:endCxn id="87" idx="1"/>
+            <a:endCxn id="88" idx="1"/>
           </p:cNvCxnSpPr>
           <p:nvPr/>
         </p:nvCxnSpPr>
@@ -7571,20 +7393,20 @@
             <a:avLst/>
           </a:prstGeom>
           <a:noFill/>
-          <a:ln cap="flat" cmpd="sng" w="9525">
+          <a:ln w="9525" cap="flat" cmpd="sng">
             <a:solidFill>
               <a:schemeClr val="dk2"/>
             </a:solidFill>
             <a:prstDash val="solid"/>
             <a:round/>
-            <a:headEnd len="med" w="med" type="none"/>
-            <a:tailEnd len="med" w="med" type="triangle"/>
+            <a:headEnd type="none" w="med" len="med"/>
+            <a:tailEnd type="triangle" w="med" len="med"/>
           </a:ln>
         </p:spPr>
       </p:cxnSp>
       <p:sp>
         <p:nvSpPr>
-          <p:cNvPr id="89" name="Google Shape;89;p17"/>
+          <p:cNvPr id="90" name="Google Shape;90;p17"/>
           <p:cNvSpPr/>
           <p:nvPr/>
         </p:nvSpPr>
@@ -7599,23 +7421,23 @@
           <a:solidFill>
             <a:schemeClr val="lt2"/>
           </a:solidFill>
-          <a:ln cap="flat" cmpd="sng" w="9525">
+          <a:ln w="9525" cap="flat" cmpd="sng">
             <a:solidFill>
               <a:schemeClr val="dk2"/>
             </a:solidFill>
             <a:prstDash val="solid"/>
             <a:round/>
-            <a:headEnd len="sm" w="sm" type="none"/>
-            <a:tailEnd len="sm" w="sm" type="none"/>
+            <a:headEnd type="none" w="sm" len="sm"/>
+            <a:tailEnd type="none" w="sm" len="sm"/>
           </a:ln>
         </p:spPr>
         <p:txBody>
-          <a:bodyPr anchorCtr="0" anchor="ctr" bIns="91425" lIns="91425" spcFirstLastPara="1" rIns="91425" wrap="square" tIns="91425">
+          <a:bodyPr spcFirstLastPara="1" wrap="square" lIns="91425" tIns="91425" rIns="91425" bIns="91425" anchor="ctr" anchorCtr="0">
             <a:noAutofit/>
           </a:bodyPr>
           <a:lstStyle/>
           <a:p>
-            <a:pPr indent="0" lvl="0" marL="0" rtl="0" algn="ctr">
+            <a:pPr marL="0" lvl="0" indent="0" algn="ctr" rtl="0">
               <a:spcBef>
                 <a:spcPts val="0"/>
               </a:spcBef>
@@ -7624,13 +7446,10 @@
               </a:spcAft>
               <a:buNone/>
             </a:pPr>
-            <a:r>
-              <a:t/>
-            </a:r>
             <a:endParaRPr/>
           </a:p>
           <a:p>
-            <a:pPr indent="0" lvl="0" marL="0" rtl="0" algn="ctr">
+            <a:pPr marL="0" lvl="0" indent="0" algn="ctr" rtl="0">
               <a:spcBef>
                 <a:spcPts val="0"/>
               </a:spcBef>
@@ -7639,13 +7458,10 @@
               </a:spcAft>
               <a:buNone/>
             </a:pPr>
-            <a:r>
-              <a:t/>
-            </a:r>
             <a:endParaRPr/>
           </a:p>
           <a:p>
-            <a:pPr indent="0" lvl="0" marL="0" rtl="0" algn="ctr">
+            <a:pPr marL="0" lvl="0" indent="0" algn="ctr" rtl="0">
               <a:spcBef>
                 <a:spcPts val="0"/>
               </a:spcBef>
@@ -7654,13 +7470,10 @@
               </a:spcAft>
               <a:buNone/>
             </a:pPr>
-            <a:r>
-              <a:t/>
-            </a:r>
             <a:endParaRPr/>
           </a:p>
           <a:p>
-            <a:pPr indent="0" lvl="0" marL="0" rtl="0" algn="ctr">
+            <a:pPr marL="0" lvl="0" indent="0" algn="ctr" rtl="0">
               <a:spcBef>
                 <a:spcPts val="0"/>
               </a:spcBef>
@@ -7669,13 +7482,10 @@
               </a:spcAft>
               <a:buNone/>
             </a:pPr>
-            <a:r>
-              <a:t/>
-            </a:r>
             <a:endParaRPr/>
           </a:p>
           <a:p>
-            <a:pPr indent="0" lvl="0" marL="0" rtl="0" algn="ctr">
+            <a:pPr marL="0" lvl="0" indent="0" algn="ctr" rtl="0">
               <a:spcBef>
                 <a:spcPts val="0"/>
               </a:spcBef>
@@ -7684,13 +7494,10 @@
               </a:spcAft>
               <a:buNone/>
             </a:pPr>
-            <a:r>
-              <a:t/>
-            </a:r>
             <a:endParaRPr/>
           </a:p>
           <a:p>
-            <a:pPr indent="0" lvl="0" marL="0" rtl="0" algn="ctr">
+            <a:pPr marL="0" lvl="0" indent="0" algn="ctr" rtl="0">
               <a:spcBef>
                 <a:spcPts val="0"/>
               </a:spcBef>
@@ -7699,13 +7506,10 @@
               </a:spcAft>
               <a:buNone/>
             </a:pPr>
-            <a:r>
-              <a:t/>
-            </a:r>
             <a:endParaRPr/>
           </a:p>
           <a:p>
-            <a:pPr indent="0" lvl="0" marL="0" rtl="0" algn="ctr">
+            <a:pPr marL="0" lvl="0" indent="0" algn="ctr" rtl="0">
               <a:spcBef>
                 <a:spcPts val="0"/>
               </a:spcBef>
@@ -7739,23 +7543,23 @@
           <a:solidFill>
             <a:schemeClr val="accent4"/>
           </a:solidFill>
-          <a:ln cap="flat" cmpd="sng" w="9525">
+          <a:ln w="9525" cap="flat" cmpd="sng">
             <a:solidFill>
               <a:schemeClr val="dk2"/>
             </a:solidFill>
             <a:prstDash val="solid"/>
             <a:round/>
-            <a:headEnd len="sm" w="sm" type="none"/>
-            <a:tailEnd len="sm" w="sm" type="none"/>
+            <a:headEnd type="none" w="sm" len="sm"/>
+            <a:tailEnd type="none" w="sm" len="sm"/>
           </a:ln>
         </p:spPr>
         <p:txBody>
-          <a:bodyPr anchorCtr="0" anchor="ctr" bIns="91425" lIns="91425" spcFirstLastPara="1" rIns="91425" wrap="square" tIns="91425">
+          <a:bodyPr spcFirstLastPara="1" wrap="square" lIns="91425" tIns="91425" rIns="91425" bIns="91425" anchor="ctr" anchorCtr="0">
             <a:noAutofit/>
           </a:bodyPr>
           <a:lstStyle/>
           <a:p>
-            <a:pPr indent="0" lvl="0" marL="0" rtl="0" algn="ctr">
+            <a:pPr marL="0" lvl="0" indent="0" algn="ctr" rtl="0">
               <a:spcBef>
                 <a:spcPts val="0"/>
               </a:spcBef>
@@ -7782,7 +7586,7 @@
       </p:sp>
       <p:sp>
         <p:nvSpPr>
-          <p:cNvPr id="90" name="Google Shape;90;p17"/>
+          <p:cNvPr id="91" name="Google Shape;91;p17"/>
           <p:cNvSpPr/>
           <p:nvPr/>
         </p:nvSpPr>
@@ -7797,23 +7601,23 @@
           <a:solidFill>
             <a:schemeClr val="lt2"/>
           </a:solidFill>
-          <a:ln cap="flat" cmpd="sng" w="9525">
+          <a:ln w="9525" cap="flat" cmpd="sng">
             <a:solidFill>
               <a:schemeClr val="dk2"/>
             </a:solidFill>
             <a:prstDash val="solid"/>
             <a:round/>
-            <a:headEnd len="sm" w="sm" type="none"/>
-            <a:tailEnd len="sm" w="sm" type="none"/>
+            <a:headEnd type="none" w="sm" len="sm"/>
+            <a:tailEnd type="none" w="sm" len="sm"/>
           </a:ln>
         </p:spPr>
         <p:txBody>
-          <a:bodyPr anchorCtr="0" anchor="ctr" bIns="91425" lIns="91425" spcFirstLastPara="1" rIns="91425" wrap="square" tIns="91425">
+          <a:bodyPr spcFirstLastPara="1" wrap="square" lIns="91425" tIns="91425" rIns="91425" bIns="91425" anchor="ctr" anchorCtr="0">
             <a:noAutofit/>
           </a:bodyPr>
           <a:lstStyle/>
           <a:p>
-            <a:pPr indent="0" lvl="0" marL="0" rtl="0" algn="ctr">
+            <a:pPr marL="0" lvl="0" indent="0" algn="ctr" rtl="0">
               <a:spcBef>
                 <a:spcPts val="0"/>
               </a:spcBef>
@@ -7822,13 +7626,10 @@
               </a:spcAft>
               <a:buNone/>
             </a:pPr>
-            <a:r>
-              <a:t/>
-            </a:r>
             <a:endParaRPr/>
           </a:p>
           <a:p>
-            <a:pPr indent="0" lvl="0" marL="0" rtl="0" algn="ctr">
+            <a:pPr marL="0" lvl="0" indent="0" algn="ctr" rtl="0">
               <a:spcBef>
                 <a:spcPts val="0"/>
               </a:spcBef>
@@ -7837,13 +7638,10 @@
               </a:spcAft>
               <a:buNone/>
             </a:pPr>
-            <a:r>
-              <a:t/>
-            </a:r>
             <a:endParaRPr/>
           </a:p>
           <a:p>
-            <a:pPr indent="0" lvl="0" marL="0" rtl="0" algn="ctr">
+            <a:pPr marL="0" lvl="0" indent="0" algn="ctr" rtl="0">
               <a:spcBef>
                 <a:spcPts val="0"/>
               </a:spcBef>
@@ -7852,13 +7650,10 @@
               </a:spcAft>
               <a:buNone/>
             </a:pPr>
-            <a:r>
-              <a:t/>
-            </a:r>
             <a:endParaRPr/>
           </a:p>
           <a:p>
-            <a:pPr indent="0" lvl="0" marL="0" rtl="0" algn="ctr">
+            <a:pPr marL="0" lvl="0" indent="0" algn="ctr" rtl="0">
               <a:spcBef>
                 <a:spcPts val="0"/>
               </a:spcBef>
@@ -7867,13 +7662,10 @@
               </a:spcAft>
               <a:buNone/>
             </a:pPr>
-            <a:r>
-              <a:t/>
-            </a:r>
             <a:endParaRPr/>
           </a:p>
           <a:p>
-            <a:pPr indent="0" lvl="0" marL="0" rtl="0" algn="ctr">
+            <a:pPr marL="0" lvl="0" indent="0" algn="ctr" rtl="0">
               <a:spcBef>
                 <a:spcPts val="0"/>
               </a:spcBef>
@@ -7882,13 +7674,10 @@
               </a:spcAft>
               <a:buNone/>
             </a:pPr>
-            <a:r>
-              <a:t/>
-            </a:r>
             <a:endParaRPr/>
           </a:p>
           <a:p>
-            <a:pPr indent="0" lvl="0" marL="0" rtl="0" algn="l">
+            <a:pPr marL="0" lvl="0" indent="0" algn="l" rtl="0">
               <a:spcBef>
                 <a:spcPts val="0"/>
               </a:spcBef>
@@ -7907,7 +7696,7 @@
       </p:sp>
       <p:sp>
         <p:nvSpPr>
-          <p:cNvPr id="91" name="Google Shape;91;p17"/>
+          <p:cNvPr id="92" name="Google Shape;92;p17"/>
           <p:cNvSpPr/>
           <p:nvPr/>
         </p:nvSpPr>
@@ -7918,29 +7707,29 @@
           </a:xfrm>
           <a:prstGeom prst="cube">
             <a:avLst>
-              <a:gd fmla="val 25000" name="adj"/>
+              <a:gd name="adj" fmla="val 25000"/>
             </a:avLst>
           </a:prstGeom>
           <a:solidFill>
             <a:schemeClr val="accent6"/>
           </a:solidFill>
-          <a:ln cap="flat" cmpd="sng" w="9525">
+          <a:ln w="9525" cap="flat" cmpd="sng">
             <a:solidFill>
               <a:schemeClr val="dk2"/>
             </a:solidFill>
             <a:prstDash val="solid"/>
             <a:round/>
-            <a:headEnd len="sm" w="sm" type="none"/>
-            <a:tailEnd len="sm" w="sm" type="none"/>
+            <a:headEnd type="none" w="sm" len="sm"/>
+            <a:tailEnd type="none" w="sm" len="sm"/>
           </a:ln>
         </p:spPr>
         <p:txBody>
-          <a:bodyPr anchorCtr="0" anchor="ctr" bIns="91425" lIns="91425" spcFirstLastPara="1" rIns="91425" wrap="square" tIns="91425">
+          <a:bodyPr spcFirstLastPara="1" wrap="square" lIns="91425" tIns="91425" rIns="91425" bIns="91425" anchor="ctr" anchorCtr="0">
             <a:noAutofit/>
           </a:bodyPr>
           <a:lstStyle/>
           <a:p>
-            <a:pPr indent="0" lvl="0" marL="0" rtl="0" algn="ctr">
+            <a:pPr marL="0" lvl="0" indent="0" algn="ctr" rtl="0">
               <a:spcBef>
                 <a:spcPts val="0"/>
               </a:spcBef>
@@ -7959,7 +7748,7 @@
       </p:sp>
       <p:sp>
         <p:nvSpPr>
-          <p:cNvPr id="92" name="Google Shape;92;p17"/>
+          <p:cNvPr id="93" name="Google Shape;93;p17"/>
           <p:cNvSpPr/>
           <p:nvPr/>
         </p:nvSpPr>
@@ -7974,23 +7763,23 @@
           <a:solidFill>
             <a:schemeClr val="lt2"/>
           </a:solidFill>
-          <a:ln cap="flat" cmpd="sng" w="9525">
+          <a:ln w="9525" cap="flat" cmpd="sng">
             <a:solidFill>
               <a:schemeClr val="dk2"/>
             </a:solidFill>
             <a:prstDash val="solid"/>
             <a:round/>
-            <a:headEnd len="sm" w="sm" type="none"/>
-            <a:tailEnd len="sm" w="sm" type="none"/>
+            <a:headEnd type="none" w="sm" len="sm"/>
+            <a:tailEnd type="none" w="sm" len="sm"/>
           </a:ln>
         </p:spPr>
         <p:txBody>
-          <a:bodyPr anchorCtr="0" anchor="ctr" bIns="91425" lIns="91425" spcFirstLastPara="1" rIns="91425" wrap="square" tIns="91425">
+          <a:bodyPr spcFirstLastPara="1" wrap="square" lIns="91425" tIns="91425" rIns="91425" bIns="91425" anchor="ctr" anchorCtr="0">
             <a:noAutofit/>
           </a:bodyPr>
           <a:lstStyle/>
           <a:p>
-            <a:pPr indent="0" lvl="0" marL="0" rtl="0" algn="ctr">
+            <a:pPr marL="0" lvl="0" indent="0" algn="ctr" rtl="0">
               <a:spcBef>
                 <a:spcPts val="0"/>
               </a:spcBef>
@@ -7999,13 +7788,10 @@
               </a:spcAft>
               <a:buNone/>
             </a:pPr>
-            <a:r>
-              <a:t/>
-            </a:r>
             <a:endParaRPr/>
           </a:p>
           <a:p>
-            <a:pPr indent="0" lvl="0" marL="0" rtl="0" algn="ctr">
+            <a:pPr marL="0" lvl="0" indent="0" algn="ctr" rtl="0">
               <a:spcBef>
                 <a:spcPts val="0"/>
               </a:spcBef>
@@ -8014,13 +7800,10 @@
               </a:spcAft>
               <a:buNone/>
             </a:pPr>
-            <a:r>
-              <a:t/>
-            </a:r>
             <a:endParaRPr/>
           </a:p>
           <a:p>
-            <a:pPr indent="0" lvl="0" marL="0" rtl="0" algn="ctr">
+            <a:pPr marL="0" lvl="0" indent="0" algn="ctr" rtl="0">
               <a:spcBef>
                 <a:spcPts val="0"/>
               </a:spcBef>
@@ -8029,13 +7812,10 @@
               </a:spcAft>
               <a:buNone/>
             </a:pPr>
-            <a:r>
-              <a:t/>
-            </a:r>
             <a:endParaRPr/>
           </a:p>
           <a:p>
-            <a:pPr indent="0" lvl="0" marL="0" rtl="0" algn="ctr">
+            <a:pPr marL="0" lvl="0" indent="0" algn="ctr" rtl="0">
               <a:spcBef>
                 <a:spcPts val="0"/>
               </a:spcBef>
@@ -8044,13 +7824,10 @@
               </a:spcAft>
               <a:buNone/>
             </a:pPr>
-            <a:r>
-              <a:t/>
-            </a:r>
             <a:endParaRPr/>
           </a:p>
           <a:p>
-            <a:pPr indent="0" lvl="0" marL="0" rtl="0" algn="ctr">
+            <a:pPr marL="0" lvl="0" indent="0" algn="ctr" rtl="0">
               <a:spcBef>
                 <a:spcPts val="0"/>
               </a:spcBef>
@@ -8059,13 +7836,10 @@
               </a:spcAft>
               <a:buNone/>
             </a:pPr>
-            <a:r>
-              <a:t/>
-            </a:r>
             <a:endParaRPr/>
           </a:p>
           <a:p>
-            <a:pPr indent="0" lvl="0" marL="0" rtl="0" algn="r">
+            <a:pPr marL="0" lvl="0" indent="0" algn="r" rtl="0">
               <a:spcBef>
                 <a:spcPts val="0"/>
               </a:spcBef>
@@ -8084,7 +7858,7 @@
       </p:sp>
       <p:sp>
         <p:nvSpPr>
-          <p:cNvPr id="93" name="Google Shape;93;p17"/>
+          <p:cNvPr id="94" name="Google Shape;94;p17"/>
           <p:cNvSpPr/>
           <p:nvPr/>
         </p:nvSpPr>
@@ -8095,29 +7869,29 @@
           </a:xfrm>
           <a:prstGeom prst="cube">
             <a:avLst>
-              <a:gd fmla="val 25000" name="adj"/>
+              <a:gd name="adj" fmla="val 25000"/>
             </a:avLst>
           </a:prstGeom>
           <a:solidFill>
             <a:schemeClr val="accent6"/>
           </a:solidFill>
-          <a:ln cap="flat" cmpd="sng" w="9525">
+          <a:ln w="9525" cap="flat" cmpd="sng">
             <a:solidFill>
               <a:schemeClr val="dk2"/>
             </a:solidFill>
             <a:prstDash val="solid"/>
             <a:round/>
-            <a:headEnd len="sm" w="sm" type="none"/>
-            <a:tailEnd len="sm" w="sm" type="none"/>
+            <a:headEnd type="none" w="sm" len="sm"/>
+            <a:tailEnd type="none" w="sm" len="sm"/>
           </a:ln>
         </p:spPr>
         <p:txBody>
-          <a:bodyPr anchorCtr="0" anchor="ctr" bIns="91425" lIns="91425" spcFirstLastPara="1" rIns="91425" wrap="square" tIns="91425">
+          <a:bodyPr spcFirstLastPara="1" wrap="square" lIns="91425" tIns="91425" rIns="91425" bIns="91425" anchor="ctr" anchorCtr="0">
             <a:noAutofit/>
           </a:bodyPr>
           <a:lstStyle/>
           <a:p>
-            <a:pPr indent="0" lvl="0" marL="0" rtl="0" algn="ctr">
+            <a:pPr marL="0" lvl="0" indent="0" algn="ctr" rtl="0">
               <a:spcBef>
                 <a:spcPts val="0"/>
               </a:spcBef>
@@ -8136,10 +7910,10 @@
       </p:sp>
       <p:cxnSp>
         <p:nvCxnSpPr>
-          <p:cNvPr id="94" name="Google Shape;94;p17"/>
+          <p:cNvPr id="95" name="Google Shape;95;p17"/>
           <p:cNvCxnSpPr>
-            <a:stCxn id="90" idx="3"/>
-            <a:endCxn id="92" idx="1"/>
+            <a:stCxn id="91" idx="3"/>
+            <a:endCxn id="93" idx="1"/>
           </p:cNvCxnSpPr>
           <p:nvPr/>
         </p:nvCxnSpPr>
@@ -8152,49 +7926,50 @@
             <a:avLst/>
           </a:prstGeom>
           <a:noFill/>
-          <a:ln cap="flat" cmpd="sng" w="9525">
+          <a:ln w="9525" cap="flat" cmpd="sng">
             <a:solidFill>
               <a:schemeClr val="dk2"/>
             </a:solidFill>
             <a:prstDash val="solid"/>
             <a:round/>
-            <a:headEnd len="med" w="med" type="none"/>
-            <a:tailEnd len="med" w="med" type="triangle"/>
+            <a:headEnd type="none" w="med" len="med"/>
+            <a:tailEnd type="triangle" w="med" len="med"/>
           </a:ln>
         </p:spPr>
       </p:cxnSp>
       <p:cxnSp>
         <p:nvCxnSpPr>
-          <p:cNvPr id="95" name="Google Shape;95;p17"/>
+          <p:cNvPr id="96" name="Google Shape;96;p17"/>
           <p:cNvCxnSpPr>
+            <a:cxnSpLocks/>
             <a:stCxn id="86" idx="3"/>
-            <a:endCxn id="91" idx="0"/>
+            <a:endCxn id="92" idx="0"/>
           </p:cNvCxnSpPr>
           <p:nvPr/>
         </p:nvCxnSpPr>
         <p:spPr>
           <a:xfrm flipH="1">
-            <a:off x="3365213" y="2437225"/>
-            <a:ext cx="1089300" cy="1119000"/>
+            <a:off x="3365350" y="2437225"/>
+            <a:ext cx="1089163" cy="1118888"/>
           </a:xfrm>
           <a:prstGeom prst="straightConnector1">
             <a:avLst/>
           </a:prstGeom>
           <a:noFill/>
-          <a:ln cap="flat" cmpd="sng" w="9525">
+          <a:ln w="9525" cap="flat" cmpd="sng">
             <a:solidFill>
               <a:schemeClr val="dk2"/>
             </a:solidFill>
             <a:prstDash val="solid"/>
             <a:round/>
-            <a:headEnd len="med" w="med" type="none"/>
-            <a:tailEnd len="med" w="med" type="triangle"/>
+            <a:headEnd type="none" w="med" len="med"/>
+            <a:tailEnd type="triangle" w="med" len="med"/>
           </a:ln>
         </p:spPr>
       </p:cxnSp>
       <p:sp>
         <p:nvSpPr>
-          <p:cNvPr id="96" name="Google Shape;96;p17"/>
+          <p:cNvPr id="97" name="Google Shape;97;p17"/>
           <p:cNvSpPr txBox="1"/>
           <p:nvPr/>
         </p:nvSpPr>
@@ -8212,12 +7987,12 @@
           </a:ln>
         </p:spPr>
         <p:txBody>
-          <a:bodyPr anchorCtr="0" anchor="t" bIns="91425" lIns="91425" spcFirstLastPara="1" rIns="91425" wrap="square" tIns="91425">
+          <a:bodyPr spcFirstLastPara="1" wrap="square" lIns="91425" tIns="91425" rIns="91425" bIns="91425" anchor="t" anchorCtr="0">
             <a:noAutofit/>
           </a:bodyPr>
           <a:lstStyle/>
           <a:p>
-            <a:pPr indent="0" lvl="0" marL="0" rtl="0" algn="l">
+            <a:pPr marL="0" lvl="0" indent="0" algn="l" rtl="0">
               <a:spcBef>
                 <a:spcPts val="0"/>
               </a:spcBef>
@@ -8244,7 +8019,7 @@
       </p:sp>
       <p:sp>
         <p:nvSpPr>
-          <p:cNvPr id="97" name="Google Shape;97;p17"/>
+          <p:cNvPr id="98" name="Google Shape;98;p17"/>
           <p:cNvSpPr txBox="1"/>
           <p:nvPr/>
         </p:nvSpPr>
@@ -8262,12 +8037,12 @@
           </a:ln>
         </p:spPr>
         <p:txBody>
-          <a:bodyPr anchorCtr="0" anchor="t" bIns="91425" lIns="91425" spcFirstLastPara="1" rIns="91425" wrap="square" tIns="91425">
+          <a:bodyPr spcFirstLastPara="1" wrap="square" lIns="91425" tIns="91425" rIns="91425" bIns="91425" anchor="t" anchorCtr="0">
             <a:noAutofit/>
           </a:bodyPr>
           <a:lstStyle/>
           <a:p>
-            <a:pPr indent="0" lvl="0" marL="0" rtl="0" algn="ctr">
+            <a:pPr marL="0" lvl="0" indent="0" algn="ctr" rtl="0">
               <a:spcBef>
                 <a:spcPts val="0"/>
               </a:spcBef>
@@ -8294,15 +8069,15 @@
       </p:sp>
       <p:cxnSp>
         <p:nvCxnSpPr>
-          <p:cNvPr id="98" name="Google Shape;98;p17"/>
+          <p:cNvPr id="99" name="Google Shape;99;p17"/>
           <p:cNvCxnSpPr>
             <a:stCxn id="86" idx="4"/>
-            <a:endCxn id="97" idx="1"/>
+            <a:endCxn id="98" idx="1"/>
           </p:cNvCxnSpPr>
           <p:nvPr/>
         </p:nvCxnSpPr>
         <p:spPr>
-          <a:xfrm flipH="1" rot="10800000">
+          <a:xfrm rot="10800000" flipH="1">
             <a:off x="4929350" y="1562613"/>
             <a:ext cx="1881900" cy="363600"/>
           </a:xfrm>
@@ -8310,43 +8085,44 @@
             <a:avLst/>
           </a:prstGeom>
           <a:noFill/>
-          <a:ln cap="flat" cmpd="sng" w="9525">
+          <a:ln w="9525" cap="flat" cmpd="sng">
             <a:solidFill>
               <a:schemeClr val="dk2"/>
             </a:solidFill>
             <a:prstDash val="solid"/>
             <a:round/>
-            <a:headEnd len="med" w="med" type="none"/>
-            <a:tailEnd len="med" w="med" type="triangle"/>
+            <a:headEnd type="none" w="med" len="med"/>
+            <a:tailEnd type="triangle" w="med" len="med"/>
           </a:ln>
         </p:spPr>
       </p:cxnSp>
       <p:cxnSp>
         <p:nvCxnSpPr>
-          <p:cNvPr id="99" name="Google Shape;99;p17"/>
+          <p:cNvPr id="100" name="Google Shape;100;p17"/>
           <p:cNvCxnSpPr>
-            <a:stCxn id="91" idx="0"/>
+            <a:cxnSpLocks/>
+            <a:stCxn id="92" idx="0"/>
             <a:endCxn id="86" idx="3"/>
           </p:cNvCxnSpPr>
           <p:nvPr/>
         </p:nvCxnSpPr>
         <p:spPr>
-          <a:xfrm flipH="1" rot="10800000">
-            <a:off x="3365350" y="2437113"/>
-            <a:ext cx="1089300" cy="1119000"/>
+          <a:xfrm flipV="1">
+            <a:off x="3365350" y="2437225"/>
+            <a:ext cx="1089163" cy="1118888"/>
           </a:xfrm>
           <a:prstGeom prst="straightConnector1">
             <a:avLst/>
           </a:prstGeom>
           <a:noFill/>
-          <a:ln cap="flat" cmpd="sng" w="9525">
+          <a:ln w="9525" cap="flat" cmpd="sng">
             <a:solidFill>
               <a:schemeClr val="dk2"/>
             </a:solidFill>
             <a:prstDash val="solid"/>
             <a:round/>
-            <a:headEnd len="med" w="med" type="none"/>
-            <a:tailEnd len="med" w="med" type="triangle"/>
+            <a:headEnd type="none" w="med" len="med"/>
+            <a:tailEnd type="triangle" w="med" len="med"/>
           </a:ln>
         </p:spPr>
       </p:cxnSp>
@@ -8359,23 +8135,11 @@
 </file>
 
 <file path=ppt/slides/slide6.xml><?xml version="1.0" encoding="utf-8"?>
-<p:sld xmlns:a="http://schemas.openxmlformats.org/drawingml/2006/main" xmlns:r="http://schemas.openxmlformats.org/officeDocument/2006/relationships" xmlns:mc="http://schemas.openxmlformats.org/markup-compatibility/2006" xmlns:mv="urn:schemas-microsoft-com:mac:vml" xmlns:p="http://schemas.openxmlformats.org/presentationml/2006/main" xmlns:c="http://schemas.openxmlformats.org/drawingml/2006/chart" xmlns:dgm="http://schemas.openxmlformats.org/drawingml/2006/diagram" xmlns:o="urn:schemas-microsoft-com:office:office" xmlns:v="urn:schemas-microsoft-com:vml" xmlns:pvml="urn:schemas-microsoft-com:office:powerpoint" xmlns:com="http://schemas.openxmlformats.org/drawingml/2006/compatibility" xmlns:p14="http://schemas.microsoft.com/office/powerpoint/2010/main" xmlns:p15="http://schemas.microsoft.com/office/powerpoint/2012/main" xmlns:ahyp="http://schemas.microsoft.com/office/drawing/2018/hyperlinkcolor">
+<p:sld xmlns:a="http://schemas.openxmlformats.org/drawingml/2006/main" xmlns:r="http://schemas.openxmlformats.org/officeDocument/2006/relationships" xmlns:p="http://schemas.openxmlformats.org/presentationml/2006/main">
   <p:cSld>
-    <p:bg>
-      <p:bgPr>
-        <a:blipFill>
-          <a:blip r:embed="rId3">
-            <a:alphaModFix/>
-          </a:blip>
-          <a:stretch>
-            <a:fillRect/>
-          </a:stretch>
-        </a:blipFill>
-      </p:bgPr>
-    </p:bg>
     <p:spTree>
       <p:nvGrpSpPr>
-        <p:cNvPr id="103" name="Shape 103"/>
+        <p:cNvPr id="1" name=""/>
         <p:cNvGrpSpPr/>
         <p:nvPr/>
       </p:nvGrpSpPr>
@@ -8389,256 +8153,82 @@
       </p:grpSpPr>
       <p:sp>
         <p:nvSpPr>
-          <p:cNvPr id="104" name="Google Shape;104;p18"/>
-          <p:cNvSpPr txBox="1"/>
+          <p:cNvPr id="2" name="Title 1">
+            <a:extLst>
+              <a:ext uri="{FF2B5EF4-FFF2-40B4-BE49-F238E27FC236}">
+                <a16:creationId xmlns:a16="http://schemas.microsoft.com/office/drawing/2014/main" id="{01CCE7D1-2828-4B44-81B4-12073A5FA44C}"/>
+              </a:ext>
+            </a:extLst>
+          </p:cNvPr>
+          <p:cNvSpPr>
+            <a:spLocks noGrp="1"/>
+          </p:cNvSpPr>
           <p:nvPr>
             <p:ph type="title"/>
           </p:nvPr>
         </p:nvSpPr>
-        <p:spPr>
-          <a:xfrm>
-            <a:off x="311700" y="445025"/>
-            <a:ext cx="8520600" cy="572700"/>
-          </a:xfrm>
-          <a:prstGeom prst="rect">
-            <a:avLst/>
-          </a:prstGeom>
-        </p:spPr>
+        <p:spPr/>
         <p:txBody>
-          <a:bodyPr anchorCtr="0" anchor="t" bIns="91425" lIns="91425" spcFirstLastPara="1" rIns="91425" wrap="square" tIns="91425">
+          <a:bodyPr>
             <a:normAutofit fontScale="90000"/>
           </a:bodyPr>
           <a:lstStyle/>
           <a:p>
-            <a:pPr indent="0" lvl="0" marL="0" rtl="0" algn="l">
-              <a:spcBef>
-                <a:spcPts val="0"/>
-              </a:spcBef>
-              <a:spcAft>
-                <a:spcPts val="0"/>
-              </a:spcAft>
-              <a:buNone/>
-            </a:pPr>
             <a:r>
-              <a:rPr lang="en"/>
-              <a:t>Features to Implement</a:t>
+              <a:rPr lang="en-US" dirty="0"/>
+              <a:t>Dashboard Recording</a:t>
             </a:r>
-            <a:endParaRPr/>
           </a:p>
         </p:txBody>
       </p:sp>
       <p:sp>
         <p:nvSpPr>
-          <p:cNvPr id="105" name="Google Shape;105;p18"/>
-          <p:cNvSpPr txBox="1"/>
+          <p:cNvPr id="3" name="Text Placeholder 2">
+            <a:extLst>
+              <a:ext uri="{FF2B5EF4-FFF2-40B4-BE49-F238E27FC236}">
+                <a16:creationId xmlns:a16="http://schemas.microsoft.com/office/drawing/2014/main" id="{6D6325CF-F94E-72A2-2EA0-3F1BA687DCC6}"/>
+              </a:ext>
+            </a:extLst>
+          </p:cNvPr>
+          <p:cNvSpPr>
+            <a:spLocks noGrp="1"/>
+          </p:cNvSpPr>
           <p:nvPr>
-            <p:ph idx="1" type="body"/>
+            <p:ph type="body" idx="1"/>
           </p:nvPr>
         </p:nvSpPr>
         <p:spPr>
           <a:xfrm>
-            <a:off x="311700" y="1152475"/>
-            <a:ext cx="8520600" cy="3666600"/>
+            <a:off x="311700" y="4459246"/>
+            <a:ext cx="8520600" cy="478458"/>
           </a:xfrm>
-          <a:prstGeom prst="rect">
-            <a:avLst/>
-          </a:prstGeom>
         </p:spPr>
         <p:txBody>
-          <a:bodyPr anchorCtr="0" anchor="t" bIns="91425" lIns="91425" spcFirstLastPara="1" rIns="91425" wrap="square" tIns="91425">
-            <a:normAutofit/>
+          <a:bodyPr>
+            <a:normAutofit lnSpcReduction="10000"/>
           </a:bodyPr>
           <a:lstStyle/>
           <a:p>
-            <a:pPr indent="-342900" lvl="0" marL="457200" rtl="0" algn="l">
-              <a:spcBef>
-                <a:spcPts val="0"/>
-              </a:spcBef>
-              <a:spcAft>
-                <a:spcPts val="0"/>
-              </a:spcAft>
-              <a:buSzPts val="1800"/>
-              <a:buChar char="-"/>
-            </a:pPr>
             <a:r>
-              <a:rPr lang="en"/>
-              <a:t>S3 Bucket</a:t>
+              <a:rPr lang="en-US" dirty="0"/>
+              <a:t>Website: </a:t>
             </a:r>
-            <a:endParaRPr/>
-          </a:p>
-          <a:p>
-            <a:pPr indent="-317500" lvl="1" marL="914400" rtl="0" algn="l">
-              <a:spcBef>
-                <a:spcPts val="0"/>
-              </a:spcBef>
-              <a:spcAft>
-                <a:spcPts val="0"/>
-              </a:spcAft>
-              <a:buSzPts val="1400"/>
-              <a:buChar char="-"/>
-            </a:pPr>
             <a:r>
-              <a:rPr lang="en"/>
-              <a:t>Store data in buckets</a:t>
+              <a:rPr lang="en-US" dirty="0">
+                <a:hlinkClick r:id="rId2"/>
+              </a:rPr>
+              <a:t>http://group8-final-project.s3-website-us-east-1.amazonaws.com/</a:t>
             </a:r>
-            <a:endParaRPr/>
-          </a:p>
-          <a:p>
-            <a:pPr indent="-317500" lvl="1" marL="914400" rtl="0" algn="l">
-              <a:spcBef>
-                <a:spcPts val="0"/>
-              </a:spcBef>
-              <a:spcAft>
-                <a:spcPts val="0"/>
-              </a:spcAft>
-              <a:buSzPts val="1400"/>
-              <a:buChar char="-"/>
-            </a:pPr>
-            <a:r>
-              <a:rPr lang="en"/>
-              <a:t>Create static website to display findings in one place</a:t>
-            </a:r>
-            <a:endParaRPr/>
-          </a:p>
-          <a:p>
-            <a:pPr indent="-342900" lvl="0" marL="457200" rtl="0" algn="l">
-              <a:spcBef>
-                <a:spcPts val="0"/>
-              </a:spcBef>
-              <a:spcAft>
-                <a:spcPts val="0"/>
-              </a:spcAft>
-              <a:buSzPts val="1800"/>
-              <a:buChar char="-"/>
-            </a:pPr>
-            <a:r>
-              <a:rPr lang="en"/>
-              <a:t>VPC</a:t>
-            </a:r>
-            <a:endParaRPr/>
-          </a:p>
-          <a:p>
-            <a:pPr indent="-317500" lvl="1" marL="914400" rtl="0" algn="l">
-              <a:spcBef>
-                <a:spcPts val="0"/>
-              </a:spcBef>
-              <a:spcAft>
-                <a:spcPts val="0"/>
-              </a:spcAft>
-              <a:buSzPts val="1400"/>
-              <a:buChar char="-"/>
-            </a:pPr>
-            <a:r>
-              <a:rPr lang="en"/>
-              <a:t>Create internet gateways, subnets, and routing tables for EC2 instances</a:t>
-            </a:r>
-            <a:endParaRPr/>
-          </a:p>
-          <a:p>
-            <a:pPr indent="-342900" lvl="0" marL="457200" rtl="0" algn="l">
-              <a:spcBef>
-                <a:spcPts val="0"/>
-              </a:spcBef>
-              <a:spcAft>
-                <a:spcPts val="0"/>
-              </a:spcAft>
-              <a:buSzPts val="1800"/>
-              <a:buChar char="-"/>
-            </a:pPr>
-            <a:r>
-              <a:rPr lang="en"/>
-              <a:t>EC2</a:t>
-            </a:r>
-            <a:endParaRPr/>
-          </a:p>
-          <a:p>
-            <a:pPr indent="-317500" lvl="1" marL="914400" rtl="0" algn="l">
-              <a:spcBef>
-                <a:spcPts val="0"/>
-              </a:spcBef>
-              <a:spcAft>
-                <a:spcPts val="0"/>
-              </a:spcAft>
-              <a:buSzPts val="1400"/>
-              <a:buChar char="-"/>
-            </a:pPr>
-            <a:r>
-              <a:rPr lang="en"/>
-              <a:t>Create instances from computing sources in the cloud</a:t>
-            </a:r>
-            <a:endParaRPr/>
-          </a:p>
-          <a:p>
-            <a:pPr indent="-317500" lvl="1" marL="914400" rtl="0" algn="l">
-              <a:spcBef>
-                <a:spcPts val="0"/>
-              </a:spcBef>
-              <a:spcAft>
-                <a:spcPts val="0"/>
-              </a:spcAft>
-              <a:buSzPts val="1400"/>
-              <a:buChar char="-"/>
-            </a:pPr>
-            <a:r>
-              <a:rPr lang="en"/>
-              <a:t>Run a Jupyter Notebook or Python file to preprocess data</a:t>
-            </a:r>
-            <a:endParaRPr/>
-          </a:p>
-          <a:p>
-            <a:pPr indent="-342900" lvl="0" marL="457200" rtl="0" algn="l">
-              <a:spcBef>
-                <a:spcPts val="0"/>
-              </a:spcBef>
-              <a:spcAft>
-                <a:spcPts val="0"/>
-              </a:spcAft>
-              <a:buSzPts val="1800"/>
-              <a:buChar char="-"/>
-            </a:pPr>
-            <a:r>
-              <a:rPr lang="en"/>
-              <a:t>QuickSight</a:t>
-            </a:r>
-            <a:endParaRPr/>
-          </a:p>
-          <a:p>
-            <a:pPr indent="-317500" lvl="1" marL="914400" rtl="0" algn="l">
-              <a:spcBef>
-                <a:spcPts val="0"/>
-              </a:spcBef>
-              <a:spcAft>
-                <a:spcPts val="0"/>
-              </a:spcAft>
-              <a:buSzPts val="1400"/>
-              <a:buChar char="-"/>
-            </a:pPr>
-            <a:r>
-              <a:rPr lang="en"/>
-              <a:t>Connect with data from S3 bucket to create dashboards</a:t>
-            </a:r>
-            <a:endParaRPr/>
-          </a:p>
-          <a:p>
-            <a:pPr indent="-317500" lvl="1" marL="914400" rtl="0" algn="l">
-              <a:spcBef>
-                <a:spcPts val="0"/>
-              </a:spcBef>
-              <a:spcAft>
-                <a:spcPts val="0"/>
-              </a:spcAft>
-              <a:buSzPts val="1400"/>
-              <a:buChar char="-"/>
-            </a:pPr>
-            <a:r>
-              <a:rPr lang="en"/>
-              <a:t>Create histogram to show the distribution of salaries</a:t>
-            </a:r>
-            <a:endParaRPr/>
+            <a:endParaRPr lang="en-US" dirty="0"/>
           </a:p>
         </p:txBody>
       </p:sp>
     </p:spTree>
+    <p:extLst>
+      <p:ext uri="{BB962C8B-B14F-4D97-AF65-F5344CB8AC3E}">
+        <p14:creationId xmlns:p14="http://schemas.microsoft.com/office/powerpoint/2010/main" val="3483925133"/>
+      </p:ext>
+    </p:extLst>
   </p:cSld>
   <p:clrMapOvr>
     <a:masterClrMapping/>
@@ -8647,7 +8237,7 @@
 </file>
 
 <file path=ppt/slides/slide7.xml><?xml version="1.0" encoding="utf-8"?>
-<p:sld xmlns:a="http://schemas.openxmlformats.org/drawingml/2006/main" xmlns:r="http://schemas.openxmlformats.org/officeDocument/2006/relationships" xmlns:mc="http://schemas.openxmlformats.org/markup-compatibility/2006" xmlns:mv="urn:schemas-microsoft-com:mac:vml" xmlns:p="http://schemas.openxmlformats.org/presentationml/2006/main" xmlns:c="http://schemas.openxmlformats.org/drawingml/2006/chart" xmlns:dgm="http://schemas.openxmlformats.org/drawingml/2006/diagram" xmlns:o="urn:schemas-microsoft-com:office:office" xmlns:v="urn:schemas-microsoft-com:vml" xmlns:pvml="urn:schemas-microsoft-com:office:powerpoint" xmlns:com="http://schemas.openxmlformats.org/drawingml/2006/compatibility" xmlns:p14="http://schemas.microsoft.com/office/powerpoint/2010/main" xmlns:p15="http://schemas.microsoft.com/office/powerpoint/2012/main" xmlns:ahyp="http://schemas.microsoft.com/office/drawing/2018/hyperlinkcolor" show="0">
+<p:sld xmlns:a="http://schemas.openxmlformats.org/drawingml/2006/main" xmlns:r="http://schemas.openxmlformats.org/officeDocument/2006/relationships" xmlns:p="http://schemas.openxmlformats.org/presentationml/2006/main">
   <p:cSld>
     <p:bg>
       <p:bgPr>
@@ -8659,11 +8249,12 @@
             <a:fillRect/>
           </a:stretch>
         </a:blipFill>
+        <a:effectLst/>
       </p:bgPr>
     </p:bg>
     <p:spTree>
       <p:nvGrpSpPr>
-        <p:cNvPr id="109" name="Shape 109"/>
+        <p:cNvPr id="1" name="Shape 104"/>
         <p:cNvGrpSpPr/>
         <p:nvPr/>
       </p:nvGrpSpPr>
@@ -8677,8 +8268,10 @@
       </p:grpSpPr>
       <p:sp>
         <p:nvSpPr>
-          <p:cNvPr id="110" name="Google Shape;110;p19"/>
-          <p:cNvSpPr txBox="1"/>
+          <p:cNvPr id="105" name="Google Shape;105;p18"/>
+          <p:cNvSpPr txBox="1">
+            <a:spLocks noGrp="1"/>
+          </p:cNvSpPr>
           <p:nvPr>
             <p:ph type="title"/>
           </p:nvPr>
@@ -8693,12 +8286,12 @@
           </a:prstGeom>
         </p:spPr>
         <p:txBody>
-          <a:bodyPr anchorCtr="0" anchor="t" bIns="91425" lIns="91425" spcFirstLastPara="1" rIns="91425" wrap="square" tIns="91425">
+          <a:bodyPr spcFirstLastPara="1" wrap="square" lIns="91425" tIns="91425" rIns="91425" bIns="91425" anchor="t" anchorCtr="0">
             <a:normAutofit fontScale="90000"/>
           </a:bodyPr>
           <a:lstStyle/>
           <a:p>
-            <a:pPr indent="0" lvl="0" marL="0" rtl="0" algn="l">
+            <a:pPr marL="0" lvl="0" indent="0" algn="l" rtl="0">
               <a:spcBef>
                 <a:spcPts val="0"/>
               </a:spcBef>
@@ -8708,19 +8301,21 @@
               <a:buNone/>
             </a:pPr>
             <a:r>
-              <a:rPr lang="en"/>
-              <a:t>Expected Outcomes</a:t>
+              <a:rPr lang="en" dirty="0"/>
+              <a:t>Conclusions</a:t>
             </a:r>
-            <a:endParaRPr/>
+            <a:endParaRPr dirty="0"/>
           </a:p>
         </p:txBody>
       </p:sp>
       <p:sp>
         <p:nvSpPr>
-          <p:cNvPr id="111" name="Google Shape;111;p19"/>
-          <p:cNvSpPr txBox="1"/>
+          <p:cNvPr id="106" name="Google Shape;106;p18"/>
+          <p:cNvSpPr txBox="1">
+            <a:spLocks noGrp="1"/>
+          </p:cNvSpPr>
           <p:nvPr>
-            <p:ph idx="1" type="body"/>
+            <p:ph type="body" idx="1"/>
           </p:nvPr>
         </p:nvSpPr>
         <p:spPr>
@@ -8733,12 +8328,12 @@
           </a:prstGeom>
         </p:spPr>
         <p:txBody>
-          <a:bodyPr anchorCtr="0" anchor="t" bIns="91425" lIns="91425" spcFirstLastPara="1" rIns="91425" wrap="square" tIns="91425">
+          <a:bodyPr spcFirstLastPara="1" wrap="square" lIns="91425" tIns="91425" rIns="91425" bIns="91425" anchor="t" anchorCtr="0">
             <a:normAutofit/>
           </a:bodyPr>
           <a:lstStyle/>
           <a:p>
-            <a:pPr indent="-342900" lvl="0" marL="457200" rtl="0" algn="l">
+            <a:pPr marL="457200" lvl="0" indent="-342900" algn="l" rtl="0">
               <a:spcBef>
                 <a:spcPts val="0"/>
               </a:spcBef>
@@ -8749,21 +8344,12 @@
               <a:buChar char="-"/>
             </a:pPr>
             <a:r>
-              <a:rPr lang="en"/>
-              <a:t>Create a </a:t>
+              <a:rPr lang="en-US" dirty="0"/>
+              <a:t>Hypothesis: Jobs that require AWS skill tend to have a higher pay than jobs that don’t</a:t>
             </a:r>
-            <a:r>
-              <a:rPr lang="en"/>
-              <a:t>dashboard</a:t>
-            </a:r>
-            <a:r>
-              <a:rPr lang="en"/>
-              <a:t> in QuickSight to visualize our findings</a:t>
-            </a:r>
-            <a:endParaRPr/>
-          </a:p>
-          <a:p>
-            <a:pPr indent="-342900" lvl="0" marL="457200" rtl="0" algn="l">
+          </a:p>
+          <a:p>
+            <a:pPr marL="457200" lvl="0" indent="-342900" algn="l" rtl="0">
               <a:spcBef>
                 <a:spcPts val="0"/>
               </a:spcBef>
@@ -8774,13 +8360,20 @@
               <a:buChar char="-"/>
             </a:pPr>
             <a:r>
-              <a:rPr lang="en"/>
-              <a:t>Hypothesis: Jobs that require AWS skill tend to have a higher pay than jobs that don’t</a:t>
+              <a:rPr lang="en-US" dirty="0"/>
+              <a:t>Conclusion</a:t>
             </a:r>
-            <a:endParaRPr/>
-          </a:p>
-          <a:p>
-            <a:pPr indent="-317500" lvl="1" marL="914400" rtl="0" algn="l">
+            <a:r>
+              <a:rPr lang="en-US"/>
+              <a:t>: Yes, </a:t>
+            </a:r>
+            <a:r>
+              <a:rPr lang="en-US" dirty="0"/>
+              <a:t>jobs that require AWS skill tends to have a higher pay than jobs that don’t</a:t>
+            </a:r>
+          </a:p>
+          <a:p>
+            <a:pPr marL="914400" lvl="1" indent="-317500" algn="l" rtl="0">
               <a:spcBef>
                 <a:spcPts val="0"/>
               </a:spcBef>
@@ -8791,13 +8384,12 @@
               <a:buChar char="-"/>
             </a:pPr>
             <a:r>
-              <a:rPr lang="en"/>
+              <a:rPr lang="en-US" dirty="0"/>
               <a:t>Factors for consideration on salary differences:</a:t>
             </a:r>
-            <a:endParaRPr/>
-          </a:p>
-          <a:p>
-            <a:pPr indent="-317500" lvl="2" marL="1371600" rtl="0" algn="l">
+          </a:p>
+          <a:p>
+            <a:pPr marL="1371600" lvl="2" indent="-317500" algn="l" rtl="0">
               <a:spcBef>
                 <a:spcPts val="0"/>
               </a:spcBef>
@@ -8808,13 +8400,12 @@
               <a:buChar char="-"/>
             </a:pPr>
             <a:r>
-              <a:rPr lang="en"/>
+              <a:rPr lang="en-US" dirty="0"/>
               <a:t>Cost of living (Location)</a:t>
             </a:r>
-            <a:endParaRPr/>
-          </a:p>
-          <a:p>
-            <a:pPr indent="-317500" lvl="2" marL="1371600" rtl="0" algn="l">
+          </a:p>
+          <a:p>
+            <a:pPr marL="1371600" lvl="2" indent="-317500" algn="l" rtl="0">
               <a:spcBef>
                 <a:spcPts val="0"/>
               </a:spcBef>
@@ -8825,13 +8416,12 @@
               <a:buChar char="-"/>
             </a:pPr>
             <a:r>
-              <a:rPr lang="en"/>
+              <a:rPr lang="en-US" dirty="0"/>
               <a:t>Company type (Type of Ownership - government, private, etc.)</a:t>
             </a:r>
-            <a:endParaRPr/>
-          </a:p>
-          <a:p>
-            <a:pPr indent="-317500" lvl="2" marL="1371600" rtl="0" algn="l">
+          </a:p>
+          <a:p>
+            <a:pPr marL="1371600" lvl="2" indent="-317500" algn="l" rtl="0">
               <a:spcBef>
                 <a:spcPts val="0"/>
               </a:spcBef>
@@ -8842,13 +8432,12 @@
               <a:buChar char="-"/>
             </a:pPr>
             <a:r>
-              <a:rPr lang="en"/>
+              <a:rPr lang="en-US" dirty="0"/>
               <a:t>Industry/sector (Industry or Sector)</a:t>
             </a:r>
-            <a:endParaRPr/>
-          </a:p>
-          <a:p>
-            <a:pPr indent="-317500" lvl="2" marL="1371600" rtl="0" algn="l">
+          </a:p>
+          <a:p>
+            <a:pPr marL="1371600" lvl="2" indent="-317500" algn="l" rtl="0">
               <a:spcBef>
                 <a:spcPts val="0"/>
               </a:spcBef>
@@ -8859,21 +8448,12 @@
               <a:buChar char="-"/>
             </a:pPr>
             <a:r>
-              <a:rPr lang="en"/>
-              <a:t>Experience level (</a:t>
+              <a:rPr lang="en-US" dirty="0"/>
+              <a:t>Experience level (Seniority)</a:t>
             </a:r>
-            <a:r>
-              <a:rPr lang="en"/>
-              <a:t>Seniority</a:t>
-            </a:r>
-            <a:r>
-              <a:rPr lang="en"/>
-              <a:t>)</a:t>
-            </a:r>
-            <a:endParaRPr/>
-          </a:p>
-          <a:p>
-            <a:pPr indent="0" lvl="0" marL="457200" rtl="0" algn="l">
+          </a:p>
+          <a:p>
+            <a:pPr marL="457200" lvl="0" indent="0" algn="l" rtl="0">
               <a:spcBef>
                 <a:spcPts val="1200"/>
               </a:spcBef>
@@ -8882,971 +8462,263 @@
               </a:spcAft>
               <a:buNone/>
             </a:pPr>
-            <a:r>
-              <a:t/>
-            </a:r>
-            <a:endParaRPr/>
+            <a:endParaRPr lang="en-US" dirty="0"/>
           </a:p>
         </p:txBody>
       </p:sp>
-    </p:spTree>
-  </p:cSld>
-  <p:clrMapOvr>
-    <a:masterClrMapping/>
-  </p:clrMapOvr>
-</p:sld>
-</file>
-
-<file path=ppt/slides/slide8.xml><?xml version="1.0" encoding="utf-8"?>
-<p:sld xmlns:a="http://schemas.openxmlformats.org/drawingml/2006/main" xmlns:r="http://schemas.openxmlformats.org/officeDocument/2006/relationships" xmlns:mc="http://schemas.openxmlformats.org/markup-compatibility/2006" xmlns:mv="urn:schemas-microsoft-com:mac:vml" xmlns:p="http://schemas.openxmlformats.org/presentationml/2006/main" xmlns:c="http://schemas.openxmlformats.org/drawingml/2006/chart" xmlns:dgm="http://schemas.openxmlformats.org/drawingml/2006/diagram" xmlns:o="urn:schemas-microsoft-com:office:office" xmlns:v="urn:schemas-microsoft-com:vml" xmlns:pvml="urn:schemas-microsoft-com:office:powerpoint" xmlns:com="http://schemas.openxmlformats.org/drawingml/2006/compatibility" xmlns:p14="http://schemas.microsoft.com/office/powerpoint/2010/main" xmlns:p15="http://schemas.microsoft.com/office/powerpoint/2012/main" xmlns:ahyp="http://schemas.microsoft.com/office/drawing/2018/hyperlinkcolor" show="0">
-  <p:cSld>
-    <p:spTree>
-      <p:nvGrpSpPr>
-        <p:cNvPr id="115" name="Shape 115"/>
-        <p:cNvGrpSpPr/>
-        <p:nvPr/>
-      </p:nvGrpSpPr>
-      <p:grpSpPr>
-        <a:xfrm>
-          <a:off x="0" y="0"/>
-          <a:ext cx="0" cy="0"/>
-          <a:chOff x="0" y="0"/>
-          <a:chExt cx="0" cy="0"/>
-        </a:xfrm>
-      </p:grpSpPr>
-      <p:sp>
-        <p:nvSpPr>
-          <p:cNvPr id="116" name="Google Shape;116;p20"/>
-          <p:cNvSpPr txBox="1"/>
+      <p:graphicFrame>
+        <p:nvGraphicFramePr>
+          <p:cNvPr id="6" name="Table 5">
+            <a:extLst>
+              <a:ext uri="{FF2B5EF4-FFF2-40B4-BE49-F238E27FC236}">
+                <a16:creationId xmlns:a16="http://schemas.microsoft.com/office/drawing/2014/main" id="{2A5584BC-3CEA-F507-F586-FB25B1873C4F}"/>
+              </a:ext>
+            </a:extLst>
+          </p:cNvPr>
+          <p:cNvGraphicFramePr>
+            <a:graphicFrameLocks noGrp="1"/>
+          </p:cNvGraphicFramePr>
           <p:nvPr>
-            <p:ph type="title"/>
+            <p:extLst>
+              <p:ext uri="{D42A27DB-BD31-4B8C-83A1-F6EECF244321}">
+                <p14:modId xmlns:p14="http://schemas.microsoft.com/office/powerpoint/2010/main" val="2463633192"/>
+              </p:ext>
+            </p:extLst>
           </p:nvPr>
-        </p:nvSpPr>
-        <p:spPr>
-          <a:xfrm>
-            <a:off x="311700" y="445025"/>
-            <a:ext cx="8520600" cy="572700"/>
-          </a:xfrm>
-          <a:prstGeom prst="rect">
-            <a:avLst/>
-          </a:prstGeom>
-        </p:spPr>
-        <p:txBody>
-          <a:bodyPr anchorCtr="0" anchor="t" bIns="91425" lIns="91425" spcFirstLastPara="1" rIns="91425" wrap="square" tIns="91425">
-            <a:normAutofit fontScale="90000"/>
-          </a:bodyPr>
-          <a:lstStyle/>
-          <a:p>
-            <a:pPr indent="0" lvl="0" marL="0" rtl="0" algn="l">
-              <a:spcBef>
-                <a:spcPts val="0"/>
-              </a:spcBef>
-              <a:spcAft>
-                <a:spcPts val="0"/>
-              </a:spcAft>
-              <a:buNone/>
-            </a:pPr>
-            <a:r>
-              <a:rPr lang="en"/>
-              <a:t>Potential dataset links:</a:t>
-            </a:r>
-            <a:endParaRPr/>
-          </a:p>
-        </p:txBody>
-      </p:sp>
-      <p:sp>
-        <p:nvSpPr>
-          <p:cNvPr id="117" name="Google Shape;117;p20"/>
-          <p:cNvSpPr txBox="1"/>
-          <p:nvPr>
-            <p:ph idx="1" type="body"/>
-          </p:nvPr>
-        </p:nvSpPr>
-        <p:spPr>
-          <a:xfrm>
-            <a:off x="311700" y="1152475"/>
-            <a:ext cx="8520600" cy="3416400"/>
-          </a:xfrm>
-          <a:prstGeom prst="rect">
-            <a:avLst/>
-          </a:prstGeom>
-        </p:spPr>
-        <p:txBody>
-          <a:bodyPr anchorCtr="0" anchor="t" bIns="91425" lIns="91425" spcFirstLastPara="1" rIns="91425" wrap="square" tIns="91425">
-            <a:normAutofit lnSpcReduction="20000"/>
-          </a:bodyPr>
-          <a:lstStyle/>
-          <a:p>
-            <a:pPr indent="0" lvl="0" marL="0" rtl="0" algn="l">
-              <a:spcBef>
-                <a:spcPts val="0"/>
-              </a:spcBef>
-              <a:spcAft>
-                <a:spcPts val="0"/>
-              </a:spcAft>
-              <a:buNone/>
-            </a:pPr>
-            <a:r>
-              <a:rPr lang="en"/>
-              <a:t> Customer churn prediction: </a:t>
-            </a:r>
-            <a:r>
-              <a:rPr lang="en" sz="1100" u="sng">
-                <a:solidFill>
-                  <a:schemeClr val="hlink"/>
-                </a:solidFill>
-                <a:hlinkClick r:id="rId3"/>
-              </a:rPr>
-              <a:t>https://www.kaggle.com/datasets/blastchar/telco-customer-churn</a:t>
-            </a:r>
-            <a:endParaRPr/>
-          </a:p>
-          <a:p>
-            <a:pPr indent="0" lvl="0" marL="0" rtl="0" algn="l">
-              <a:spcBef>
-                <a:spcPts val="1200"/>
-              </a:spcBef>
-              <a:spcAft>
-                <a:spcPts val="0"/>
-              </a:spcAft>
-              <a:buNone/>
-            </a:pPr>
-            <a:r>
-              <a:rPr lang="en"/>
-              <a:t>E-commerce sales forecasting:</a:t>
-            </a:r>
-            <a:endParaRPr/>
-          </a:p>
-          <a:p>
-            <a:pPr indent="457200" lvl="0" marL="0" rtl="0" algn="l">
-              <a:spcBef>
-                <a:spcPts val="1200"/>
-              </a:spcBef>
-              <a:spcAft>
-                <a:spcPts val="0"/>
-              </a:spcAft>
-              <a:buNone/>
-            </a:pPr>
-            <a:r>
-              <a:rPr lang="en" sz="1100" u="sng">
-                <a:solidFill>
-                  <a:schemeClr val="hlink"/>
-                </a:solidFill>
-                <a:hlinkClick r:id="rId4"/>
-              </a:rPr>
-              <a:t>https://www.kaggle.com/datasets/olistbr/brazilian-ecommerce</a:t>
-            </a:r>
-            <a:endParaRPr/>
-          </a:p>
-          <a:p>
-            <a:pPr indent="457200" lvl="0" marL="0" rtl="0" algn="l">
-              <a:spcBef>
-                <a:spcPts val="1200"/>
-              </a:spcBef>
-              <a:spcAft>
-                <a:spcPts val="0"/>
-              </a:spcAft>
-              <a:buNone/>
-            </a:pPr>
-            <a:r>
-              <a:rPr lang="en" sz="1100" u="sng">
-                <a:solidFill>
-                  <a:schemeClr val="hlink"/>
-                </a:solidFill>
-                <a:hlinkClick r:id="rId5"/>
-              </a:rPr>
-              <a:t>https://www.kaggle.com/datasets/devarajv88/target-dataset</a:t>
-            </a:r>
-            <a:endParaRPr/>
-          </a:p>
-          <a:p>
-            <a:pPr indent="0" lvl="0" marL="0" rtl="0" algn="l">
-              <a:spcBef>
-                <a:spcPts val="1200"/>
-              </a:spcBef>
-              <a:spcAft>
-                <a:spcPts val="0"/>
-              </a:spcAft>
-              <a:buNone/>
-            </a:pPr>
-            <a:r>
-              <a:rPr lang="en"/>
-              <a:t>Predicting flight delays: </a:t>
-            </a:r>
-            <a:r>
-              <a:rPr lang="en" sz="1100" u="sng">
-                <a:solidFill>
-                  <a:schemeClr val="hlink"/>
-                </a:solidFill>
-                <a:hlinkClick r:id="rId6"/>
-              </a:rPr>
-              <a:t>https://www.kaggle.com/datasets/usdot/flight-delays</a:t>
-            </a:r>
-            <a:endParaRPr/>
-          </a:p>
-          <a:p>
-            <a:pPr indent="0" lvl="0" marL="0" rtl="0" algn="l">
-              <a:spcBef>
-                <a:spcPts val="1200"/>
-              </a:spcBef>
-              <a:spcAft>
-                <a:spcPts val="0"/>
-              </a:spcAft>
-              <a:buNone/>
-            </a:pPr>
-            <a:r>
-              <a:rPr lang="en">
-                <a:highlight>
-                  <a:srgbClr val="FFFF00"/>
-                </a:highlight>
-              </a:rPr>
-              <a:t>Salary prediction:</a:t>
-            </a:r>
-            <a:r>
-              <a:rPr lang="en" sz="1100" u="sng">
-                <a:solidFill>
-                  <a:schemeClr val="hlink"/>
-                </a:solidFill>
-                <a:highlight>
-                  <a:srgbClr val="FFFF00"/>
-                </a:highlight>
-                <a:hlinkClick r:id="rId7"/>
-              </a:rPr>
-              <a:t>https://www.kaggle.com/datasets/thedevastator/jobs-dataset-from-glassdoor/data</a:t>
-            </a:r>
-            <a:endParaRPr>
-              <a:highlight>
-                <a:srgbClr val="FFFF00"/>
-              </a:highlight>
-            </a:endParaRPr>
-          </a:p>
-          <a:p>
-            <a:pPr indent="0" lvl="0" marL="0" rtl="0" algn="l">
-              <a:spcBef>
-                <a:spcPts val="1200"/>
-              </a:spcBef>
-              <a:spcAft>
-                <a:spcPts val="0"/>
-              </a:spcAft>
-              <a:buNone/>
-            </a:pPr>
-            <a:r>
-              <a:rPr lang="en"/>
-              <a:t>Diabetes dataset: </a:t>
-            </a:r>
-            <a:r>
-              <a:rPr lang="en" sz="1100" u="sng">
-                <a:solidFill>
-                  <a:schemeClr val="hlink"/>
-                </a:solidFill>
-                <a:hlinkClick r:id="rId8"/>
-              </a:rPr>
-              <a:t>https://www.kaggle.com/datasets/asinow/diabetes-dataset</a:t>
-            </a:r>
-            <a:endParaRPr/>
-          </a:p>
-          <a:p>
-            <a:pPr indent="0" lvl="0" marL="0" rtl="0" algn="l">
-              <a:spcBef>
-                <a:spcPts val="1200"/>
-              </a:spcBef>
-              <a:spcAft>
-                <a:spcPts val="1200"/>
-              </a:spcAft>
-              <a:buNone/>
-            </a:pPr>
-            <a:r>
-              <a:rPr lang="en"/>
-              <a:t>Exoplanet hunting in deep space: </a:t>
-            </a:r>
-            <a:r>
-              <a:rPr lang="en" sz="1100" u="sng">
-                <a:solidFill>
-                  <a:schemeClr val="hlink"/>
-                </a:solidFill>
-                <a:hlinkClick r:id="rId9"/>
-              </a:rPr>
-              <a:t>https://www.kaggle.com/datasets/keplersmachines/kepler-labelled-time-series-data</a:t>
-            </a:r>
-            <a:endParaRPr/>
-          </a:p>
-        </p:txBody>
-      </p:sp>
-    </p:spTree>
-  </p:cSld>
-  <p:clrMapOvr>
-    <a:masterClrMapping/>
-  </p:clrMapOvr>
-</p:sld>
-</file>
-
-<file path=ppt/slides/slide9.xml><?xml version="1.0" encoding="utf-8"?>
-<p:sld xmlns:a="http://schemas.openxmlformats.org/drawingml/2006/main" xmlns:r="http://schemas.openxmlformats.org/officeDocument/2006/relationships" xmlns:mc="http://schemas.openxmlformats.org/markup-compatibility/2006" xmlns:mv="urn:schemas-microsoft-com:mac:vml" xmlns:p="http://schemas.openxmlformats.org/presentationml/2006/main" xmlns:c="http://schemas.openxmlformats.org/drawingml/2006/chart" xmlns:dgm="http://schemas.openxmlformats.org/drawingml/2006/diagram" xmlns:o="urn:schemas-microsoft-com:office:office" xmlns:v="urn:schemas-microsoft-com:vml" xmlns:pvml="urn:schemas-microsoft-com:office:powerpoint" xmlns:com="http://schemas.openxmlformats.org/drawingml/2006/compatibility" xmlns:p14="http://schemas.microsoft.com/office/powerpoint/2010/main" xmlns:p15="http://schemas.microsoft.com/office/powerpoint/2012/main" xmlns:ahyp="http://schemas.microsoft.com/office/drawing/2018/hyperlinkcolor" show="0">
-  <p:cSld>
-    <p:spTree>
-      <p:nvGrpSpPr>
-        <p:cNvPr id="121" name="Shape 121"/>
-        <p:cNvGrpSpPr/>
-        <p:nvPr/>
-      </p:nvGrpSpPr>
-      <p:grpSpPr>
-        <a:xfrm>
-          <a:off x="0" y="0"/>
-          <a:ext cx="0" cy="0"/>
-          <a:chOff x="0" y="0"/>
-          <a:chExt cx="0" cy="0"/>
-        </a:xfrm>
-      </p:grpSpPr>
-      <p:sp>
-        <p:nvSpPr>
-          <p:cNvPr id="122" name="Google Shape;122;p21"/>
-          <p:cNvSpPr txBox="1"/>
-          <p:nvPr>
-            <p:ph type="title"/>
-          </p:nvPr>
-        </p:nvSpPr>
-        <p:spPr>
-          <a:xfrm>
-            <a:off x="311700" y="0"/>
-            <a:ext cx="8520600" cy="572700"/>
-          </a:xfrm>
-          <a:prstGeom prst="rect">
-            <a:avLst/>
-          </a:prstGeom>
-        </p:spPr>
-        <p:txBody>
-          <a:bodyPr anchorCtr="0" anchor="t" bIns="91425" lIns="91425" spcFirstLastPara="1" rIns="91425" wrap="square" tIns="91425">
-            <a:normAutofit fontScale="90000"/>
-          </a:bodyPr>
-          <a:lstStyle/>
-          <a:p>
-            <a:pPr indent="0" lvl="0" marL="0" rtl="0" algn="l">
-              <a:spcBef>
-                <a:spcPts val="0"/>
-              </a:spcBef>
-              <a:spcAft>
-                <a:spcPts val="0"/>
-              </a:spcAft>
-              <a:buNone/>
-            </a:pPr>
-            <a:r>
-              <a:rPr lang="en"/>
-              <a:t>From his guidelines:</a:t>
-            </a:r>
-            <a:endParaRPr/>
-          </a:p>
-          <a:p>
-            <a:pPr indent="0" lvl="0" marL="0" rtl="0" algn="l">
-              <a:spcBef>
-                <a:spcPts val="0"/>
-              </a:spcBef>
-              <a:spcAft>
-                <a:spcPts val="0"/>
-              </a:spcAft>
-              <a:buNone/>
-            </a:pPr>
-            <a:r>
-              <a:t/>
-            </a:r>
-            <a:endParaRPr/>
-          </a:p>
-        </p:txBody>
-      </p:sp>
-      <p:sp>
-        <p:nvSpPr>
-          <p:cNvPr id="123" name="Google Shape;123;p21"/>
-          <p:cNvSpPr txBox="1"/>
-          <p:nvPr>
-            <p:ph idx="1" type="body"/>
-          </p:nvPr>
-        </p:nvSpPr>
-        <p:spPr>
-          <a:xfrm>
-            <a:off x="311700" y="572700"/>
-            <a:ext cx="8520600" cy="4334400"/>
-          </a:xfrm>
-          <a:prstGeom prst="rect">
-            <a:avLst/>
-          </a:prstGeom>
-        </p:spPr>
-        <p:txBody>
-          <a:bodyPr anchorCtr="0" anchor="t" bIns="91425" lIns="91425" spcFirstLastPara="1" rIns="91425" wrap="square" tIns="91425">
-            <a:normAutofit/>
-          </a:bodyPr>
-          <a:lstStyle/>
-          <a:p>
-            <a:pPr indent="0" lvl="0" marL="0" rtl="0" algn="l">
-              <a:spcBef>
-                <a:spcPts val="0"/>
-              </a:spcBef>
-              <a:spcAft>
-                <a:spcPts val="0"/>
-              </a:spcAft>
-              <a:buClr>
-                <a:schemeClr val="dk1"/>
-              </a:buClr>
-              <a:buSzPts val="1100"/>
-              <a:buFont typeface="Arial"/>
-              <a:buNone/>
-            </a:pPr>
-            <a:r>
-              <a:rPr lang="en" sz="1000">
-                <a:solidFill>
-                  <a:schemeClr val="dk1"/>
-                </a:solidFill>
-              </a:rPr>
-              <a:t>The final project will have the following components:</a:t>
-            </a:r>
-            <a:endParaRPr sz="1000">
-              <a:solidFill>
-                <a:schemeClr val="dk1"/>
-              </a:solidFill>
-            </a:endParaRPr>
-          </a:p>
-          <a:p>
-            <a:pPr indent="-292100" lvl="0" marL="457200" rtl="0" algn="l">
-              <a:spcBef>
-                <a:spcPts val="1100"/>
-              </a:spcBef>
-              <a:spcAft>
-                <a:spcPts val="0"/>
-              </a:spcAft>
-              <a:buClr>
-                <a:schemeClr val="dk1"/>
-              </a:buClr>
-              <a:buSzPts val="1000"/>
-              <a:buChar char="●"/>
-            </a:pPr>
-            <a:r>
-              <a:rPr lang="en" sz="1000">
-                <a:solidFill>
-                  <a:schemeClr val="dk1"/>
-                </a:solidFill>
-              </a:rPr>
-              <a:t>Project Definition where the students will define in detail: </a:t>
-            </a:r>
-            <a:endParaRPr sz="1000">
-              <a:solidFill>
-                <a:schemeClr val="dk1"/>
-              </a:solidFill>
-            </a:endParaRPr>
-          </a:p>
-          <a:p>
-            <a:pPr indent="-292100" lvl="1" marL="927100" rtl="0" algn="l">
-              <a:spcBef>
-                <a:spcPts val="0"/>
-              </a:spcBef>
-              <a:spcAft>
-                <a:spcPts val="0"/>
-              </a:spcAft>
-              <a:buClr>
-                <a:schemeClr val="dk1"/>
-              </a:buClr>
-              <a:buSzPts val="1000"/>
-              <a:buChar char="○"/>
-            </a:pPr>
-            <a:r>
-              <a:rPr lang="en" sz="1000">
-                <a:solidFill>
-                  <a:schemeClr val="dk1"/>
-                </a:solidFill>
-              </a:rPr>
-              <a:t>Scope of the project</a:t>
-            </a:r>
-            <a:endParaRPr sz="1000">
-              <a:solidFill>
-                <a:schemeClr val="dk1"/>
-              </a:solidFill>
-            </a:endParaRPr>
-          </a:p>
-          <a:p>
-            <a:pPr indent="-292100" lvl="1" marL="927100" rtl="0" algn="l">
-              <a:spcBef>
-                <a:spcPts val="0"/>
-              </a:spcBef>
-              <a:spcAft>
-                <a:spcPts val="0"/>
-              </a:spcAft>
-              <a:buClr>
-                <a:schemeClr val="dk1"/>
-              </a:buClr>
-              <a:buSzPts val="1000"/>
-              <a:buChar char="○"/>
-            </a:pPr>
-            <a:r>
-              <a:rPr lang="en" sz="1000">
-                <a:solidFill>
-                  <a:schemeClr val="dk1"/>
-                </a:solidFill>
-              </a:rPr>
-              <a:t>Features that will be implemented</a:t>
-            </a:r>
-            <a:endParaRPr sz="1000">
-              <a:solidFill>
-                <a:schemeClr val="dk1"/>
-              </a:solidFill>
-            </a:endParaRPr>
-          </a:p>
-          <a:p>
-            <a:pPr indent="-292100" lvl="1" marL="927100" rtl="0" algn="l">
-              <a:spcBef>
-                <a:spcPts val="0"/>
-              </a:spcBef>
-              <a:spcAft>
-                <a:spcPts val="0"/>
-              </a:spcAft>
-              <a:buClr>
-                <a:schemeClr val="dk1"/>
-              </a:buClr>
-              <a:buSzPts val="1000"/>
-              <a:buChar char="○"/>
-            </a:pPr>
-            <a:r>
-              <a:rPr lang="en" sz="1000">
-                <a:solidFill>
-                  <a:schemeClr val="dk1"/>
-                </a:solidFill>
-              </a:rPr>
-              <a:t>Data sources (from where you will get the data)</a:t>
-            </a:r>
-            <a:endParaRPr sz="1000">
-              <a:solidFill>
-                <a:schemeClr val="dk1"/>
-              </a:solidFill>
-            </a:endParaRPr>
-          </a:p>
-          <a:p>
-            <a:pPr indent="-292100" lvl="1" marL="927100" rtl="0" algn="l">
-              <a:spcBef>
-                <a:spcPts val="0"/>
-              </a:spcBef>
-              <a:spcAft>
-                <a:spcPts val="0"/>
-              </a:spcAft>
-              <a:buClr>
-                <a:schemeClr val="dk1"/>
-              </a:buClr>
-              <a:buSzPts val="1000"/>
-              <a:buChar char="○"/>
-            </a:pPr>
-            <a:r>
-              <a:rPr lang="en" sz="1000">
-                <a:solidFill>
-                  <a:schemeClr val="dk1"/>
-                </a:solidFill>
-              </a:rPr>
-              <a:t>Expected outcomes</a:t>
-            </a:r>
-            <a:endParaRPr sz="1000">
-              <a:solidFill>
-                <a:schemeClr val="dk1"/>
-              </a:solidFill>
-            </a:endParaRPr>
-          </a:p>
-          <a:p>
-            <a:pPr indent="-292100" lvl="0" marL="457200" rtl="0" algn="l">
-              <a:spcBef>
-                <a:spcPts val="0"/>
-              </a:spcBef>
-              <a:spcAft>
-                <a:spcPts val="0"/>
-              </a:spcAft>
-              <a:buClr>
-                <a:schemeClr val="dk1"/>
-              </a:buClr>
-              <a:buSzPts val="1000"/>
-              <a:buChar char="●"/>
-            </a:pPr>
-            <a:r>
-              <a:rPr lang="en" sz="1000">
-                <a:solidFill>
-                  <a:schemeClr val="dk1"/>
-                </a:solidFill>
-              </a:rPr>
-              <a:t>Project Architecture where the students will define: </a:t>
-            </a:r>
-            <a:endParaRPr sz="1000">
-              <a:solidFill>
-                <a:schemeClr val="dk1"/>
-              </a:solidFill>
-            </a:endParaRPr>
-          </a:p>
-          <a:p>
-            <a:pPr indent="-292100" lvl="1" marL="927100" rtl="0" algn="l">
-              <a:spcBef>
-                <a:spcPts val="0"/>
-              </a:spcBef>
-              <a:spcAft>
-                <a:spcPts val="0"/>
-              </a:spcAft>
-              <a:buClr>
-                <a:schemeClr val="dk1"/>
-              </a:buClr>
-              <a:buSzPts val="1000"/>
-              <a:buChar char="○"/>
-            </a:pPr>
-            <a:r>
-              <a:rPr lang="en" sz="1000">
-                <a:solidFill>
-                  <a:schemeClr val="dk1"/>
-                </a:solidFill>
-              </a:rPr>
-              <a:t>Logical architecture of the project indicating AWS cloud services that will be used and their roles in the architecture</a:t>
-            </a:r>
-            <a:endParaRPr sz="1000">
-              <a:solidFill>
-                <a:schemeClr val="dk1"/>
-              </a:solidFill>
-            </a:endParaRPr>
-          </a:p>
-          <a:p>
-            <a:pPr indent="-292100" lvl="1" marL="927100" rtl="0" algn="l">
-              <a:spcBef>
-                <a:spcPts val="0"/>
-              </a:spcBef>
-              <a:spcAft>
-                <a:spcPts val="0"/>
-              </a:spcAft>
-              <a:buClr>
-                <a:schemeClr val="dk1"/>
-              </a:buClr>
-              <a:buSzPts val="1000"/>
-              <a:buChar char="○"/>
-            </a:pPr>
-            <a:r>
-              <a:rPr lang="en" sz="1000">
-                <a:solidFill>
-                  <a:schemeClr val="dk1"/>
-                </a:solidFill>
-              </a:rPr>
-              <a:t>Data flow indicating how data will be ingested, clean up, processed, and released</a:t>
-            </a:r>
-            <a:endParaRPr sz="1000">
-              <a:solidFill>
-                <a:schemeClr val="dk1"/>
-              </a:solidFill>
-            </a:endParaRPr>
-          </a:p>
-          <a:p>
-            <a:pPr indent="0" lvl="0" marL="0" rtl="0" algn="l">
-              <a:spcBef>
-                <a:spcPts val="1000"/>
-              </a:spcBef>
-              <a:spcAft>
-                <a:spcPts val="0"/>
-              </a:spcAft>
-              <a:buNone/>
-            </a:pPr>
-            <a:r>
-              <a:rPr lang="en" sz="1000">
-                <a:solidFill>
-                  <a:schemeClr val="dk1"/>
-                </a:solidFill>
-              </a:rPr>
-              <a:t>In this assignment, you must develop a presentation containing the following parts:</a:t>
-            </a:r>
-            <a:endParaRPr sz="1000">
-              <a:solidFill>
-                <a:schemeClr val="dk1"/>
-              </a:solidFill>
-            </a:endParaRPr>
-          </a:p>
-          <a:p>
-            <a:pPr indent="-292100" lvl="0" marL="457200" rtl="0" algn="l">
-              <a:spcBef>
-                <a:spcPts val="1100"/>
-              </a:spcBef>
-              <a:spcAft>
-                <a:spcPts val="0"/>
-              </a:spcAft>
-              <a:buClr>
-                <a:schemeClr val="dk1"/>
-              </a:buClr>
-              <a:buSzPts val="1000"/>
-              <a:buChar char="●"/>
-            </a:pPr>
-            <a:r>
-              <a:rPr lang="en" sz="1000">
-                <a:solidFill>
-                  <a:schemeClr val="dk1"/>
-                </a:solidFill>
-                <a:highlight>
-                  <a:srgbClr val="FFFFFF"/>
-                </a:highlight>
-              </a:rPr>
-              <a:t>Project Definition: What are you going to develop? As described in the Syllabus you must describe:</a:t>
-            </a:r>
-            <a:endParaRPr sz="1000">
-              <a:solidFill>
-                <a:schemeClr val="dk1"/>
-              </a:solidFill>
-              <a:highlight>
-                <a:srgbClr val="FFFFFF"/>
-              </a:highlight>
-            </a:endParaRPr>
-          </a:p>
-          <a:p>
-            <a:pPr indent="-292100" lvl="0" marL="457200" rtl="0" algn="l">
-              <a:spcBef>
-                <a:spcPts val="0"/>
-              </a:spcBef>
-              <a:spcAft>
-                <a:spcPts val="0"/>
-              </a:spcAft>
-              <a:buClr>
-                <a:schemeClr val="dk1"/>
-              </a:buClr>
-              <a:buSzPts val="1000"/>
-              <a:buChar char="●"/>
-            </a:pPr>
-            <a:r>
-              <a:rPr lang="en" sz="1000">
-                <a:solidFill>
-                  <a:schemeClr val="dk1"/>
-                </a:solidFill>
-                <a:highlight>
-                  <a:srgbClr val="FFFFFF"/>
-                </a:highlight>
-              </a:rPr>
-              <a:t>Scope of your project</a:t>
-            </a:r>
-            <a:endParaRPr sz="1000">
-              <a:solidFill>
-                <a:schemeClr val="dk1"/>
-              </a:solidFill>
-              <a:highlight>
-                <a:srgbClr val="FFFFFF"/>
-              </a:highlight>
-            </a:endParaRPr>
-          </a:p>
-          <a:p>
-            <a:pPr indent="-292100" lvl="0" marL="457200" rtl="0" algn="l">
-              <a:spcBef>
-                <a:spcPts val="0"/>
-              </a:spcBef>
-              <a:spcAft>
-                <a:spcPts val="0"/>
-              </a:spcAft>
-              <a:buClr>
-                <a:schemeClr val="dk1"/>
-              </a:buClr>
-              <a:buSzPts val="1000"/>
-              <a:buChar char="●"/>
-            </a:pPr>
-            <a:r>
-              <a:rPr lang="en" sz="1000">
-                <a:solidFill>
-                  <a:schemeClr val="dk1"/>
-                </a:solidFill>
-                <a:highlight>
-                  <a:srgbClr val="FFFFFF"/>
-                </a:highlight>
-              </a:rPr>
-              <a:t>Features that will be implemented</a:t>
-            </a:r>
-            <a:endParaRPr sz="1000">
-              <a:solidFill>
-                <a:schemeClr val="dk1"/>
-              </a:solidFill>
-              <a:highlight>
-                <a:srgbClr val="FFFFFF"/>
-              </a:highlight>
-            </a:endParaRPr>
-          </a:p>
-          <a:p>
-            <a:pPr indent="-292100" lvl="0" marL="457200" rtl="0" algn="l">
-              <a:spcBef>
-                <a:spcPts val="0"/>
-              </a:spcBef>
-              <a:spcAft>
-                <a:spcPts val="0"/>
-              </a:spcAft>
-              <a:buClr>
-                <a:schemeClr val="dk1"/>
-              </a:buClr>
-              <a:buSzPts val="1000"/>
-              <a:buChar char="●"/>
-            </a:pPr>
-            <a:r>
-              <a:rPr lang="en" sz="1000">
-                <a:solidFill>
-                  <a:schemeClr val="dk1"/>
-                </a:solidFill>
-                <a:highlight>
-                  <a:srgbClr val="FFFFFF"/>
-                </a:highlight>
-              </a:rPr>
-              <a:t>Data sources that you will use</a:t>
-            </a:r>
-            <a:endParaRPr sz="1000">
-              <a:solidFill>
-                <a:schemeClr val="dk1"/>
-              </a:solidFill>
-              <a:highlight>
-                <a:srgbClr val="FFFFFF"/>
-              </a:highlight>
-            </a:endParaRPr>
-          </a:p>
-          <a:p>
-            <a:pPr indent="-292100" lvl="0" marL="457200" rtl="0" algn="l">
-              <a:spcBef>
-                <a:spcPts val="0"/>
-              </a:spcBef>
-              <a:spcAft>
-                <a:spcPts val="0"/>
-              </a:spcAft>
-              <a:buClr>
-                <a:schemeClr val="dk1"/>
-              </a:buClr>
-              <a:buSzPts val="1000"/>
-              <a:buChar char="●"/>
-            </a:pPr>
-            <a:r>
-              <a:rPr lang="en" sz="1000">
-                <a:solidFill>
-                  <a:schemeClr val="dk1"/>
-                </a:solidFill>
-                <a:highlight>
-                  <a:srgbClr val="FFFFFF"/>
-                </a:highlight>
-              </a:rPr>
-              <a:t>Expected Outcomes</a:t>
-            </a:r>
-            <a:endParaRPr sz="1000">
-              <a:solidFill>
-                <a:schemeClr val="dk1"/>
-              </a:solidFill>
-              <a:highlight>
-                <a:srgbClr val="FFFFFF"/>
-              </a:highlight>
-            </a:endParaRPr>
-          </a:p>
-          <a:p>
-            <a:pPr indent="-292100" lvl="0" marL="457200" rtl="0" algn="l">
-              <a:spcBef>
-                <a:spcPts val="0"/>
-              </a:spcBef>
-              <a:spcAft>
-                <a:spcPts val="0"/>
-              </a:spcAft>
-              <a:buClr>
-                <a:schemeClr val="dk1"/>
-              </a:buClr>
-              <a:buSzPts val="1000"/>
-              <a:buChar char="●"/>
-            </a:pPr>
-            <a:r>
-              <a:rPr lang="en" sz="1000">
-                <a:solidFill>
-                  <a:schemeClr val="dk1"/>
-                </a:solidFill>
-              </a:rPr>
-              <a:t>Project Architecture (what cloud components you will use and how they will be "wired")</a:t>
-            </a:r>
-            <a:endParaRPr sz="1000">
-              <a:solidFill>
-                <a:schemeClr val="dk1"/>
-              </a:solidFill>
-            </a:endParaRPr>
-          </a:p>
-          <a:p>
-            <a:pPr indent="-292100" lvl="0" marL="457200" rtl="0" algn="l">
-              <a:spcBef>
-                <a:spcPts val="0"/>
-              </a:spcBef>
-              <a:spcAft>
-                <a:spcPts val="0"/>
-              </a:spcAft>
-              <a:buClr>
-                <a:schemeClr val="dk1"/>
-              </a:buClr>
-              <a:buSzPts val="1000"/>
-              <a:buChar char="●"/>
-            </a:pPr>
-            <a:r>
-              <a:rPr lang="en" sz="1000">
-                <a:solidFill>
-                  <a:schemeClr val="dk1"/>
-                </a:solidFill>
-              </a:rPr>
-              <a:t>Logical architecture indicating AWS cloud services that you will use (e.g., Region, AZs, VPC(s), EC2(s), S3(s), RDS(s), etc.</a:t>
-            </a:r>
-            <a:endParaRPr sz="1000">
-              <a:solidFill>
-                <a:schemeClr val="dk1"/>
-              </a:solidFill>
-            </a:endParaRPr>
-          </a:p>
-          <a:p>
-            <a:pPr indent="-292100" lvl="0" marL="457200" rtl="0" algn="l">
-              <a:spcBef>
-                <a:spcPts val="0"/>
-              </a:spcBef>
-              <a:spcAft>
-                <a:spcPts val="0"/>
-              </a:spcAft>
-              <a:buClr>
-                <a:schemeClr val="dk1"/>
-              </a:buClr>
-              <a:buSzPts val="1000"/>
-              <a:buChar char="●"/>
-            </a:pPr>
-            <a:r>
-              <a:rPr lang="en" sz="1000">
-                <a:solidFill>
-                  <a:schemeClr val="dk1"/>
-                </a:solidFill>
-              </a:rPr>
-              <a:t>Data flow indicating how the data will be ingested, clean up, processed, and release</a:t>
-            </a:r>
-            <a:endParaRPr sz="1000">
-              <a:solidFill>
-                <a:schemeClr val="dk1"/>
-              </a:solidFill>
-            </a:endParaRPr>
-          </a:p>
-          <a:p>
-            <a:pPr indent="0" lvl="0" marL="0" rtl="0" algn="l">
-              <a:spcBef>
-                <a:spcPts val="1000"/>
-              </a:spcBef>
-              <a:spcAft>
-                <a:spcPts val="1100"/>
-              </a:spcAft>
-              <a:buNone/>
-            </a:pPr>
-            <a:r>
-              <a:rPr lang="en" sz="1100">
-                <a:solidFill>
-                  <a:schemeClr val="dk1"/>
-                </a:solidFill>
-              </a:rPr>
-              <a:t>You should submit a </a:t>
-            </a:r>
-            <a:r>
-              <a:rPr b="1" lang="en" sz="1000">
-                <a:solidFill>
-                  <a:schemeClr val="dk1"/>
-                </a:solidFill>
-              </a:rPr>
-              <a:t>video</a:t>
-            </a:r>
-            <a:r>
-              <a:rPr lang="en" sz="1100">
-                <a:solidFill>
-                  <a:schemeClr val="dk1"/>
-                </a:solidFill>
-              </a:rPr>
-              <a:t> presentation from 5 to 15 min. You must also submit a powerpoint presentation: I would not recommend to have more than 7 slides.</a:t>
-            </a:r>
-            <a:endParaRPr sz="1000">
-              <a:solidFill>
-                <a:schemeClr val="dk1"/>
-              </a:solidFill>
-            </a:endParaRPr>
-          </a:p>
-        </p:txBody>
-      </p:sp>
+        </p:nvGraphicFramePr>
+        <p:xfrm>
+          <a:off x="1345770" y="3887384"/>
+          <a:ext cx="6096000" cy="1112520"/>
+        </p:xfrm>
+        <a:graphic>
+          <a:graphicData uri="http://schemas.openxmlformats.org/drawingml/2006/table">
+            <a:tbl>
+              <a:tblPr firstRow="1" bandRow="1">
+                <a:tableStyleId>{3B4B98B0-60AC-42C2-AFA5-B58CD77FA1E5}</a:tableStyleId>
+              </a:tblPr>
+              <a:tblGrid>
+                <a:gridCol w="1524000">
+                  <a:extLst>
+                    <a:ext uri="{9D8B030D-6E8A-4147-A177-3AD203B41FA5}">
+                      <a16:colId xmlns:a16="http://schemas.microsoft.com/office/drawing/2014/main" val="409947259"/>
+                    </a:ext>
+                  </a:extLst>
+                </a:gridCol>
+                <a:gridCol w="1524000">
+                  <a:extLst>
+                    <a:ext uri="{9D8B030D-6E8A-4147-A177-3AD203B41FA5}">
+                      <a16:colId xmlns:a16="http://schemas.microsoft.com/office/drawing/2014/main" val="3498020390"/>
+                    </a:ext>
+                  </a:extLst>
+                </a:gridCol>
+                <a:gridCol w="1524000">
+                  <a:extLst>
+                    <a:ext uri="{9D8B030D-6E8A-4147-A177-3AD203B41FA5}">
+                      <a16:colId xmlns:a16="http://schemas.microsoft.com/office/drawing/2014/main" val="549818684"/>
+                    </a:ext>
+                  </a:extLst>
+                </a:gridCol>
+                <a:gridCol w="1524000">
+                  <a:extLst>
+                    <a:ext uri="{9D8B030D-6E8A-4147-A177-3AD203B41FA5}">
+                      <a16:colId xmlns:a16="http://schemas.microsoft.com/office/drawing/2014/main" val="3148706550"/>
+                    </a:ext>
+                  </a:extLst>
+                </a:gridCol>
+              </a:tblGrid>
+              <a:tr h="370840">
+                <a:tc>
+                  <a:txBody>
+                    <a:bodyPr/>
+                    <a:lstStyle/>
+                    <a:p>
+                      <a:pPr algn="ctr"/>
+                      <a:r>
+                        <a:rPr lang="en-US" dirty="0"/>
+                        <a:t>Contains AWS</a:t>
+                      </a:r>
+                    </a:p>
+                  </a:txBody>
+                  <a:tcPr/>
+                </a:tc>
+                <a:tc>
+                  <a:txBody>
+                    <a:bodyPr/>
+                    <a:lstStyle/>
+                    <a:p>
+                      <a:pPr algn="ctr"/>
+                      <a:r>
+                        <a:rPr lang="en-US" dirty="0"/>
+                        <a:t>Min Salary</a:t>
+                      </a:r>
+                    </a:p>
+                  </a:txBody>
+                  <a:tcPr/>
+                </a:tc>
+                <a:tc>
+                  <a:txBody>
+                    <a:bodyPr/>
+                    <a:lstStyle/>
+                    <a:p>
+                      <a:pPr algn="ctr"/>
+                      <a:r>
+                        <a:rPr lang="en-US" dirty="0"/>
+                        <a:t>Avg. Salary</a:t>
+                      </a:r>
+                    </a:p>
+                  </a:txBody>
+                  <a:tcPr/>
+                </a:tc>
+                <a:tc>
+                  <a:txBody>
+                    <a:bodyPr/>
+                    <a:lstStyle/>
+                    <a:p>
+                      <a:pPr algn="ctr"/>
+                      <a:r>
+                        <a:rPr lang="en-US" dirty="0"/>
+                        <a:t>Max Salary</a:t>
+                      </a:r>
+                    </a:p>
+                  </a:txBody>
+                  <a:tcPr/>
+                </a:tc>
+                <a:extLst>
+                  <a:ext uri="{0D108BD9-81ED-4DB2-BD59-A6C34878D82A}">
+                    <a16:rowId xmlns:a16="http://schemas.microsoft.com/office/drawing/2014/main" val="218252679"/>
+                  </a:ext>
+                </a:extLst>
+              </a:tr>
+              <a:tr h="370840">
+                <a:tc>
+                  <a:txBody>
+                    <a:bodyPr/>
+                    <a:lstStyle/>
+                    <a:p>
+                      <a:pPr algn="ctr"/>
+                      <a:r>
+                        <a:rPr lang="en-US" dirty="0"/>
+                        <a:t>True</a:t>
+                      </a:r>
+                    </a:p>
+                  </a:txBody>
+                  <a:tcPr/>
+                </a:tc>
+                <a:tc>
+                  <a:txBody>
+                    <a:bodyPr/>
+                    <a:lstStyle/>
+                    <a:p>
+                      <a:pPr algn="ctr"/>
+                      <a:r>
+                        <a:rPr lang="en-US" dirty="0"/>
+                        <a:t>$86K</a:t>
+                      </a:r>
+                    </a:p>
+                  </a:txBody>
+                  <a:tcPr/>
+                </a:tc>
+                <a:tc>
+                  <a:txBody>
+                    <a:bodyPr/>
+                    <a:lstStyle/>
+                    <a:p>
+                      <a:pPr algn="ctr"/>
+                      <a:r>
+                        <a:rPr lang="en-US" dirty="0"/>
+                        <a:t>$116K</a:t>
+                      </a:r>
+                    </a:p>
+                  </a:txBody>
+                  <a:tcPr/>
+                </a:tc>
+                <a:tc>
+                  <a:txBody>
+                    <a:bodyPr/>
+                    <a:lstStyle/>
+                    <a:p>
+                      <a:pPr algn="ctr"/>
+                      <a:r>
+                        <a:rPr lang="en-US" dirty="0"/>
+                        <a:t>$146K</a:t>
+                      </a:r>
+                    </a:p>
+                  </a:txBody>
+                  <a:tcPr/>
+                </a:tc>
+                <a:extLst>
+                  <a:ext uri="{0D108BD9-81ED-4DB2-BD59-A6C34878D82A}">
+                    <a16:rowId xmlns:a16="http://schemas.microsoft.com/office/drawing/2014/main" val="721092799"/>
+                  </a:ext>
+                </a:extLst>
+              </a:tr>
+              <a:tr h="370840">
+                <a:tc>
+                  <a:txBody>
+                    <a:bodyPr/>
+                    <a:lstStyle/>
+                    <a:p>
+                      <a:pPr algn="ctr"/>
+                      <a:r>
+                        <a:rPr lang="en-US" dirty="0"/>
+                        <a:t>False</a:t>
+                      </a:r>
+                    </a:p>
+                  </a:txBody>
+                  <a:tcPr/>
+                </a:tc>
+                <a:tc>
+                  <a:txBody>
+                    <a:bodyPr/>
+                    <a:lstStyle/>
+                    <a:p>
+                      <a:pPr algn="ctr"/>
+                      <a:r>
+                        <a:rPr lang="en-US" dirty="0"/>
+                        <a:t>$73K</a:t>
+                      </a:r>
+                    </a:p>
+                  </a:txBody>
+                  <a:tcPr/>
+                </a:tc>
+                <a:tc>
+                  <a:txBody>
+                    <a:bodyPr/>
+                    <a:lstStyle/>
+                    <a:p>
+                      <a:pPr algn="ctr"/>
+                      <a:r>
+                        <a:rPr lang="en-US" dirty="0"/>
+                        <a:t>$98K</a:t>
+                      </a:r>
+                    </a:p>
+                  </a:txBody>
+                  <a:tcPr/>
+                </a:tc>
+                <a:tc>
+                  <a:txBody>
+                    <a:bodyPr/>
+                    <a:lstStyle/>
+                    <a:p>
+                      <a:pPr algn="ctr"/>
+                      <a:r>
+                        <a:rPr lang="en-US" dirty="0"/>
+                        <a:t>$125K</a:t>
+                      </a:r>
+                    </a:p>
+                  </a:txBody>
+                  <a:tcPr/>
+                </a:tc>
+                <a:extLst>
+                  <a:ext uri="{0D108BD9-81ED-4DB2-BD59-A6C34878D82A}">
+                    <a16:rowId xmlns:a16="http://schemas.microsoft.com/office/drawing/2014/main" val="29974274"/>
+                  </a:ext>
+                </a:extLst>
+              </a:tr>
+            </a:tbl>
+          </a:graphicData>
+        </a:graphic>
+      </p:graphicFrame>
     </p:spTree>
   </p:cSld>
   <p:clrMapOvr>
@@ -9856,7 +8728,288 @@
 </file>
 
 <file path=ppt/theme/theme1.xml><?xml version="1.0" encoding="utf-8"?>
-<a:theme xmlns:a="http://schemas.openxmlformats.org/drawingml/2006/main" xmlns:r="http://schemas.openxmlformats.org/officeDocument/2006/relationships">
+<a:theme xmlns:a="http://schemas.openxmlformats.org/drawingml/2006/main" name="Simple Light">
+  <a:themeElements>
+    <a:clrScheme name="Simple Light">
+      <a:dk1>
+        <a:srgbClr val="000000"/>
+      </a:dk1>
+      <a:lt1>
+        <a:srgbClr val="FFFFFF"/>
+      </a:lt1>
+      <a:dk2>
+        <a:srgbClr val="595959"/>
+      </a:dk2>
+      <a:lt2>
+        <a:srgbClr val="EEEEEE"/>
+      </a:lt2>
+      <a:accent1>
+        <a:srgbClr val="4285F4"/>
+      </a:accent1>
+      <a:accent2>
+        <a:srgbClr val="212121"/>
+      </a:accent2>
+      <a:accent3>
+        <a:srgbClr val="78909C"/>
+      </a:accent3>
+      <a:accent4>
+        <a:srgbClr val="FFAB40"/>
+      </a:accent4>
+      <a:accent5>
+        <a:srgbClr val="0097A7"/>
+      </a:accent5>
+      <a:accent6>
+        <a:srgbClr val="EEFF41"/>
+      </a:accent6>
+      <a:hlink>
+        <a:srgbClr val="0097A7"/>
+      </a:hlink>
+      <a:folHlink>
+        <a:srgbClr val="0097A7"/>
+      </a:folHlink>
+    </a:clrScheme>
+    <a:fontScheme name="Office">
+      <a:majorFont>
+        <a:latin typeface="Arial"/>
+        <a:ea typeface=""/>
+        <a:cs typeface=""/>
+        <a:font script="Jpan" typeface="ＭＳ Ｐゴシック"/>
+        <a:font script="Hang" typeface="맑은 고딕"/>
+        <a:font script="Hans" typeface="宋体"/>
+        <a:font script="Hant" typeface="新細明體"/>
+        <a:font script="Arab" typeface="Times New Roman"/>
+        <a:font script="Hebr" typeface="Times New Roman"/>
+        <a:font script="Thai" typeface="Angsana New"/>
+        <a:font script="Ethi" typeface="Nyala"/>
+        <a:font script="Beng" typeface="Vrinda"/>
+        <a:font script="Gujr" typeface="Shruti"/>
+        <a:font script="Khmr" typeface="MoolBoran"/>
+        <a:font script="Knda" typeface="Tunga"/>
+        <a:font script="Guru" typeface="Raavi"/>
+        <a:font script="Cans" typeface="Euphemia"/>
+        <a:font script="Cher" typeface="Plantagenet Cherokee"/>
+        <a:font script="Yiii" typeface="Microsoft Yi Baiti"/>
+        <a:font script="Tibt" typeface="Microsoft Himalaya"/>
+        <a:font script="Thaa" typeface="MV Boli"/>
+        <a:font script="Deva" typeface="Mangal"/>
+        <a:font script="Telu" typeface="Gautami"/>
+        <a:font script="Taml" typeface="Latha"/>
+        <a:font script="Syrc" typeface="Estrangelo Edessa"/>
+        <a:font script="Orya" typeface="Kalinga"/>
+        <a:font script="Mlym" typeface="Kartika"/>
+        <a:font script="Laoo" typeface="DokChampa"/>
+        <a:font script="Sinh" typeface="Iskoola Pota"/>
+        <a:font script="Mong" typeface="Mongolian Baiti"/>
+        <a:font script="Viet" typeface="Times New Roman"/>
+        <a:font script="Uigh" typeface="Microsoft Uighur"/>
+        <a:font script="Geor" typeface="Sylfaen"/>
+      </a:majorFont>
+      <a:minorFont>
+        <a:latin typeface="Arial"/>
+        <a:ea typeface=""/>
+        <a:cs typeface=""/>
+        <a:font script="Jpan" typeface="ＭＳ Ｐゴシック"/>
+        <a:font script="Hang" typeface="맑은 고딕"/>
+        <a:font script="Hans" typeface="宋体"/>
+        <a:font script="Hant" typeface="新細明體"/>
+        <a:font script="Arab" typeface="Arial"/>
+        <a:font script="Hebr" typeface="Arial"/>
+        <a:font script="Thai" typeface="Cordia New"/>
+        <a:font script="Ethi" typeface="Nyala"/>
+        <a:font script="Beng" typeface="Vrinda"/>
+        <a:font script="Gujr" typeface="Shruti"/>
+        <a:font script="Khmr" typeface="DaunPenh"/>
+        <a:font script="Knda" typeface="Tunga"/>
+        <a:font script="Guru" typeface="Raavi"/>
+        <a:font script="Cans" typeface="Euphemia"/>
+        <a:font script="Cher" typeface="Plantagenet Cherokee"/>
+        <a:font script="Yiii" typeface="Microsoft Yi Baiti"/>
+        <a:font script="Tibt" typeface="Microsoft Himalaya"/>
+        <a:font script="Thaa" typeface="MV Boli"/>
+        <a:font script="Deva" typeface="Mangal"/>
+        <a:font script="Telu" typeface="Gautami"/>
+        <a:font script="Taml" typeface="Latha"/>
+        <a:font script="Syrc" typeface="Estrangelo Edessa"/>
+        <a:font script="Orya" typeface="Kalinga"/>
+        <a:font script="Mlym" typeface="Kartika"/>
+        <a:font script="Laoo" typeface="DokChampa"/>
+        <a:font script="Sinh" typeface="Iskoola Pota"/>
+        <a:font script="Mong" typeface="Mongolian Baiti"/>
+        <a:font script="Viet" typeface="Arial"/>
+        <a:font script="Uigh" typeface="Microsoft Uighur"/>
+        <a:font script="Geor" typeface="Sylfaen"/>
+      </a:minorFont>
+    </a:fontScheme>
+    <a:fmtScheme name="Office">
+      <a:fillStyleLst>
+        <a:solidFill>
+          <a:schemeClr val="phClr"/>
+        </a:solidFill>
+        <a:gradFill rotWithShape="1">
+          <a:gsLst>
+            <a:gs pos="0">
+              <a:schemeClr val="phClr">
+                <a:tint val="50000"/>
+                <a:satMod val="300000"/>
+              </a:schemeClr>
+            </a:gs>
+            <a:gs pos="35000">
+              <a:schemeClr val="phClr">
+                <a:tint val="37000"/>
+                <a:satMod val="300000"/>
+              </a:schemeClr>
+            </a:gs>
+            <a:gs pos="100000">
+              <a:schemeClr val="phClr">
+                <a:tint val="15000"/>
+                <a:satMod val="350000"/>
+              </a:schemeClr>
+            </a:gs>
+          </a:gsLst>
+          <a:lin ang="16200000" scaled="1"/>
+        </a:gradFill>
+        <a:gradFill rotWithShape="1">
+          <a:gsLst>
+            <a:gs pos="0">
+              <a:schemeClr val="phClr">
+                <a:tint val="100000"/>
+                <a:shade val="100000"/>
+                <a:satMod val="130000"/>
+              </a:schemeClr>
+            </a:gs>
+            <a:gs pos="100000">
+              <a:schemeClr val="phClr">
+                <a:tint val="50000"/>
+                <a:shade val="100000"/>
+                <a:satMod val="350000"/>
+              </a:schemeClr>
+            </a:gs>
+          </a:gsLst>
+          <a:lin ang="16200000" scaled="0"/>
+        </a:gradFill>
+      </a:fillStyleLst>
+      <a:lnStyleLst>
+        <a:ln w="9525" cap="flat" cmpd="sng" algn="ctr">
+          <a:solidFill>
+            <a:schemeClr val="phClr">
+              <a:shade val="95000"/>
+              <a:satMod val="105000"/>
+            </a:schemeClr>
+          </a:solidFill>
+          <a:prstDash val="solid"/>
+        </a:ln>
+        <a:ln w="25400" cap="flat" cmpd="sng" algn="ctr">
+          <a:solidFill>
+            <a:schemeClr val="phClr"/>
+          </a:solidFill>
+          <a:prstDash val="solid"/>
+        </a:ln>
+        <a:ln w="38100" cap="flat" cmpd="sng" algn="ctr">
+          <a:solidFill>
+            <a:schemeClr val="phClr"/>
+          </a:solidFill>
+          <a:prstDash val="solid"/>
+        </a:ln>
+      </a:lnStyleLst>
+      <a:effectStyleLst>
+        <a:effectStyle>
+          <a:effectLst>
+            <a:outerShdw blurRad="40000" dist="20000" dir="5400000" rotWithShape="0">
+              <a:srgbClr val="000000">
+                <a:alpha val="38000"/>
+              </a:srgbClr>
+            </a:outerShdw>
+          </a:effectLst>
+        </a:effectStyle>
+        <a:effectStyle>
+          <a:effectLst>
+            <a:outerShdw blurRad="40000" dist="23000" dir="5400000" rotWithShape="0">
+              <a:srgbClr val="000000">
+                <a:alpha val="35000"/>
+              </a:srgbClr>
+            </a:outerShdw>
+          </a:effectLst>
+        </a:effectStyle>
+        <a:effectStyle>
+          <a:effectLst>
+            <a:outerShdw blurRad="40000" dist="23000" dir="5400000" rotWithShape="0">
+              <a:srgbClr val="000000">
+                <a:alpha val="35000"/>
+              </a:srgbClr>
+            </a:outerShdw>
+          </a:effectLst>
+          <a:scene3d>
+            <a:camera prst="orthographicFront">
+              <a:rot lat="0" lon="0" rev="0"/>
+            </a:camera>
+            <a:lightRig rig="threePt" dir="t">
+              <a:rot lat="0" lon="0" rev="1200000"/>
+            </a:lightRig>
+          </a:scene3d>
+          <a:sp3d>
+            <a:bevelT w="63500" h="25400"/>
+          </a:sp3d>
+        </a:effectStyle>
+      </a:effectStyleLst>
+      <a:bgFillStyleLst>
+        <a:solidFill>
+          <a:schemeClr val="phClr"/>
+        </a:solidFill>
+        <a:gradFill rotWithShape="1">
+          <a:gsLst>
+            <a:gs pos="0">
+              <a:schemeClr val="phClr">
+                <a:tint val="40000"/>
+                <a:satMod val="350000"/>
+              </a:schemeClr>
+            </a:gs>
+            <a:gs pos="40000">
+              <a:schemeClr val="phClr">
+                <a:tint val="45000"/>
+                <a:shade val="99000"/>
+                <a:satMod val="350000"/>
+              </a:schemeClr>
+            </a:gs>
+            <a:gs pos="100000">
+              <a:schemeClr val="phClr">
+                <a:shade val="20000"/>
+                <a:satMod val="255000"/>
+              </a:schemeClr>
+            </a:gs>
+          </a:gsLst>
+          <a:path path="circle">
+            <a:fillToRect l="50000" t="-80000" r="50000" b="180000"/>
+          </a:path>
+        </a:gradFill>
+        <a:gradFill rotWithShape="1">
+          <a:gsLst>
+            <a:gs pos="0">
+              <a:schemeClr val="phClr">
+                <a:tint val="80000"/>
+                <a:satMod val="300000"/>
+              </a:schemeClr>
+            </a:gs>
+            <a:gs pos="100000">
+              <a:schemeClr val="phClr">
+                <a:shade val="30000"/>
+                <a:satMod val="200000"/>
+              </a:schemeClr>
+            </a:gs>
+          </a:gsLst>
+          <a:path path="circle">
+            <a:fillToRect l="50000" t="50000" r="50000" b="50000"/>
+          </a:path>
+        </a:gradFill>
+      </a:bgFillStyleLst>
+    </a:fmtScheme>
+  </a:themeElements>
+  <a:objectDefaults/>
+  <a:extraClrSchemeLst/>
+</a:theme>
+</file>
+
+<file path=ppt/theme/theme2.xml><?xml version="1.0" encoding="utf-8"?>
+<a:theme xmlns:a="http://schemas.openxmlformats.org/drawingml/2006/main">
   <a:themeElements>
     <a:clrScheme name="Default">
       <a:dk1>
@@ -10131,284 +9284,7 @@
       </a:bgFillStyleLst>
     </a:fmtScheme>
   </a:themeElements>
-</a:theme>
-</file>
-
-<file path=ppt/theme/theme2.xml><?xml version="1.0" encoding="utf-8"?>
-<a:theme xmlns:a="http://schemas.openxmlformats.org/drawingml/2006/main" xmlns:r="http://schemas.openxmlformats.org/officeDocument/2006/relationships" name="Simple Light">
-  <a:themeElements>
-    <a:clrScheme name="Simple Light">
-      <a:dk1>
-        <a:srgbClr val="000000"/>
-      </a:dk1>
-      <a:lt1>
-        <a:srgbClr val="FFFFFF"/>
-      </a:lt1>
-      <a:dk2>
-        <a:srgbClr val="595959"/>
-      </a:dk2>
-      <a:lt2>
-        <a:srgbClr val="EEEEEE"/>
-      </a:lt2>
-      <a:accent1>
-        <a:srgbClr val="4285F4"/>
-      </a:accent1>
-      <a:accent2>
-        <a:srgbClr val="212121"/>
-      </a:accent2>
-      <a:accent3>
-        <a:srgbClr val="78909C"/>
-      </a:accent3>
-      <a:accent4>
-        <a:srgbClr val="FFAB40"/>
-      </a:accent4>
-      <a:accent5>
-        <a:srgbClr val="0097A7"/>
-      </a:accent5>
-      <a:accent6>
-        <a:srgbClr val="EEFF41"/>
-      </a:accent6>
-      <a:hlink>
-        <a:srgbClr val="0097A7"/>
-      </a:hlink>
-      <a:folHlink>
-        <a:srgbClr val="0097A7"/>
-      </a:folHlink>
-    </a:clrScheme>
-    <a:fontScheme name="Office">
-      <a:majorFont>
-        <a:latin typeface="Arial"/>
-        <a:ea typeface=""/>
-        <a:cs typeface=""/>
-        <a:font script="Jpan" typeface="ＭＳ Ｐゴシック"/>
-        <a:font script="Hang" typeface="맑은 고딕"/>
-        <a:font script="Hans" typeface="宋体"/>
-        <a:font script="Hant" typeface="新細明體"/>
-        <a:font script="Arab" typeface="Times New Roman"/>
-        <a:font script="Hebr" typeface="Times New Roman"/>
-        <a:font script="Thai" typeface="Angsana New"/>
-        <a:font script="Ethi" typeface="Nyala"/>
-        <a:font script="Beng" typeface="Vrinda"/>
-        <a:font script="Gujr" typeface="Shruti"/>
-        <a:font script="Khmr" typeface="MoolBoran"/>
-        <a:font script="Knda" typeface="Tunga"/>
-        <a:font script="Guru" typeface="Raavi"/>
-        <a:font script="Cans" typeface="Euphemia"/>
-        <a:font script="Cher" typeface="Plantagenet Cherokee"/>
-        <a:font script="Yiii" typeface="Microsoft Yi Baiti"/>
-        <a:font script="Tibt" typeface="Microsoft Himalaya"/>
-        <a:font script="Thaa" typeface="MV Boli"/>
-        <a:font script="Deva" typeface="Mangal"/>
-        <a:font script="Telu" typeface="Gautami"/>
-        <a:font script="Taml" typeface="Latha"/>
-        <a:font script="Syrc" typeface="Estrangelo Edessa"/>
-        <a:font script="Orya" typeface="Kalinga"/>
-        <a:font script="Mlym" typeface="Kartika"/>
-        <a:font script="Laoo" typeface="DokChampa"/>
-        <a:font script="Sinh" typeface="Iskoola Pota"/>
-        <a:font script="Mong" typeface="Mongolian Baiti"/>
-        <a:font script="Viet" typeface="Times New Roman"/>
-        <a:font script="Uigh" typeface="Microsoft Uighur"/>
-        <a:font script="Geor" typeface="Sylfaen"/>
-      </a:majorFont>
-      <a:minorFont>
-        <a:latin typeface="Arial"/>
-        <a:ea typeface=""/>
-        <a:cs typeface=""/>
-        <a:font script="Jpan" typeface="ＭＳ Ｐゴシック"/>
-        <a:font script="Hang" typeface="맑은 고딕"/>
-        <a:font script="Hans" typeface="宋体"/>
-        <a:font script="Hant" typeface="新細明體"/>
-        <a:font script="Arab" typeface="Arial"/>
-        <a:font script="Hebr" typeface="Arial"/>
-        <a:font script="Thai" typeface="Cordia New"/>
-        <a:font script="Ethi" typeface="Nyala"/>
-        <a:font script="Beng" typeface="Vrinda"/>
-        <a:font script="Gujr" typeface="Shruti"/>
-        <a:font script="Khmr" typeface="DaunPenh"/>
-        <a:font script="Knda" typeface="Tunga"/>
-        <a:font script="Guru" typeface="Raavi"/>
-        <a:font script="Cans" typeface="Euphemia"/>
-        <a:font script="Cher" typeface="Plantagenet Cherokee"/>
-        <a:font script="Yiii" typeface="Microsoft Yi Baiti"/>
-        <a:font script="Tibt" typeface="Microsoft Himalaya"/>
-        <a:font script="Thaa" typeface="MV Boli"/>
-        <a:font script="Deva" typeface="Mangal"/>
-        <a:font script="Telu" typeface="Gautami"/>
-        <a:font script="Taml" typeface="Latha"/>
-        <a:font script="Syrc" typeface="Estrangelo Edessa"/>
-        <a:font script="Orya" typeface="Kalinga"/>
-        <a:font script="Mlym" typeface="Kartika"/>
-        <a:font script="Laoo" typeface="DokChampa"/>
-        <a:font script="Sinh" typeface="Iskoola Pota"/>
-        <a:font script="Mong" typeface="Mongolian Baiti"/>
-        <a:font script="Viet" typeface="Arial"/>
-        <a:font script="Uigh" typeface="Microsoft Uighur"/>
-        <a:font script="Geor" typeface="Sylfaen"/>
-      </a:minorFont>
-    </a:fontScheme>
-    <a:fmtScheme name="Office">
-      <a:fillStyleLst>
-        <a:solidFill>
-          <a:schemeClr val="phClr"/>
-        </a:solidFill>
-        <a:gradFill rotWithShape="1">
-          <a:gsLst>
-            <a:gs pos="0">
-              <a:schemeClr val="phClr">
-                <a:tint val="50000"/>
-                <a:satMod val="300000"/>
-              </a:schemeClr>
-            </a:gs>
-            <a:gs pos="35000">
-              <a:schemeClr val="phClr">
-                <a:tint val="37000"/>
-                <a:satMod val="300000"/>
-              </a:schemeClr>
-            </a:gs>
-            <a:gs pos="100000">
-              <a:schemeClr val="phClr">
-                <a:tint val="15000"/>
-                <a:satMod val="350000"/>
-              </a:schemeClr>
-            </a:gs>
-          </a:gsLst>
-          <a:lin ang="16200000" scaled="1"/>
-        </a:gradFill>
-        <a:gradFill rotWithShape="1">
-          <a:gsLst>
-            <a:gs pos="0">
-              <a:schemeClr val="phClr">
-                <a:tint val="100000"/>
-                <a:shade val="100000"/>
-                <a:satMod val="130000"/>
-              </a:schemeClr>
-            </a:gs>
-            <a:gs pos="100000">
-              <a:schemeClr val="phClr">
-                <a:tint val="50000"/>
-                <a:shade val="100000"/>
-                <a:satMod val="350000"/>
-              </a:schemeClr>
-            </a:gs>
-          </a:gsLst>
-          <a:lin ang="16200000" scaled="0"/>
-        </a:gradFill>
-      </a:fillStyleLst>
-      <a:lnStyleLst>
-        <a:ln w="9525" cap="flat" cmpd="sng" algn="ctr">
-          <a:solidFill>
-            <a:schemeClr val="phClr">
-              <a:shade val="95000"/>
-              <a:satMod val="105000"/>
-            </a:schemeClr>
-          </a:solidFill>
-          <a:prstDash val="solid"/>
-        </a:ln>
-        <a:ln w="25400" cap="flat" cmpd="sng" algn="ctr">
-          <a:solidFill>
-            <a:schemeClr val="phClr"/>
-          </a:solidFill>
-          <a:prstDash val="solid"/>
-        </a:ln>
-        <a:ln w="38100" cap="flat" cmpd="sng" algn="ctr">
-          <a:solidFill>
-            <a:schemeClr val="phClr"/>
-          </a:solidFill>
-          <a:prstDash val="solid"/>
-        </a:ln>
-      </a:lnStyleLst>
-      <a:effectStyleLst>
-        <a:effectStyle>
-          <a:effectLst>
-            <a:outerShdw blurRad="40000" dist="20000" dir="5400000" rotWithShape="0">
-              <a:srgbClr val="000000">
-                <a:alpha val="38000"/>
-              </a:srgbClr>
-            </a:outerShdw>
-          </a:effectLst>
-        </a:effectStyle>
-        <a:effectStyle>
-          <a:effectLst>
-            <a:outerShdw blurRad="40000" dist="23000" dir="5400000" rotWithShape="0">
-              <a:srgbClr val="000000">
-                <a:alpha val="35000"/>
-              </a:srgbClr>
-            </a:outerShdw>
-          </a:effectLst>
-        </a:effectStyle>
-        <a:effectStyle>
-          <a:effectLst>
-            <a:outerShdw blurRad="40000" dist="23000" dir="5400000" rotWithShape="0">
-              <a:srgbClr val="000000">
-                <a:alpha val="35000"/>
-              </a:srgbClr>
-            </a:outerShdw>
-          </a:effectLst>
-          <a:scene3d>
-            <a:camera prst="orthographicFront">
-              <a:rot lat="0" lon="0" rev="0"/>
-            </a:camera>
-            <a:lightRig rig="threePt" dir="t">
-              <a:rot lat="0" lon="0" rev="1200000"/>
-            </a:lightRig>
-          </a:scene3d>
-          <a:sp3d>
-            <a:bevelT w="63500" h="25400"/>
-          </a:sp3d>
-        </a:effectStyle>
-      </a:effectStyleLst>
-      <a:bgFillStyleLst>
-        <a:solidFill>
-          <a:schemeClr val="phClr"/>
-        </a:solidFill>
-        <a:gradFill rotWithShape="1">
-          <a:gsLst>
-            <a:gs pos="0">
-              <a:schemeClr val="phClr">
-                <a:tint val="40000"/>
-                <a:satMod val="350000"/>
-              </a:schemeClr>
-            </a:gs>
-            <a:gs pos="40000">
-              <a:schemeClr val="phClr">
-                <a:tint val="45000"/>
-                <a:shade val="99000"/>
-                <a:satMod val="350000"/>
-              </a:schemeClr>
-            </a:gs>
-            <a:gs pos="100000">
-              <a:schemeClr val="phClr">
-                <a:shade val="20000"/>
-                <a:satMod val="255000"/>
-              </a:schemeClr>
-            </a:gs>
-          </a:gsLst>
-          <a:path path="circle">
-            <a:fillToRect l="50000" t="-80000" r="50000" b="180000"/>
-          </a:path>
-        </a:gradFill>
-        <a:gradFill rotWithShape="1">
-          <a:gsLst>
-            <a:gs pos="0">
-              <a:schemeClr val="phClr">
-                <a:tint val="80000"/>
-                <a:satMod val="300000"/>
-              </a:schemeClr>
-            </a:gs>
-            <a:gs pos="100000">
-              <a:schemeClr val="phClr">
-                <a:shade val="30000"/>
-                <a:satMod val="200000"/>
-              </a:schemeClr>
-            </a:gs>
-          </a:gsLst>
-          <a:path path="circle">
-            <a:fillToRect l="50000" t="50000" r="50000" b="50000"/>
-          </a:path>
-        </a:gradFill>
-      </a:bgFillStyleLst>
-    </a:fmtScheme>
-  </a:themeElements>
+  <a:objectDefaults/>
+  <a:extraClrSchemeLst/>
 </a:theme>
 </file>